--- a/presentations/0616_Stablecoin_Exorbitant_Privilege.pptx
+++ b/presentations/0616_Stablecoin_Exorbitant_Privilege.pptx
@@ -12759,7 +12759,7 @@
         <p:spPr>
           <a:xfrm>
             <a:off x="1051560" y="2148840"/>
-            <a:ext cx="10149840" cy="1737360"/>
+            <a:ext cx="10149840" cy="1497330"/>
           </a:xfrm>
           <a:prstGeom prst="rect">
             <a:avLst/>
@@ -12812,7 +12812,25 @@
                 </a:solidFill>
                 <a:latin typeface="Georgia" panose="02040502050405090303"/>
               </a:rPr>
-              <a:t>Robust to controlling auction size and to removing all interpolated reserve controls, and it passes a 2,000-iteration placebo at 3 of 4 maturities (8/13/26-Week). At the individual-auction frequency the association is not detectable, consistent with stablecoin supply being a monthly-frequency variable.</a:t>
+              <a:t>Robust to controlling auction size and to removing all interpolated reserve controls, and it passes a 2,000-</a:t>
+            </a:r>
+            <a:r>
+              <a:rPr lang="en-US" altLang="en-US" sz="1450" b="0">
+                <a:solidFill>
+                  <a:srgbClr val="33425C"/>
+                </a:solidFill>
+                <a:latin typeface="Georgia" panose="02040502050405090303"/>
+              </a:rPr>
+              <a:t>shuffle </a:t>
+            </a:r>
+            <a:r>
+              <a:rPr sz="1450" b="0">
+                <a:solidFill>
+                  <a:srgbClr val="33425C"/>
+                </a:solidFill>
+                <a:latin typeface="Georgia" panose="02040502050405090303"/>
+              </a:rPr>
+              <a:t>placebo at 3 of 4 maturities (8/13/26-Week). At the individual-auction frequency the association is not detectable, consistent with stablecoin supply being a monthly-frequency variable.</a:t>
             </a:r>
             <a:endParaRPr sz="1450" b="0">
               <a:solidFill>

--- a/presentations/0616_Stablecoin_Exorbitant_Privilege.pptx
+++ b/presentations/0616_Stablecoin_Exorbitant_Privilege.pptx
@@ -15643,7 +15643,7 @@
         <p:spPr>
           <a:xfrm>
             <a:off x="548640" y="1787525"/>
-            <a:ext cx="11091545" cy="3204210"/>
+            <a:ext cx="11091545" cy="3258820"/>
           </a:xfrm>
           <a:prstGeom prst="rect">
             <a:avLst/>
@@ -15778,8 +15778,8 @@
         </p:nvSpPr>
         <p:spPr>
           <a:xfrm>
-            <a:off x="805180" y="2185670"/>
-            <a:ext cx="10699750" cy="2785110"/>
+            <a:off x="805180" y="2122170"/>
+            <a:ext cx="10699750" cy="2888615"/>
           </a:xfrm>
           <a:prstGeom prst="rect">
             <a:avLst/>
@@ -15826,9 +15826,18 @@
                 </a:solidFill>
                 <a:latin typeface="Calibri"/>
               </a:rPr>
-              <a:t>→  Tests whether stablecoin supply amplifies spread sensitivity to reserve buffers</a:t>
-            </a:r>
-            <a:endParaRPr sz="1400" b="0">
+              <a:t>→  </a:t>
+            </a:r>
+            <a:r>
+              <a:rPr lang="en-US" altLang="en-US" sz="1400" b="0">
+                <a:solidFill>
+                  <a:srgbClr val="33425C"/>
+                </a:solidFill>
+                <a:latin typeface="Calibri"/>
+              </a:rPr>
+              <a:t>Measures the baseline direct effect of stablecoin supply growth on yield spreads, independent of the buffer level</a:t>
+            </a:r>
+            <a:endParaRPr lang="en-US" altLang="en-US" sz="1400" b="0">
               <a:solidFill>
                 <a:srgbClr val="33425C"/>
               </a:solidFill>
@@ -15844,7 +15853,25 @@
                 </a:solidFill>
                 <a:latin typeface="Calibri"/>
               </a:rPr>
-              <a:t>→  Before: β₁ = −6.02 (p &lt; 0.01) — statistically significant</a:t>
+              <a:t>→  Before: β₁ = </a:t>
+            </a:r>
+            <a:r>
+              <a:rPr lang="en-US" altLang="en-US" sz="1400" b="0">
+                <a:solidFill>
+                  <a:srgbClr val="33425C"/>
+                </a:solidFill>
+                <a:latin typeface="Calibri"/>
+              </a:rPr>
+              <a:t>−7.57 (p = 0.004)</a:t>
+            </a:r>
+            <a:r>
+              <a:rPr sz="1400" b="0">
+                <a:solidFill>
+                  <a:srgbClr val="33425C"/>
+                </a:solidFill>
+                <a:latin typeface="Calibri"/>
+              </a:rPr>
+              <a:t> — statistically significant</a:t>
             </a:r>
             <a:endParaRPr sz="1400" b="0">
               <a:solidFill>
@@ -15924,6 +15951,19 @@
                 <a:spcPts val="200"/>
               </a:spcBef>
             </a:pPr>
+            <a:endParaRPr sz="1400" b="0">
+              <a:solidFill>
+                <a:srgbClr val="33425C"/>
+              </a:solidFill>
+              <a:latin typeface="Calibri"/>
+            </a:endParaRPr>
+          </a:p>
+          <a:p>
+            <a:pPr algn="l">
+              <a:spcBef>
+                <a:spcPts val="200"/>
+              </a:spcBef>
+            </a:pPr>
             <a:r>
               <a:rPr sz="1400" b="0">
                 <a:solidFill>
@@ -15931,7 +15971,7 @@
                 </a:solidFill>
                 <a:latin typeface="Calibri"/>
               </a:rPr>
-              <a:t>→  Tests direct effect of reserve buffers on </a:t>
+              <a:t>→  </a:t>
             </a:r>
             <a:r>
               <a:rPr lang="en-US" altLang="en-US" sz="1400" b="0">
@@ -15940,7 +15980,78 @@
                 </a:solidFill>
                 <a:latin typeface="Calibri"/>
               </a:rPr>
-              <a:t>yield spreads</a:t>
+              <a:t>Tests whether the reserve buffer level amplifies or dampens the effect of stablecoin supply growth on spreads </a:t>
+            </a:r>
+            <a:br>
+              <a:rPr lang="en-US" altLang="en-US" sz="1400" b="0">
+                <a:solidFill>
+                  <a:srgbClr val="33425C"/>
+                </a:solidFill>
+                <a:latin typeface="Calibri"/>
+              </a:rPr>
+            </a:br>
+            <a:r>
+              <a:rPr sz="1400" b="0">
+                <a:solidFill>
+                  <a:srgbClr val="33425C"/>
+                </a:solidFill>
+                <a:latin typeface="Calibri"/>
+              </a:rPr>
+              <a:t>→  Levels regression: β₄ = −35.89 (p = 0.032) — appeared significant</a:t>
+            </a:r>
+            <a:endParaRPr sz="1400" b="0">
+              <a:solidFill>
+                <a:srgbClr val="33425C"/>
+              </a:solidFill>
+              <a:latin typeface="Calibri"/>
+            </a:endParaRPr>
+          </a:p>
+          <a:p>
+            <a:pPr algn="l"/>
+            <a:r>
+              <a:rPr sz="1400" b="1">
+                <a:solidFill>
+                  <a:srgbClr val="E8A12C"/>
+                </a:solidFill>
+                <a:latin typeface="Calibri"/>
+              </a:rPr>
+              <a:t>→  First-differenced: </a:t>
+            </a:r>
+            <a:r>
+              <a:rPr lang="en-US" altLang="en-US" sz="1400" b="1">
+                <a:solidFill>
+                  <a:srgbClr val="E8A12C"/>
+                </a:solidFill>
+                <a:latin typeface="Calibri"/>
+              </a:rPr>
+              <a:t>β₄ = −107 (p = 0.46) — collapses to insignificance</a:t>
+            </a:r>
+            <a:endParaRPr lang="en-US" altLang="en-US" sz="1400" b="1">
+              <a:solidFill>
+                <a:srgbClr val="E8A12C"/>
+              </a:solidFill>
+              <a:latin typeface="Calibri"/>
+            </a:endParaRPr>
+          </a:p>
+          <a:p>
+            <a:pPr algn="l"/>
+            <a:r>
+              <a:rPr sz="1400" b="0">
+                <a:solidFill>
+                  <a:srgbClr val="33425C"/>
+                </a:solidFill>
+                <a:latin typeface="Calibri"/>
+              </a:rPr>
+              <a:t>→  </a:t>
+            </a:r>
+            <a:r>
+              <a:rPr lang="en-US" altLang="en-US" sz="1400" b="0">
+                <a:solidFill>
+                  <a:srgbClr val="33425C"/>
+                </a:solidFill>
+                <a:latin typeface="Calibri"/>
+              </a:rPr>
+              <a:t>Result vanishes under differencing — consistent with spurious regression</a:t>
             </a:r>
             <a:endParaRPr lang="en-US" altLang="en-US" sz="1400" b="0">
               <a:solidFill>
@@ -15951,52 +16062,7 @@
           </a:p>
           <a:p>
             <a:pPr algn="l"/>
-            <a:r>
-              <a:rPr sz="1400" b="0">
-                <a:solidFill>
-                  <a:srgbClr val="33425C"/>
-                </a:solidFill>
-                <a:latin typeface="Calibri"/>
-              </a:rPr>
-              <a:t>→  Levels regression: β₄ = −35.89 (p = 0.032) — appeared significant</a:t>
-            </a:r>
-            <a:endParaRPr sz="1400" b="0">
-              <a:solidFill>
-                <a:srgbClr val="33425C"/>
-              </a:solidFill>
-              <a:latin typeface="Calibri"/>
-            </a:endParaRPr>
-          </a:p>
-          <a:p>
-            <a:pPr algn="l"/>
-            <a:r>
-              <a:rPr sz="1400" b="1">
-                <a:solidFill>
-                  <a:srgbClr val="E8A12C"/>
-                </a:solidFill>
-                <a:latin typeface="Calibri"/>
-              </a:rPr>
-              <a:t>→  First-differenced: β₄ = +8.86 (p = 0.31) — sign reversed, insignificant</a:t>
-            </a:r>
-            <a:endParaRPr sz="1400" b="1">
-              <a:solidFill>
-                <a:srgbClr val="E8A12C"/>
-              </a:solidFill>
-              <a:latin typeface="Calibri"/>
-            </a:endParaRPr>
-          </a:p>
-          <a:p>
-            <a:pPr algn="l"/>
-            <a:r>
-              <a:rPr sz="1400" b="0">
-                <a:solidFill>
-                  <a:srgbClr val="33425C"/>
-                </a:solidFill>
-                <a:latin typeface="Calibri"/>
-              </a:rPr>
-              <a:t>→  Sign reversal under differencing = textbook spurious regression signal</a:t>
-            </a:r>
-            <a:endParaRPr sz="1400" b="0">
+            <a:endParaRPr lang="en-US" altLang="en-US" sz="1400" b="0">
               <a:solidFill>
                 <a:srgbClr val="33425C"/>
               </a:solidFill>
@@ -16266,6 +16332,30 @@
           </a:p>
         </p:txBody>
       </p:sp>
+      <p:pic>
+        <p:nvPicPr>
+          <p:cNvPr id="11" name="Picture 10"/>
+          <p:cNvPicPr>
+            <a:picLocks noChangeAspect="1"/>
+          </p:cNvPicPr>
+          <p:nvPr/>
+        </p:nvPicPr>
+        <p:blipFill>
+          <a:blip r:embed="rId1"/>
+          <a:stretch>
+            <a:fillRect/>
+          </a:stretch>
+        </p:blipFill>
+        <p:spPr>
+          <a:xfrm>
+            <a:off x="7377430" y="2747010"/>
+            <a:ext cx="4127500" cy="1332230"/>
+          </a:xfrm>
+          <a:prstGeom prst="rect">
+            <a:avLst/>
+          </a:prstGeom>
+        </p:spPr>
+      </p:pic>
     </p:spTree>
   </p:cSld>
   <p:clrMapOvr>

--- a/presentations/0616_Stablecoin_Exorbitant_Privilege.pptx
+++ b/presentations/0616_Stablecoin_Exorbitant_Privilege.pptx
@@ -124,7 +124,7 @@
   <p:extLst>
     <p:ext uri="{EFAFB233-063F-42B5-8137-9DF3F51BA10A}">
       <p15:sldGuideLst xmlns:p15="http://schemas.microsoft.com/office/powerpoint/2012/main">
-        <p15:guide id="1" orient="horz" pos="2160" userDrawn="1">
+        <p15:guide id="1" orient="horz" pos="2150" userDrawn="1">
           <p15:clr>
             <a:srgbClr val="A4A3A4"/>
           </p15:clr>
@@ -15594,7 +15594,7 @@
         </p:nvSpPr>
         <p:spPr>
           <a:xfrm>
-            <a:off x="566928" y="1260348"/>
+            <a:off x="566928" y="1113028"/>
             <a:ext cx="11064240" cy="340995"/>
           </a:xfrm>
           <a:prstGeom prst="rect">
@@ -15642,8 +15642,8 @@
         </p:nvSpPr>
         <p:spPr>
           <a:xfrm>
-            <a:off x="548640" y="1787525"/>
-            <a:ext cx="11091545" cy="3258820"/>
+            <a:off x="548640" y="1606550"/>
+            <a:ext cx="11091545" cy="3629025"/>
           </a:xfrm>
           <a:prstGeom prst="rect">
             <a:avLst/>
@@ -15686,8 +15686,8 @@
         </p:nvSpPr>
         <p:spPr>
           <a:xfrm>
-            <a:off x="548640" y="1787525"/>
-            <a:ext cx="90170" cy="3203575"/>
+            <a:off x="548640" y="1606550"/>
+            <a:ext cx="76200" cy="3602355"/>
           </a:xfrm>
           <a:prstGeom prst="rect">
             <a:avLst/>
@@ -15730,7 +15730,7 @@
         </p:nvSpPr>
         <p:spPr>
           <a:xfrm>
-            <a:off x="804672" y="1842897"/>
+            <a:off x="804672" y="1606677"/>
             <a:ext cx="10700000" cy="457200"/>
           </a:xfrm>
           <a:prstGeom prst="rect">
@@ -15778,8 +15778,8 @@
         </p:nvSpPr>
         <p:spPr>
           <a:xfrm>
-            <a:off x="805180" y="2122170"/>
-            <a:ext cx="10699750" cy="2888615"/>
+            <a:off x="822960" y="1911985"/>
+            <a:ext cx="10699750" cy="3308985"/>
           </a:xfrm>
           <a:prstGeom prst="rect">
             <a:avLst/>
@@ -15826,52 +15826,25 @@
                 </a:solidFill>
                 <a:latin typeface="Calibri"/>
               </a:rPr>
-              <a:t>→  </a:t>
-            </a:r>
-            <a:r>
-              <a:rPr lang="en-US" altLang="en-US" sz="1400" b="0">
+              <a:t>→  Measures the baseline direct effect of stablecoin supply growth on yield spreads, independent of the buffer level</a:t>
+            </a:r>
+            <a:endParaRPr sz="1400" b="0">
+              <a:solidFill>
+                <a:srgbClr val="33425C"/>
+              </a:solidFill>
+              <a:latin typeface="Calibri"/>
+            </a:endParaRPr>
+          </a:p>
+          <a:p>
+            <a:pPr algn="l"/>
+            <a:r>
+              <a:rPr sz="1400" b="0">
                 <a:solidFill>
                   <a:srgbClr val="33425C"/>
                 </a:solidFill>
                 <a:latin typeface="Calibri"/>
               </a:rPr>
-              <a:t>Measures the baseline direct effect of stablecoin supply growth on yield spreads, independent of the buffer level</a:t>
-            </a:r>
-            <a:endParaRPr lang="en-US" altLang="en-US" sz="1400" b="0">
-              <a:solidFill>
-                <a:srgbClr val="33425C"/>
-              </a:solidFill>
-              <a:latin typeface="Calibri"/>
-            </a:endParaRPr>
-          </a:p>
-          <a:p>
-            <a:pPr algn="l"/>
-            <a:r>
-              <a:rPr sz="1400" b="0">
-                <a:solidFill>
-                  <a:srgbClr val="33425C"/>
-                </a:solidFill>
-                <a:latin typeface="Calibri"/>
-              </a:rPr>
-              <a:t>→  Before: β₁ = </a:t>
-            </a:r>
-            <a:r>
-              <a:rPr lang="en-US" altLang="en-US" sz="1400" b="0">
-                <a:solidFill>
-                  <a:srgbClr val="33425C"/>
-                </a:solidFill>
-                <a:latin typeface="Calibri"/>
-              </a:rPr>
-              <a:t>−7.57 (p = 0.004)</a:t>
-            </a:r>
-            <a:r>
-              <a:rPr sz="1400" b="0">
-                <a:solidFill>
-                  <a:srgbClr val="33425C"/>
-                </a:solidFill>
-                <a:latin typeface="Calibri"/>
-              </a:rPr>
-              <a:t> — statistically significant</a:t>
+              <a:t>→  Before: β₁ = −7.57 (p = 0.004) — statistically significant</a:t>
             </a:r>
             <a:endParaRPr sz="1400" b="0">
               <a:solidFill>
@@ -15929,6 +15902,22 @@
                 <a:spcPts val="400"/>
               </a:spcAft>
             </a:pPr>
+            <a:endParaRPr sz="1600" b="1">
+              <a:solidFill>
+                <a:srgbClr val="13294B"/>
+              </a:solidFill>
+              <a:latin typeface="Calibri"/>
+            </a:endParaRPr>
+          </a:p>
+          <a:p>
+            <a:pPr algn="l">
+              <a:spcBef>
+                <a:spcPts val="1400"/>
+              </a:spcBef>
+              <a:spcAft>
+                <a:spcPts val="400"/>
+              </a:spcAft>
+            </a:pPr>
             <a:r>
               <a:rPr sz="1600" b="1">
                 <a:solidFill>
@@ -15951,6 +15940,15 @@
                 <a:spcPts val="200"/>
               </a:spcBef>
             </a:pPr>
+            <a:r>
+              <a:rPr sz="1400" b="0">
+                <a:solidFill>
+                  <a:srgbClr val="33425C"/>
+                </a:solidFill>
+                <a:latin typeface="Calibri"/>
+              </a:rPr>
+              <a:t>→  Tests whether the reserve buffer level amplifies or dampens the effect of stablecoin supply growth on spreads</a:t>
+            </a:r>
             <a:endParaRPr sz="1400" b="0">
               <a:solidFill>
                 <a:srgbClr val="33425C"/>
@@ -15959,11 +15957,7 @@
             </a:endParaRPr>
           </a:p>
           <a:p>
-            <a:pPr algn="l">
-              <a:spcBef>
-                <a:spcPts val="200"/>
-              </a:spcBef>
-            </a:pPr>
+            <a:pPr algn="l"/>
             <a:r>
               <a:rPr sz="1400" b="0">
                 <a:solidFill>
@@ -15971,98 +15965,45 @@
                 </a:solidFill>
                 <a:latin typeface="Calibri"/>
               </a:rPr>
-              <a:t>→  </a:t>
-            </a:r>
-            <a:r>
-              <a:rPr lang="en-US" altLang="en-US" sz="1400" b="0">
+              <a:t>→  Levels regression: β₄ = −35.89 (p = 0.032) — appeared significant</a:t>
+            </a:r>
+            <a:endParaRPr sz="1400" b="0">
+              <a:solidFill>
+                <a:srgbClr val="33425C"/>
+              </a:solidFill>
+              <a:latin typeface="Calibri"/>
+            </a:endParaRPr>
+          </a:p>
+          <a:p>
+            <a:pPr algn="l"/>
+            <a:r>
+              <a:rPr sz="1400" b="1">
+                <a:solidFill>
+                  <a:srgbClr val="E8A12C"/>
+                </a:solidFill>
+                <a:latin typeface="Calibri"/>
+              </a:rPr>
+              <a:t>→  First-differenced: β₄ = −107 (p = 0.46) — collapses to insignificance</a:t>
+            </a:r>
+            <a:endParaRPr sz="1400" b="1">
+              <a:solidFill>
+                <a:srgbClr val="E8A12C"/>
+              </a:solidFill>
+              <a:latin typeface="Calibri"/>
+            </a:endParaRPr>
+          </a:p>
+          <a:p>
+            <a:pPr algn="l"/>
+            <a:r>
+              <a:rPr sz="1400" b="0">
                 <a:solidFill>
                   <a:srgbClr val="33425C"/>
                 </a:solidFill>
                 <a:latin typeface="Calibri"/>
               </a:rPr>
-              <a:t>Tests whether the reserve buffer level amplifies or dampens the effect of stablecoin supply growth on spreads </a:t>
-            </a:r>
-            <a:br>
-              <a:rPr lang="en-US" altLang="en-US" sz="1400" b="0">
-                <a:solidFill>
-                  <a:srgbClr val="33425C"/>
-                </a:solidFill>
-                <a:latin typeface="Calibri"/>
-              </a:rPr>
-            </a:br>
-            <a:r>
-              <a:rPr sz="1400" b="0">
-                <a:solidFill>
-                  <a:srgbClr val="33425C"/>
-                </a:solidFill>
-                <a:latin typeface="Calibri"/>
-              </a:rPr>
-              <a:t>→  Levels regression: β₄ = −35.89 (p = 0.032) — appeared significant</a:t>
+              <a:t>→  Result vanishes under differencing — consistent with spurious regression</a:t>
             </a:r>
             <a:endParaRPr sz="1400" b="0">
-              <a:solidFill>
-                <a:srgbClr val="33425C"/>
-              </a:solidFill>
-              <a:latin typeface="Calibri"/>
-            </a:endParaRPr>
-          </a:p>
-          <a:p>
-            <a:pPr algn="l"/>
-            <a:r>
-              <a:rPr sz="1400" b="1">
-                <a:solidFill>
-                  <a:srgbClr val="E8A12C"/>
-                </a:solidFill>
-                <a:latin typeface="Calibri"/>
-              </a:rPr>
-              <a:t>→  First-differenced: </a:t>
-            </a:r>
-            <a:r>
-              <a:rPr lang="en-US" altLang="en-US" sz="1400" b="1">
-                <a:solidFill>
-                  <a:srgbClr val="E8A12C"/>
-                </a:solidFill>
-                <a:latin typeface="Calibri"/>
-              </a:rPr>
-              <a:t>β₄ = −107 (p = 0.46) — collapses to insignificance</a:t>
-            </a:r>
-            <a:endParaRPr lang="en-US" altLang="en-US" sz="1400" b="1">
-              <a:solidFill>
-                <a:srgbClr val="E8A12C"/>
-              </a:solidFill>
-              <a:latin typeface="Calibri"/>
-            </a:endParaRPr>
-          </a:p>
-          <a:p>
-            <a:pPr algn="l"/>
-            <a:r>
-              <a:rPr sz="1400" b="0">
-                <a:solidFill>
-                  <a:srgbClr val="33425C"/>
-                </a:solidFill>
-                <a:latin typeface="Calibri"/>
-              </a:rPr>
-              <a:t>→  </a:t>
-            </a:r>
-            <a:r>
-              <a:rPr lang="en-US" altLang="en-US" sz="1400" b="0">
-                <a:solidFill>
-                  <a:srgbClr val="33425C"/>
-                </a:solidFill>
-                <a:latin typeface="Calibri"/>
-              </a:rPr>
-              <a:t>Result vanishes under differencing — consistent with spurious regression</a:t>
-            </a:r>
-            <a:endParaRPr lang="en-US" altLang="en-US" sz="1400" b="0">
-              <a:solidFill>
-                <a:srgbClr val="33425C"/>
-              </a:solidFill>
-              <a:latin typeface="Calibri"/>
-            </a:endParaRPr>
-          </a:p>
-          <a:p>
-            <a:pPr algn="l"/>
-            <a:endParaRPr lang="en-US" altLang="en-US" sz="1400" b="0">
               <a:solidFill>
                 <a:srgbClr val="33425C"/>
               </a:solidFill>
@@ -16079,8 +16020,8 @@
         </p:nvSpPr>
         <p:spPr>
           <a:xfrm>
-            <a:off x="548640" y="5190280"/>
-            <a:ext cx="11091672" cy="1143000"/>
+            <a:off x="548640" y="5419090"/>
+            <a:ext cx="11091545" cy="986155"/>
           </a:xfrm>
           <a:prstGeom prst="rect">
             <a:avLst/>
@@ -16123,7 +16064,7 @@
         </p:nvSpPr>
         <p:spPr>
           <a:xfrm>
-            <a:off x="822959" y="5285784"/>
+            <a:off x="822959" y="5409609"/>
             <a:ext cx="10543032" cy="349250"/>
           </a:xfrm>
           <a:prstGeom prst="rect">
@@ -16171,7 +16112,7 @@
         </p:nvSpPr>
         <p:spPr>
           <a:xfrm>
-            <a:off x="822960" y="5659120"/>
+            <a:off x="822960" y="5744210"/>
             <a:ext cx="10789285" cy="602615"/>
           </a:xfrm>
           <a:prstGeom prst="rect">
@@ -16348,8 +16289,8 @@
         </p:blipFill>
         <p:spPr>
           <a:xfrm>
-            <a:off x="7377430" y="2747010"/>
-            <a:ext cx="4127500" cy="1332230"/>
+            <a:off x="6903720" y="2593975"/>
+            <a:ext cx="4601210" cy="1485265"/>
           </a:xfrm>
           <a:prstGeom prst="rect">
             <a:avLst/>

--- a/presentations/0616_Stablecoin_Exorbitant_Privilege.pptx
+++ b/presentations/0616_Stablecoin_Exorbitant_Privilege.pptx
@@ -15779,7 +15779,7 @@
         <p:spPr>
           <a:xfrm>
             <a:off x="822960" y="1911985"/>
-            <a:ext cx="10699750" cy="3308985"/>
+            <a:ext cx="5500000" cy="3308985"/>
           </a:xfrm>
           <a:prstGeom prst="rect">
             <a:avLst/>
@@ -15794,11 +15794,11 @@
           <a:p>
             <a:pPr algn="l">
               <a:spcAft>
-                <a:spcPts val="400"/>
-              </a:spcAft>
-            </a:pPr>
-            <a:r>
-              <a:rPr sz="1600" b="1">
+                <a:spcPts val="300"/>
+              </a:spcAft>
+            </a:pPr>
+            <a:r>
+              <a:rPr sz="1400" b="1">
                 <a:solidFill>
                   <a:srgbClr val="13294B"/>
                 </a:solidFill>
@@ -15806,7 +15806,7 @@
               </a:rPr>
               <a:t>β₁ — Privilege Amplification</a:t>
             </a:r>
-            <a:endParaRPr sz="1600" b="1">
+            <a:endParaRPr sz="1400" b="1">
               <a:solidFill>
                 <a:srgbClr val="13294B"/>
               </a:solidFill>
@@ -15820,7 +15820,7 @@
               </a:spcBef>
             </a:pPr>
             <a:r>
-              <a:rPr sz="1400" b="0">
+              <a:rPr sz="1200" b="0">
                 <a:solidFill>
                   <a:srgbClr val="33425C"/>
                 </a:solidFill>
@@ -15828,7 +15828,7 @@
               </a:rPr>
               <a:t>→  Measures the baseline direct effect of stablecoin supply growth on yield spreads, independent of the buffer level</a:t>
             </a:r>
-            <a:endParaRPr sz="1400" b="0">
+            <a:endParaRPr sz="1200" b="0">
               <a:solidFill>
                 <a:srgbClr val="33425C"/>
               </a:solidFill>
@@ -15838,7 +15838,7 @@
           <a:p>
             <a:pPr algn="l"/>
             <a:r>
-              <a:rPr sz="1400" b="0">
+              <a:rPr sz="1200" b="0">
                 <a:solidFill>
                   <a:srgbClr val="33425C"/>
                 </a:solidFill>
@@ -15846,7 +15846,7 @@
               </a:rPr>
               <a:t>→  Before: β₁ = −7.57 (p = 0.004) — statistically significant</a:t>
             </a:r>
-            <a:endParaRPr sz="1400" b="0">
+            <a:endParaRPr sz="1200" b="0">
               <a:solidFill>
                 <a:srgbClr val="33425C"/>
               </a:solidFill>
@@ -15856,7 +15856,7 @@
           <a:p>
             <a:pPr algn="l"/>
             <a:r>
-              <a:rPr sz="1400" b="1">
+              <a:rPr sz="1200" b="1">
                 <a:solidFill>
                   <a:srgbClr val="E8A12C"/>
                 </a:solidFill>
@@ -15864,7 +15864,7 @@
               </a:rPr>
               <a:t>→  After re-run: β₁ = +2.74 — not significant; sign flipped</a:t>
             </a:r>
-            <a:endParaRPr sz="1400" b="1">
+            <a:endParaRPr sz="1200" b="1">
               <a:solidFill>
                 <a:srgbClr val="E8A12C"/>
               </a:solidFill>
@@ -15878,7 +15878,7 @@
               </a:spcAft>
             </a:pPr>
             <a:r>
-              <a:rPr sz="1400" b="0">
+              <a:rPr sz="1200" b="0">
                 <a:solidFill>
                   <a:srgbClr val="33425C"/>
                 </a:solidFill>
@@ -15886,7 +15886,7 @@
               </a:rPr>
               <a:t>→  Verdict: amplification claim does not hold</a:t>
             </a:r>
-            <a:endParaRPr sz="1400" b="0">
+            <a:endParaRPr sz="1200" b="0">
               <a:solidFill>
                 <a:srgbClr val="33425C"/>
               </a:solidFill>
@@ -15896,30 +15896,14 @@
           <a:p>
             <a:pPr algn="l">
               <a:spcBef>
-                <a:spcPts val="1400"/>
+                <a:spcPts val="1200"/>
               </a:spcBef>
               <a:spcAft>
-                <a:spcPts val="400"/>
-              </a:spcAft>
-            </a:pPr>
-            <a:endParaRPr sz="1600" b="1">
-              <a:solidFill>
-                <a:srgbClr val="13294B"/>
-              </a:solidFill>
-              <a:latin typeface="Calibri"/>
-            </a:endParaRPr>
-          </a:p>
-          <a:p>
-            <a:pPr algn="l">
-              <a:spcBef>
-                <a:spcPts val="1400"/>
-              </a:spcBef>
-              <a:spcAft>
-                <a:spcPts val="400"/>
-              </a:spcAft>
-            </a:pPr>
-            <a:r>
-              <a:rPr sz="1600" b="1">
+                <a:spcPts val="300"/>
+              </a:spcAft>
+            </a:pPr>
+            <a:r>
+              <a:rPr sz="1400" b="1">
                 <a:solidFill>
                   <a:srgbClr val="13294B"/>
                 </a:solidFill>
@@ -15927,7 +15911,7 @@
               </a:rPr>
               <a:t>β₄ — Buffer Interaction</a:t>
             </a:r>
-            <a:endParaRPr sz="1600" b="1">
+            <a:endParaRPr sz="1400" b="1">
               <a:solidFill>
                 <a:srgbClr val="13294B"/>
               </a:solidFill>
@@ -15941,7 +15925,7 @@
               </a:spcBef>
             </a:pPr>
             <a:r>
-              <a:rPr sz="1400" b="0">
+              <a:rPr sz="1200" b="0">
                 <a:solidFill>
                   <a:srgbClr val="33425C"/>
                 </a:solidFill>
@@ -15949,7 +15933,7 @@
               </a:rPr>
               <a:t>→  Tests whether the reserve buffer level amplifies or dampens the effect of stablecoin supply growth on spreads</a:t>
             </a:r>
-            <a:endParaRPr sz="1400" b="0">
+            <a:endParaRPr sz="1200" b="0">
               <a:solidFill>
                 <a:srgbClr val="33425C"/>
               </a:solidFill>
@@ -15959,7 +15943,7 @@
           <a:p>
             <a:pPr algn="l"/>
             <a:r>
-              <a:rPr sz="1400" b="0">
+              <a:rPr sz="1200" b="0">
                 <a:solidFill>
                   <a:srgbClr val="33425C"/>
                 </a:solidFill>
@@ -15967,7 +15951,7 @@
               </a:rPr>
               <a:t>→  Levels regression: β₄ = −35.89 (p = 0.032) — appeared significant</a:t>
             </a:r>
-            <a:endParaRPr sz="1400" b="0">
+            <a:endParaRPr sz="1200" b="0">
               <a:solidFill>
                 <a:srgbClr val="33425C"/>
               </a:solidFill>
@@ -15977,7 +15961,7 @@
           <a:p>
             <a:pPr algn="l"/>
             <a:r>
-              <a:rPr sz="1400" b="1">
+              <a:rPr sz="1200" b="1">
                 <a:solidFill>
                   <a:srgbClr val="E8A12C"/>
                 </a:solidFill>
@@ -15985,7 +15969,7 @@
               </a:rPr>
               <a:t>→  First-differenced: β₄ = −107 (p = 0.46) — collapses to insignificance</a:t>
             </a:r>
-            <a:endParaRPr sz="1400" b="1">
+            <a:endParaRPr sz="1200" b="1">
               <a:solidFill>
                 <a:srgbClr val="E8A12C"/>
               </a:solidFill>
@@ -15995,7 +15979,7 @@
           <a:p>
             <a:pPr algn="l"/>
             <a:r>
-              <a:rPr sz="1400" b="0">
+              <a:rPr sz="1200" b="0">
                 <a:solidFill>
                   <a:srgbClr val="33425C"/>
                 </a:solidFill>
@@ -16003,7 +15987,7 @@
               </a:rPr>
               <a:t>→  Result vanishes under differencing — consistent with spurious regression</a:t>
             </a:r>
-            <a:endParaRPr sz="1400" b="0">
+            <a:endParaRPr sz="1200" b="0">
               <a:solidFill>
                 <a:srgbClr val="33425C"/>
               </a:solidFill>
@@ -16273,30 +16257,441 @@
           </a:p>
         </p:txBody>
       </p:sp>
-      <p:pic>
-        <p:nvPicPr>
-          <p:cNvPr id="11" name="Picture 10"/>
-          <p:cNvPicPr>
-            <a:picLocks noChangeAspect="1"/>
-          </p:cNvPicPr>
-          <p:nvPr/>
-        </p:nvPicPr>
-        <p:blipFill>
-          <a:blip r:embed="rId1"/>
-          <a:stretch>
-            <a:fillRect/>
-          </a:stretch>
-        </p:blipFill>
-        <p:spPr>
-          <a:xfrm>
-            <a:off x="6903720" y="2593975"/>
-            <a:ext cx="4601210" cy="1485265"/>
-          </a:xfrm>
-          <a:prstGeom prst="rect">
-            <a:avLst/>
-          </a:prstGeom>
-        </p:spPr>
-      </p:pic>
+      <p:sp>
+        <p:nvSpPr>
+          <p:cNvPr id="20" name="Rectangle 19"/>
+          <p:cNvSpPr/>
+          <p:nvPr/>
+        </p:nvSpPr>
+        <p:spPr>
+          <a:xfrm>
+            <a:off x="6422960" y="1960000"/>
+            <a:ext cx="55000" cy="970000"/>
+          </a:xfrm>
+          <a:prstGeom prst="rect">
+            <a:avLst/>
+          </a:prstGeom>
+          <a:solidFill>
+            <a:srgbClr val="13294B"/>
+          </a:solidFill>
+          <a:ln>
+            <a:noFill/>
+          </a:ln>
+        </p:spPr>
+        <p:style>
+          <a:lnRef idx="1">
+            <a:schemeClr val="accent1"/>
+          </a:lnRef>
+          <a:fillRef idx="3">
+            <a:schemeClr val="accent1"/>
+          </a:fillRef>
+          <a:effectRef idx="2">
+            <a:schemeClr val="accent1"/>
+          </a:effectRef>
+          <a:fontRef idx="minor">
+            <a:schemeClr val="lt1"/>
+          </a:fontRef>
+        </p:style>
+        <p:txBody>
+          <a:bodyPr rtlCol="0" anchor="ctr"/>
+          <a:lstStyle/>
+          <a:p>
+            <a:pPr algn="ctr"/>
+          </a:p>
+        </p:txBody>
+      </p:sp>
+      <p:sp>
+        <p:nvSpPr>
+          <p:cNvPr id="21" name="TextBox 20"/>
+          <p:cNvSpPr txBox="1"/>
+          <p:nvPr/>
+        </p:nvSpPr>
+        <p:spPr>
+          <a:xfrm>
+            <a:off x="6567960" y="2010000"/>
+            <a:ext cx="4912225" cy="934720"/>
+          </a:xfrm>
+          <a:prstGeom prst="rect">
+            <a:avLst/>
+          </a:prstGeom>
+          <a:noFill/>
+        </p:spPr>
+        <p:txBody>
+          <a:bodyPr wrap="square">
+            <a:spAutoFit/>
+          </a:bodyPr>
+          <a:lstStyle/>
+          <a:p>
+            <a:pPr algn="l">
+              <a:spcAft>
+                <a:spcPts val="500"/>
+              </a:spcAft>
+            </a:pPr>
+            <a:r>
+              <a:rPr sz="1050" b="1">
+                <a:solidFill>
+                  <a:srgbClr val="13294B"/>
+                </a:solidFill>
+                <a:latin typeface="Calibri"/>
+              </a:rPr>
+              <a:t>① Original  —  before professor's feedback</a:t>
+            </a:r>
+            <a:endParaRPr sz="1050" b="1">
+              <a:solidFill>
+                <a:srgbClr val="13294B"/>
+              </a:solidFill>
+              <a:latin typeface="Calibri"/>
+            </a:endParaRPr>
+          </a:p>
+          <a:p>
+            <a:pPr algn="l">
+              <a:spcAft>
+                <a:spcPts val="500"/>
+              </a:spcAft>
+            </a:pPr>
+            <a:r>
+              <a:rPr sz="1200" b="0">
+                <a:solidFill>
+                  <a:srgbClr val="33425C"/>
+                </a:solidFill>
+                <a:latin typeface="Calibri"/>
+              </a:rPr>
+              <a:t>Spread = α + β₁·ΔlnS + β₂·θ + β₃·L + β₄·(L×ΔlnS) + controls</a:t>
+            </a:r>
+            <a:endParaRPr sz="1200" b="0">
+              <a:solidFill>
+                <a:srgbClr val="33425C"/>
+              </a:solidFill>
+              <a:latin typeface="Calibri"/>
+            </a:endParaRPr>
+          </a:p>
+          <a:p>
+            <a:pPr algn="l"/>
+            <a:r>
+              <a:rPr sz="1200" b="1">
+                <a:solidFill>
+                  <a:srgbClr val="C1121F"/>
+                </a:solidFill>
+                <a:latin typeface="Calibri"/>
+              </a:rPr>
+              <a:t>β₁ = −7.57   (p = 0.004) ***</a:t>
+            </a:r>
+            <a:br>
+              <a:rPr sz="1200" b="1">
+                <a:solidFill>
+                  <a:srgbClr val="C1121F"/>
+                </a:solidFill>
+                <a:latin typeface="Calibri"/>
+              </a:rPr>
+            </a:br>
+            <a:endParaRPr sz="1200" b="1">
+              <a:solidFill>
+                <a:srgbClr val="C1121F"/>
+              </a:solidFill>
+              <a:latin typeface="Calibri"/>
+              <a:sym typeface="+mn-ea"/>
+            </a:endParaRPr>
+          </a:p>
+        </p:txBody>
+      </p:sp>
+      <p:sp>
+        <p:nvSpPr>
+          <p:cNvPr id="22" name="Rectangle 21"/>
+          <p:cNvSpPr/>
+          <p:nvPr/>
+        </p:nvSpPr>
+        <p:spPr>
+          <a:xfrm>
+            <a:off x="6422960" y="3060000"/>
+            <a:ext cx="55000" cy="1070000"/>
+          </a:xfrm>
+          <a:prstGeom prst="rect">
+            <a:avLst/>
+          </a:prstGeom>
+          <a:solidFill>
+            <a:srgbClr val="1B998B"/>
+          </a:solidFill>
+          <a:ln>
+            <a:noFill/>
+          </a:ln>
+        </p:spPr>
+        <p:style>
+          <a:lnRef idx="1">
+            <a:schemeClr val="accent1"/>
+          </a:lnRef>
+          <a:fillRef idx="3">
+            <a:schemeClr val="accent1"/>
+          </a:fillRef>
+          <a:effectRef idx="2">
+            <a:schemeClr val="accent1"/>
+          </a:effectRef>
+          <a:fontRef idx="minor">
+            <a:schemeClr val="lt1"/>
+          </a:fontRef>
+        </p:style>
+        <p:txBody>
+          <a:bodyPr rtlCol="0" anchor="ctr"/>
+          <a:lstStyle/>
+          <a:p>
+            <a:pPr algn="ctr"/>
+          </a:p>
+        </p:txBody>
+      </p:sp>
+      <p:sp>
+        <p:nvSpPr>
+          <p:cNvPr id="23" name="TextBox 22"/>
+          <p:cNvSpPr txBox="1"/>
+          <p:nvPr/>
+        </p:nvSpPr>
+        <p:spPr>
+          <a:xfrm>
+            <a:off x="6567960" y="3110000"/>
+            <a:ext cx="4912225" cy="973455"/>
+          </a:xfrm>
+          <a:prstGeom prst="rect">
+            <a:avLst/>
+          </a:prstGeom>
+          <a:noFill/>
+        </p:spPr>
+        <p:txBody>
+          <a:bodyPr wrap="square">
+            <a:spAutoFit/>
+          </a:bodyPr>
+          <a:lstStyle/>
+          <a:p>
+            <a:pPr algn="l">
+              <a:spcAft>
+                <a:spcPts val="500"/>
+              </a:spcAft>
+            </a:pPr>
+            <a:r>
+              <a:rPr sz="1050" b="1">
+                <a:solidFill>
+                  <a:srgbClr val="1B998B"/>
+                </a:solidFill>
+                <a:latin typeface="Calibri"/>
+              </a:rPr>
+              <a:t>② Corrected  —  θ dropped (θ+L≈1, collinear), L kept</a:t>
+            </a:r>
+            <a:endParaRPr sz="1050" b="1">
+              <a:solidFill>
+                <a:srgbClr val="1B998B"/>
+              </a:solidFill>
+              <a:latin typeface="Calibri"/>
+            </a:endParaRPr>
+          </a:p>
+          <a:p>
+            <a:pPr algn="l">
+              <a:spcAft>
+                <a:spcPts val="500"/>
+              </a:spcAft>
+            </a:pPr>
+            <a:r>
+              <a:rPr sz="1200" b="0">
+                <a:solidFill>
+                  <a:srgbClr val="33425C"/>
+                </a:solidFill>
+                <a:latin typeface="Calibri"/>
+              </a:rPr>
+              <a:t>Spread = α + β₁·ΔlnS + β₃·L + β₄·(L×ΔlnS) + controls</a:t>
+            </a:r>
+            <a:endParaRPr sz="1200" b="0">
+              <a:solidFill>
+                <a:srgbClr val="33425C"/>
+              </a:solidFill>
+              <a:latin typeface="Calibri"/>
+            </a:endParaRPr>
+          </a:p>
+          <a:p>
+            <a:pPr algn="l">
+              <a:spcAft>
+                <a:spcPts val="300"/>
+              </a:spcAft>
+            </a:pPr>
+            <a:r>
+              <a:rPr sz="1200" b="1">
+                <a:solidFill>
+                  <a:srgbClr val="E8A12C"/>
+                </a:solidFill>
+                <a:latin typeface="Calibri"/>
+              </a:rPr>
+              <a:t>β₁ = +2.74   (p = 0.228)   not significant</a:t>
+            </a:r>
+            <a:endParaRPr sz="1200" b="1">
+              <a:solidFill>
+                <a:srgbClr val="E8A12C"/>
+              </a:solidFill>
+              <a:latin typeface="Calibri"/>
+            </a:endParaRPr>
+          </a:p>
+          <a:p>
+            <a:pPr algn="l"/>
+            <a:r>
+              <a:rPr sz="1200" b="1">
+                <a:solidFill>
+                  <a:srgbClr val="E8A12C"/>
+                </a:solidFill>
+                <a:latin typeface="Calibri"/>
+              </a:rPr>
+              <a:t>β₄ = −35.89  (p = 0.032)   significant in levels</a:t>
+            </a:r>
+            <a:endParaRPr sz="1200" b="1">
+              <a:solidFill>
+                <a:srgbClr val="E8A12C"/>
+              </a:solidFill>
+              <a:latin typeface="Calibri"/>
+            </a:endParaRPr>
+          </a:p>
+        </p:txBody>
+      </p:sp>
+      <p:sp>
+        <p:nvSpPr>
+          <p:cNvPr id="24" name="Rectangle 23"/>
+          <p:cNvSpPr/>
+          <p:nvPr/>
+        </p:nvSpPr>
+        <p:spPr>
+          <a:xfrm>
+            <a:off x="6422960" y="4200000"/>
+            <a:ext cx="55000" cy="970000"/>
+          </a:xfrm>
+          <a:prstGeom prst="rect">
+            <a:avLst/>
+          </a:prstGeom>
+          <a:solidFill>
+            <a:srgbClr val="E8A12C"/>
+          </a:solidFill>
+          <a:ln>
+            <a:noFill/>
+          </a:ln>
+        </p:spPr>
+        <p:style>
+          <a:lnRef idx="1">
+            <a:schemeClr val="accent1"/>
+          </a:lnRef>
+          <a:fillRef idx="3">
+            <a:schemeClr val="accent1"/>
+          </a:fillRef>
+          <a:effectRef idx="2">
+            <a:schemeClr val="accent1"/>
+          </a:effectRef>
+          <a:fontRef idx="minor">
+            <a:schemeClr val="lt1"/>
+          </a:fontRef>
+        </p:style>
+        <p:txBody>
+          <a:bodyPr rtlCol="0" anchor="ctr"/>
+          <a:lstStyle/>
+          <a:p>
+            <a:pPr algn="ctr"/>
+          </a:p>
+        </p:txBody>
+      </p:sp>
+      <p:sp>
+        <p:nvSpPr>
+          <p:cNvPr id="25" name="TextBox 24"/>
+          <p:cNvSpPr txBox="1"/>
+          <p:nvPr/>
+        </p:nvSpPr>
+        <p:spPr>
+          <a:xfrm>
+            <a:off x="6567960" y="4250000"/>
+            <a:ext cx="4912225" cy="750570"/>
+          </a:xfrm>
+          <a:prstGeom prst="rect">
+            <a:avLst/>
+          </a:prstGeom>
+          <a:noFill/>
+        </p:spPr>
+        <p:txBody>
+          <a:bodyPr wrap="square">
+            <a:spAutoFit/>
+          </a:bodyPr>
+          <a:lstStyle/>
+          <a:p>
+            <a:pPr algn="l">
+              <a:spcAft>
+                <a:spcPts val="500"/>
+              </a:spcAft>
+            </a:pPr>
+            <a:r>
+              <a:rPr sz="1050" b="1">
+                <a:solidFill>
+                  <a:srgbClr val="E8A12C"/>
+                </a:solidFill>
+                <a:latin typeface="Calibri"/>
+              </a:rPr>
+              <a:t>③ First-differenced  —  L replaced by ΔL (removes drift)</a:t>
+            </a:r>
+            <a:endParaRPr sz="1050" b="1">
+              <a:solidFill>
+                <a:srgbClr val="E8A12C"/>
+              </a:solidFill>
+              <a:latin typeface="Calibri"/>
+            </a:endParaRPr>
+          </a:p>
+          <a:p>
+            <a:pPr algn="l">
+              <a:spcAft>
+                <a:spcPts val="500"/>
+              </a:spcAft>
+            </a:pPr>
+            <a:r>
+              <a:rPr sz="1200" b="0">
+                <a:solidFill>
+                  <a:srgbClr val="33425C"/>
+                </a:solidFill>
+                <a:latin typeface="Calibri"/>
+              </a:rPr>
+              <a:t>ΔSpread = α + β₁·Δ²lnS + β₃·ΔL + β₄·(ΔL×Δ²lnS) + controls</a:t>
+            </a:r>
+            <a:endParaRPr sz="1200" b="0">
+              <a:solidFill>
+                <a:srgbClr val="33425C"/>
+              </a:solidFill>
+              <a:latin typeface="Calibri"/>
+            </a:endParaRPr>
+          </a:p>
+          <a:p>
+            <a:pPr algn="l"/>
+            <a:r>
+              <a:rPr sz="1200" b="1">
+                <a:solidFill>
+                  <a:srgbClr val="C1121F"/>
+                </a:solidFill>
+                <a:latin typeface="Calibri"/>
+                <a:sym typeface="+mn-ea"/>
+              </a:rPr>
+              <a:t>β₁ = </a:t>
+            </a:r>
+            <a:r>
+              <a:rPr lang="en-US" altLang="en-US" sz="1200" b="1">
+                <a:solidFill>
+                  <a:srgbClr val="C1121F"/>
+                </a:solidFill>
+                <a:latin typeface="Calibri"/>
+                <a:sym typeface="+mn-ea"/>
+              </a:rPr>
+              <a:t>0.82 (p = 0.13)             </a:t>
+            </a:r>
+            <a:r>
+              <a:rPr sz="1200" b="1">
+                <a:solidFill>
+                  <a:srgbClr val="C1121F"/>
+                </a:solidFill>
+                <a:latin typeface="Calibri"/>
+              </a:rPr>
+              <a:t>β₄ = −107   (p = 0.46)  </a:t>
+            </a:r>
+            <a:endParaRPr lang="en-US" altLang="en-US" sz="1200" b="1">
+              <a:solidFill>
+                <a:srgbClr val="C1121F"/>
+              </a:solidFill>
+              <a:latin typeface="Calibri"/>
+            </a:endParaRPr>
+          </a:p>
+        </p:txBody>
+      </p:sp>
     </p:spTree>
   </p:cSld>
   <p:clrMapOvr>

--- a/presentations/0616_Stablecoin_Exorbitant_Privilege.pptx
+++ b/presentations/0616_Stablecoin_Exorbitant_Privilege.pptx
@@ -124,7 +124,7 @@
   <p:extLst>
     <p:ext uri="{EFAFB233-063F-42B5-8137-9DF3F51BA10A}">
       <p15:sldGuideLst xmlns:p15="http://schemas.microsoft.com/office/powerpoint/2012/main">
-        <p15:guide id="1" orient="horz" pos="2150" userDrawn="1">
+        <p15:guide id="1" orient="horz" pos="2160" userDrawn="1">
           <p15:clr>
             <a:srgbClr val="A4A3A4"/>
           </p15:clr>
@@ -19109,7 +19109,7 @@
         <p:spPr>
           <a:xfrm>
             <a:off x="8375904" y="2734056"/>
-            <a:ext cx="3044952" cy="2335530"/>
+            <a:ext cx="3044952" cy="2520315"/>
           </a:xfrm>
           <a:prstGeom prst="rect">
             <a:avLst/>
@@ -19128,15 +19128,15 @@
               </a:spcAft>
             </a:pPr>
             <a:r>
-              <a:rPr sz="1200" b="1">
+              <a:rPr lang="en-US" altLang="en-US" sz="1200" b="1">
                 <a:solidFill>
                   <a:srgbClr val="1B998B"/>
                 </a:solidFill>
                 <a:latin typeface="Calibri"/>
               </a:rPr>
-              <a:t>Independent replication</a:t>
-            </a:r>
-            <a:endParaRPr sz="1200" b="1">
+              <a:t>Cross-verification</a:t>
+            </a:r>
+            <a:endParaRPr lang="en-US" altLang="en-US" sz="1200" b="1">
               <a:solidFill>
                 <a:srgbClr val="1B998B"/>
               </a:solidFill>
@@ -19152,9 +19152,18 @@
                 </a:solidFill>
                 <a:latin typeface="Calibri"/>
               </a:rPr>
-              <a:t>→  Each team member reproduced the full analysis independently</a:t>
-            </a:r>
-            <a:endParaRPr sz="1200" b="0">
+              <a:t>→  </a:t>
+            </a:r>
+            <a:r>
+              <a:rPr lang="en-US" altLang="en-US" sz="1200" b="0">
+                <a:solidFill>
+                  <a:srgbClr val="33425C"/>
+                </a:solidFill>
+                <a:latin typeface="Calibri"/>
+              </a:rPr>
+              <a:t>Each team member ran the full pipeline on their own machine and confirmed results reproduce exactly</a:t>
+            </a:r>
+            <a:endParaRPr lang="en-US" altLang="en-US" sz="1200" b="0">
               <a:solidFill>
                 <a:srgbClr val="33425C"/>
               </a:solidFill>
@@ -19171,15 +19180,15 @@
               </a:spcAft>
             </a:pPr>
             <a:r>
-              <a:rPr sz="1200" b="1">
+              <a:rPr lang="en-US" altLang="en-US" sz="1200" b="1">
                 <a:solidFill>
                   <a:srgbClr val="1B998B"/>
                 </a:solidFill>
                 <a:latin typeface="Calibri"/>
               </a:rPr>
-              <a:t>Reconciliation</a:t>
-            </a:r>
-            <a:endParaRPr sz="1200" b="1">
+              <a:t>Consistency</a:t>
+            </a:r>
+            <a:endParaRPr lang="en-US" altLang="en-US" sz="1200" b="1">
               <a:solidFill>
                 <a:srgbClr val="1B998B"/>
               </a:solidFill>
@@ -19195,9 +19204,18 @@
                 </a:solidFill>
                 <a:latin typeface="Calibri"/>
               </a:rPr>
-              <a:t>→  Results aligned across all specifications and all members</a:t>
-            </a:r>
-            <a:endParaRPr sz="1200" b="0">
+              <a:t>→  </a:t>
+            </a:r>
+            <a:r>
+              <a:rPr lang="en-US" altLang="en-US" sz="1200" b="0">
+                <a:solidFill>
+                  <a:srgbClr val="33425C"/>
+                </a:solidFill>
+                <a:latin typeface="Calibri"/>
+              </a:rPr>
+              <a:t>No discrepancies found across any specification or any run</a:t>
+            </a:r>
+            <a:endParaRPr lang="en-US" altLang="en-US" sz="1200" b="0">
               <a:solidFill>
                 <a:srgbClr val="33425C"/>
               </a:solidFill>

--- a/presentations/0616_Stablecoin_Exorbitant_Privilege.pptx
+++ b/presentations/0616_Stablecoin_Exorbitant_Privilege.pptx
@@ -5,24 +5,24 @@
     <p:sldMasterId id="2147483648" r:id="rId1"/>
   </p:sldMasterIdLst>
   <p:sldIdLst>
-    <p:sldId id="256" r:id="rId3"/>
-    <p:sldId id="257" r:id="rId4"/>
-    <p:sldId id="258" r:id="rId5"/>
-    <p:sldId id="259" r:id="rId6"/>
-    <p:sldId id="273" r:id="rId7"/>
-    <p:sldId id="260" r:id="rId8"/>
-    <p:sldId id="261" r:id="rId9"/>
-    <p:sldId id="262" r:id="rId10"/>
-    <p:sldId id="271" r:id="rId11"/>
-    <p:sldId id="272" r:id="rId12"/>
-    <p:sldId id="263" r:id="rId13"/>
-    <p:sldId id="264" r:id="rId14"/>
-    <p:sldId id="265" r:id="rId15"/>
-    <p:sldId id="266" r:id="rId16"/>
-    <p:sldId id="267" r:id="rId17"/>
-    <p:sldId id="268" r:id="rId18"/>
-    <p:sldId id="269" r:id="rId19"/>
-    <p:sldId id="270" r:id="rId20"/>
+    <p:sldId id="256" r:id="rId2"/>
+    <p:sldId id="257" r:id="rId3"/>
+    <p:sldId id="258" r:id="rId4"/>
+    <p:sldId id="259" r:id="rId5"/>
+    <p:sldId id="273" r:id="rId6"/>
+    <p:sldId id="260" r:id="rId7"/>
+    <p:sldId id="261" r:id="rId8"/>
+    <p:sldId id="262" r:id="rId9"/>
+    <p:sldId id="271" r:id="rId10"/>
+    <p:sldId id="272" r:id="rId11"/>
+    <p:sldId id="263" r:id="rId12"/>
+    <p:sldId id="264" r:id="rId13"/>
+    <p:sldId id="265" r:id="rId14"/>
+    <p:sldId id="266" r:id="rId15"/>
+    <p:sldId id="267" r:id="rId16"/>
+    <p:sldId id="268" r:id="rId17"/>
+    <p:sldId id="269" r:id="rId18"/>
+    <p:sldId id="270" r:id="rId19"/>
   </p:sldIdLst>
   <p:sldSz cx="12188825" cy="6858000"/>
   <p:notesSz cx="6858000" cy="9144000"/>
@@ -181,7 +181,6 @@
               <a:rPr lang="en-US"/>
               <a:t>Click to edit Master title style</a:t>
             </a:r>
-            <a:endParaRPr lang="en-US"/>
           </a:p>
         </p:txBody>
       </p:sp>
@@ -300,7 +299,6 @@
               <a:rPr lang="en-US"/>
               <a:t>Click to edit Master subtitle style</a:t>
             </a:r>
-            <a:endParaRPr lang="en-US"/>
           </a:p>
         </p:txBody>
       </p:sp>
@@ -321,6 +319,7 @@
           <a:p>
             <a:fld id="{5BCAD085-E8A6-8845-BD4E-CB4CCA059FC4}" type="datetimeFigureOut">
               <a:rPr lang="en-US" smtClean="0"/>
+              <a:t>6/16/26</a:t>
             </a:fld>
             <a:endParaRPr lang="en-US"/>
           </a:p>
@@ -362,6 +361,7 @@
           <a:p>
             <a:fld id="{C1FF6DA9-008F-8B48-92A6-B652298478BF}" type="slidenum">
               <a:rPr lang="en-US" smtClean="0"/>
+              <a:t>‹#›</a:t>
             </a:fld>
             <a:endParaRPr lang="en-US"/>
           </a:p>
@@ -411,7 +411,6 @@
               <a:rPr lang="en-US"/>
               <a:t>Click to edit Master title style</a:t>
             </a:r>
-            <a:endParaRPr lang="en-US"/>
           </a:p>
         </p:txBody>
       </p:sp>
@@ -435,7 +434,6 @@
               <a:rPr lang="en-US"/>
               <a:t>Click to edit Master text styles</a:t>
             </a:r>
-            <a:endParaRPr lang="en-US"/>
           </a:p>
           <a:p>
             <a:pPr lvl="1"/>
@@ -443,7 +441,6 @@
               <a:rPr lang="en-US"/>
               <a:t>Second level</a:t>
             </a:r>
-            <a:endParaRPr lang="en-US"/>
           </a:p>
           <a:p>
             <a:pPr lvl="2"/>
@@ -451,7 +448,6 @@
               <a:rPr lang="en-US"/>
               <a:t>Third level</a:t>
             </a:r>
-            <a:endParaRPr lang="en-US"/>
           </a:p>
           <a:p>
             <a:pPr lvl="3"/>
@@ -459,7 +455,6 @@
               <a:rPr lang="en-US"/>
               <a:t>Fourth level</a:t>
             </a:r>
-            <a:endParaRPr lang="en-US"/>
           </a:p>
           <a:p>
             <a:pPr lvl="4"/>
@@ -467,7 +462,6 @@
               <a:rPr lang="en-US"/>
               <a:t>Fifth level</a:t>
             </a:r>
-            <a:endParaRPr lang="en-US"/>
           </a:p>
         </p:txBody>
       </p:sp>
@@ -488,6 +482,7 @@
           <a:p>
             <a:fld id="{5BCAD085-E8A6-8845-BD4E-CB4CCA059FC4}" type="datetimeFigureOut">
               <a:rPr lang="en-US" smtClean="0"/>
+              <a:t>6/16/26</a:t>
             </a:fld>
             <a:endParaRPr lang="en-US"/>
           </a:p>
@@ -529,6 +524,7 @@
           <a:p>
             <a:fld id="{C1FF6DA9-008F-8B48-92A6-B652298478BF}" type="slidenum">
               <a:rPr lang="en-US" smtClean="0"/>
+              <a:t>‹#›</a:t>
             </a:fld>
             <a:endParaRPr lang="en-US"/>
           </a:p>
@@ -583,7 +579,6 @@
               <a:rPr lang="en-US"/>
               <a:t>Click to edit Master title style</a:t>
             </a:r>
-            <a:endParaRPr lang="en-US"/>
           </a:p>
         </p:txBody>
       </p:sp>
@@ -612,7 +607,6 @@
               <a:rPr lang="en-US"/>
               <a:t>Click to edit Master text styles</a:t>
             </a:r>
-            <a:endParaRPr lang="en-US"/>
           </a:p>
           <a:p>
             <a:pPr lvl="1"/>
@@ -620,7 +614,6 @@
               <a:rPr lang="en-US"/>
               <a:t>Second level</a:t>
             </a:r>
-            <a:endParaRPr lang="en-US"/>
           </a:p>
           <a:p>
             <a:pPr lvl="2"/>
@@ -628,7 +621,6 @@
               <a:rPr lang="en-US"/>
               <a:t>Third level</a:t>
             </a:r>
-            <a:endParaRPr lang="en-US"/>
           </a:p>
           <a:p>
             <a:pPr lvl="3"/>
@@ -636,7 +628,6 @@
               <a:rPr lang="en-US"/>
               <a:t>Fourth level</a:t>
             </a:r>
-            <a:endParaRPr lang="en-US"/>
           </a:p>
           <a:p>
             <a:pPr lvl="4"/>
@@ -644,7 +635,6 @@
               <a:rPr lang="en-US"/>
               <a:t>Fifth level</a:t>
             </a:r>
-            <a:endParaRPr lang="en-US"/>
           </a:p>
         </p:txBody>
       </p:sp>
@@ -665,6 +655,7 @@
           <a:p>
             <a:fld id="{5BCAD085-E8A6-8845-BD4E-CB4CCA059FC4}" type="datetimeFigureOut">
               <a:rPr lang="en-US" smtClean="0"/>
+              <a:t>6/16/26</a:t>
             </a:fld>
             <a:endParaRPr lang="en-US"/>
           </a:p>
@@ -706,6 +697,7 @@
           <a:p>
             <a:fld id="{C1FF6DA9-008F-8B48-92A6-B652298478BF}" type="slidenum">
               <a:rPr lang="en-US" smtClean="0"/>
+              <a:t>‹#›</a:t>
             </a:fld>
             <a:endParaRPr lang="en-US"/>
           </a:p>
@@ -755,7 +747,6 @@
               <a:rPr lang="en-US"/>
               <a:t>Click to edit Master title style</a:t>
             </a:r>
-            <a:endParaRPr lang="en-US"/>
           </a:p>
         </p:txBody>
       </p:sp>
@@ -779,7 +770,6 @@
               <a:rPr lang="en-US"/>
               <a:t>Click to edit Master text styles</a:t>
             </a:r>
-            <a:endParaRPr lang="en-US"/>
           </a:p>
           <a:p>
             <a:pPr lvl="1"/>
@@ -787,7 +777,6 @@
               <a:rPr lang="en-US"/>
               <a:t>Second level</a:t>
             </a:r>
-            <a:endParaRPr lang="en-US"/>
           </a:p>
           <a:p>
             <a:pPr lvl="2"/>
@@ -795,7 +784,6 @@
               <a:rPr lang="en-US"/>
               <a:t>Third level</a:t>
             </a:r>
-            <a:endParaRPr lang="en-US"/>
           </a:p>
           <a:p>
             <a:pPr lvl="3"/>
@@ -803,7 +791,6 @@
               <a:rPr lang="en-US"/>
               <a:t>Fourth level</a:t>
             </a:r>
-            <a:endParaRPr lang="en-US"/>
           </a:p>
           <a:p>
             <a:pPr lvl="4"/>
@@ -811,7 +798,6 @@
               <a:rPr lang="en-US"/>
               <a:t>Fifth level</a:t>
             </a:r>
-            <a:endParaRPr lang="en-US"/>
           </a:p>
         </p:txBody>
       </p:sp>
@@ -832,6 +818,7 @@
           <a:p>
             <a:fld id="{5BCAD085-E8A6-8845-BD4E-CB4CCA059FC4}" type="datetimeFigureOut">
               <a:rPr lang="en-US" smtClean="0"/>
+              <a:t>6/16/26</a:t>
             </a:fld>
             <a:endParaRPr lang="en-US"/>
           </a:p>
@@ -873,6 +860,7 @@
           <a:p>
             <a:fld id="{C1FF6DA9-008F-8B48-92A6-B652298478BF}" type="slidenum">
               <a:rPr lang="en-US" smtClean="0"/>
+              <a:t>‹#›</a:t>
             </a:fld>
             <a:endParaRPr lang="en-US"/>
           </a:p>
@@ -931,7 +919,6 @@
               <a:rPr lang="en-US"/>
               <a:t>Click to edit Master title style</a:t>
             </a:r>
-            <a:endParaRPr lang="en-US"/>
           </a:p>
         </p:txBody>
       </p:sp>
@@ -1051,7 +1038,6 @@
               <a:rPr lang="en-US"/>
               <a:t>Click to edit Master text styles</a:t>
             </a:r>
-            <a:endParaRPr lang="en-US"/>
           </a:p>
         </p:txBody>
       </p:sp>
@@ -1072,6 +1058,7 @@
           <a:p>
             <a:fld id="{5BCAD085-E8A6-8845-BD4E-CB4CCA059FC4}" type="datetimeFigureOut">
               <a:rPr lang="en-US" smtClean="0"/>
+              <a:t>6/16/26</a:t>
             </a:fld>
             <a:endParaRPr lang="en-US"/>
           </a:p>
@@ -1113,6 +1100,7 @@
           <a:p>
             <a:fld id="{C1FF6DA9-008F-8B48-92A6-B652298478BF}" type="slidenum">
               <a:rPr lang="en-US" smtClean="0"/>
+              <a:t>‹#›</a:t>
             </a:fld>
             <a:endParaRPr lang="en-US"/>
           </a:p>
@@ -1162,7 +1150,6 @@
               <a:rPr lang="en-US"/>
               <a:t>Click to edit Master title style</a:t>
             </a:r>
-            <a:endParaRPr lang="en-US"/>
           </a:p>
         </p:txBody>
       </p:sp>
@@ -1219,7 +1206,6 @@
               <a:rPr lang="en-US"/>
               <a:t>Click to edit Master text styles</a:t>
             </a:r>
-            <a:endParaRPr lang="en-US"/>
           </a:p>
           <a:p>
             <a:pPr lvl="1"/>
@@ -1227,7 +1213,6 @@
               <a:rPr lang="en-US"/>
               <a:t>Second level</a:t>
             </a:r>
-            <a:endParaRPr lang="en-US"/>
           </a:p>
           <a:p>
             <a:pPr lvl="2"/>
@@ -1235,7 +1220,6 @@
               <a:rPr lang="en-US"/>
               <a:t>Third level</a:t>
             </a:r>
-            <a:endParaRPr lang="en-US"/>
           </a:p>
           <a:p>
             <a:pPr lvl="3"/>
@@ -1243,7 +1227,6 @@
               <a:rPr lang="en-US"/>
               <a:t>Fourth level</a:t>
             </a:r>
-            <a:endParaRPr lang="en-US"/>
           </a:p>
           <a:p>
             <a:pPr lvl="4"/>
@@ -1251,7 +1234,6 @@
               <a:rPr lang="en-US"/>
               <a:t>Fifth level</a:t>
             </a:r>
-            <a:endParaRPr lang="en-US"/>
           </a:p>
         </p:txBody>
       </p:sp>
@@ -1308,7 +1290,6 @@
               <a:rPr lang="en-US"/>
               <a:t>Click to edit Master text styles</a:t>
             </a:r>
-            <a:endParaRPr lang="en-US"/>
           </a:p>
           <a:p>
             <a:pPr lvl="1"/>
@@ -1316,7 +1297,6 @@
               <a:rPr lang="en-US"/>
               <a:t>Second level</a:t>
             </a:r>
-            <a:endParaRPr lang="en-US"/>
           </a:p>
           <a:p>
             <a:pPr lvl="2"/>
@@ -1324,7 +1304,6 @@
               <a:rPr lang="en-US"/>
               <a:t>Third level</a:t>
             </a:r>
-            <a:endParaRPr lang="en-US"/>
           </a:p>
           <a:p>
             <a:pPr lvl="3"/>
@@ -1332,7 +1311,6 @@
               <a:rPr lang="en-US"/>
               <a:t>Fourth level</a:t>
             </a:r>
-            <a:endParaRPr lang="en-US"/>
           </a:p>
           <a:p>
             <a:pPr lvl="4"/>
@@ -1340,7 +1318,6 @@
               <a:rPr lang="en-US"/>
               <a:t>Fifth level</a:t>
             </a:r>
-            <a:endParaRPr lang="en-US"/>
           </a:p>
         </p:txBody>
       </p:sp>
@@ -1361,6 +1338,7 @@
           <a:p>
             <a:fld id="{5BCAD085-E8A6-8845-BD4E-CB4CCA059FC4}" type="datetimeFigureOut">
               <a:rPr lang="en-US" smtClean="0"/>
+              <a:t>6/16/26</a:t>
             </a:fld>
             <a:endParaRPr lang="en-US"/>
           </a:p>
@@ -1402,6 +1380,7 @@
           <a:p>
             <a:fld id="{C1FF6DA9-008F-8B48-92A6-B652298478BF}" type="slidenum">
               <a:rPr lang="en-US" smtClean="0"/>
+              <a:t>‹#›</a:t>
             </a:fld>
             <a:endParaRPr lang="en-US"/>
           </a:p>
@@ -1455,7 +1434,6 @@
               <a:rPr lang="en-US"/>
               <a:t>Click to edit Master title style</a:t>
             </a:r>
-            <a:endParaRPr lang="en-US"/>
           </a:p>
         </p:txBody>
       </p:sp>
@@ -1521,7 +1499,6 @@
               <a:rPr lang="en-US"/>
               <a:t>Click to edit Master text styles</a:t>
             </a:r>
-            <a:endParaRPr lang="en-US"/>
           </a:p>
         </p:txBody>
       </p:sp>
@@ -1578,7 +1555,6 @@
               <a:rPr lang="en-US"/>
               <a:t>Click to edit Master text styles</a:t>
             </a:r>
-            <a:endParaRPr lang="en-US"/>
           </a:p>
           <a:p>
             <a:pPr lvl="1"/>
@@ -1586,7 +1562,6 @@
               <a:rPr lang="en-US"/>
               <a:t>Second level</a:t>
             </a:r>
-            <a:endParaRPr lang="en-US"/>
           </a:p>
           <a:p>
             <a:pPr lvl="2"/>
@@ -1594,7 +1569,6 @@
               <a:rPr lang="en-US"/>
               <a:t>Third level</a:t>
             </a:r>
-            <a:endParaRPr lang="en-US"/>
           </a:p>
           <a:p>
             <a:pPr lvl="3"/>
@@ -1602,7 +1576,6 @@
               <a:rPr lang="en-US"/>
               <a:t>Fourth level</a:t>
             </a:r>
-            <a:endParaRPr lang="en-US"/>
           </a:p>
           <a:p>
             <a:pPr lvl="4"/>
@@ -1610,7 +1583,6 @@
               <a:rPr lang="en-US"/>
               <a:t>Fifth level</a:t>
             </a:r>
-            <a:endParaRPr lang="en-US"/>
           </a:p>
         </p:txBody>
       </p:sp>
@@ -1676,7 +1648,6 @@
               <a:rPr lang="en-US"/>
               <a:t>Click to edit Master text styles</a:t>
             </a:r>
-            <a:endParaRPr lang="en-US"/>
           </a:p>
         </p:txBody>
       </p:sp>
@@ -1733,7 +1704,6 @@
               <a:rPr lang="en-US"/>
               <a:t>Click to edit Master text styles</a:t>
             </a:r>
-            <a:endParaRPr lang="en-US"/>
           </a:p>
           <a:p>
             <a:pPr lvl="1"/>
@@ -1741,7 +1711,6 @@
               <a:rPr lang="en-US"/>
               <a:t>Second level</a:t>
             </a:r>
-            <a:endParaRPr lang="en-US"/>
           </a:p>
           <a:p>
             <a:pPr lvl="2"/>
@@ -1749,7 +1718,6 @@
               <a:rPr lang="en-US"/>
               <a:t>Third level</a:t>
             </a:r>
-            <a:endParaRPr lang="en-US"/>
           </a:p>
           <a:p>
             <a:pPr lvl="3"/>
@@ -1757,7 +1725,6 @@
               <a:rPr lang="en-US"/>
               <a:t>Fourth level</a:t>
             </a:r>
-            <a:endParaRPr lang="en-US"/>
           </a:p>
           <a:p>
             <a:pPr lvl="4"/>
@@ -1765,7 +1732,6 @@
               <a:rPr lang="en-US"/>
               <a:t>Fifth level</a:t>
             </a:r>
-            <a:endParaRPr lang="en-US"/>
           </a:p>
         </p:txBody>
       </p:sp>
@@ -1786,6 +1752,7 @@
           <a:p>
             <a:fld id="{5BCAD085-E8A6-8845-BD4E-CB4CCA059FC4}" type="datetimeFigureOut">
               <a:rPr lang="en-US" smtClean="0"/>
+              <a:t>6/16/26</a:t>
             </a:fld>
             <a:endParaRPr lang="en-US"/>
           </a:p>
@@ -1827,6 +1794,7 @@
           <a:p>
             <a:fld id="{C1FF6DA9-008F-8B48-92A6-B652298478BF}" type="slidenum">
               <a:rPr lang="en-US" smtClean="0"/>
+              <a:t>‹#›</a:t>
             </a:fld>
             <a:endParaRPr lang="en-US"/>
           </a:p>
@@ -1876,7 +1844,6 @@
               <a:rPr lang="en-US"/>
               <a:t>Click to edit Master title style</a:t>
             </a:r>
-            <a:endParaRPr lang="en-US"/>
           </a:p>
         </p:txBody>
       </p:sp>
@@ -1897,6 +1864,7 @@
           <a:p>
             <a:fld id="{5BCAD085-E8A6-8845-BD4E-CB4CCA059FC4}" type="datetimeFigureOut">
               <a:rPr lang="en-US" smtClean="0"/>
+              <a:t>6/16/26</a:t>
             </a:fld>
             <a:endParaRPr lang="en-US"/>
           </a:p>
@@ -1938,6 +1906,7 @@
           <a:p>
             <a:fld id="{C1FF6DA9-008F-8B48-92A6-B652298478BF}" type="slidenum">
               <a:rPr lang="en-US" smtClean="0"/>
+              <a:t>‹#›</a:t>
             </a:fld>
             <a:endParaRPr lang="en-US"/>
           </a:p>
@@ -1985,6 +1954,7 @@
           <a:p>
             <a:fld id="{5BCAD085-E8A6-8845-BD4E-CB4CCA059FC4}" type="datetimeFigureOut">
               <a:rPr lang="en-US" smtClean="0"/>
+              <a:t>6/16/26</a:t>
             </a:fld>
             <a:endParaRPr lang="en-US"/>
           </a:p>
@@ -2026,6 +1996,7 @@
           <a:p>
             <a:fld id="{C1FF6DA9-008F-8B48-92A6-B652298478BF}" type="slidenum">
               <a:rPr lang="en-US" smtClean="0"/>
+              <a:t>‹#›</a:t>
             </a:fld>
             <a:endParaRPr lang="en-US"/>
           </a:p>
@@ -2084,7 +2055,6 @@
               <a:rPr lang="en-US"/>
               <a:t>Click to edit Master title style</a:t>
             </a:r>
-            <a:endParaRPr lang="en-US"/>
           </a:p>
         </p:txBody>
       </p:sp>
@@ -2141,7 +2111,6 @@
               <a:rPr lang="en-US"/>
               <a:t>Click to edit Master text styles</a:t>
             </a:r>
-            <a:endParaRPr lang="en-US"/>
           </a:p>
           <a:p>
             <a:pPr lvl="1"/>
@@ -2149,7 +2118,6 @@
               <a:rPr lang="en-US"/>
               <a:t>Second level</a:t>
             </a:r>
-            <a:endParaRPr lang="en-US"/>
           </a:p>
           <a:p>
             <a:pPr lvl="2"/>
@@ -2157,7 +2125,6 @@
               <a:rPr lang="en-US"/>
               <a:t>Third level</a:t>
             </a:r>
-            <a:endParaRPr lang="en-US"/>
           </a:p>
           <a:p>
             <a:pPr lvl="3"/>
@@ -2165,7 +2132,6 @@
               <a:rPr lang="en-US"/>
               <a:t>Fourth level</a:t>
             </a:r>
-            <a:endParaRPr lang="en-US"/>
           </a:p>
           <a:p>
             <a:pPr lvl="4"/>
@@ -2173,7 +2139,6 @@
               <a:rPr lang="en-US"/>
               <a:t>Fifth level</a:t>
             </a:r>
-            <a:endParaRPr lang="en-US"/>
           </a:p>
         </p:txBody>
       </p:sp>
@@ -2239,7 +2204,6 @@
               <a:rPr lang="en-US"/>
               <a:t>Click to edit Master text styles</a:t>
             </a:r>
-            <a:endParaRPr lang="en-US"/>
           </a:p>
         </p:txBody>
       </p:sp>
@@ -2260,6 +2224,7 @@
           <a:p>
             <a:fld id="{5BCAD085-E8A6-8845-BD4E-CB4CCA059FC4}" type="datetimeFigureOut">
               <a:rPr lang="en-US" smtClean="0"/>
+              <a:t>6/16/26</a:t>
             </a:fld>
             <a:endParaRPr lang="en-US"/>
           </a:p>
@@ -2301,6 +2266,7 @@
           <a:p>
             <a:fld id="{C1FF6DA9-008F-8B48-92A6-B652298478BF}" type="slidenum">
               <a:rPr lang="en-US" smtClean="0"/>
+              <a:t>‹#›</a:t>
             </a:fld>
             <a:endParaRPr lang="en-US"/>
           </a:p>
@@ -2359,7 +2325,6 @@
               <a:rPr lang="en-US"/>
               <a:t>Click to edit Master title style</a:t>
             </a:r>
-            <a:endParaRPr lang="en-US"/>
           </a:p>
         </p:txBody>
       </p:sp>
@@ -2486,7 +2451,6 @@
               <a:rPr lang="en-US"/>
               <a:t>Click to edit Master text styles</a:t>
             </a:r>
-            <a:endParaRPr lang="en-US"/>
           </a:p>
         </p:txBody>
       </p:sp>
@@ -2507,6 +2471,7 @@
           <a:p>
             <a:fld id="{5BCAD085-E8A6-8845-BD4E-CB4CCA059FC4}" type="datetimeFigureOut">
               <a:rPr lang="en-US" smtClean="0"/>
+              <a:t>6/16/26</a:t>
             </a:fld>
             <a:endParaRPr lang="en-US"/>
           </a:p>
@@ -2548,6 +2513,7 @@
           <a:p>
             <a:fld id="{C1FF6DA9-008F-8B48-92A6-B652298478BF}" type="slidenum">
               <a:rPr lang="en-US" smtClean="0"/>
+              <a:t>‹#›</a:t>
             </a:fld>
             <a:endParaRPr lang="en-US"/>
           </a:p>
@@ -2612,7 +2578,6 @@
               <a:rPr lang="en-US"/>
               <a:t>Click to edit Master title style</a:t>
             </a:r>
-            <a:endParaRPr lang="en-US"/>
           </a:p>
         </p:txBody>
       </p:sp>
@@ -2646,7 +2611,6 @@
               <a:rPr lang="en-US"/>
               <a:t>Click to edit Master text styles</a:t>
             </a:r>
-            <a:endParaRPr lang="en-US"/>
           </a:p>
           <a:p>
             <a:pPr lvl="1"/>
@@ -2654,7 +2618,6 @@
               <a:rPr lang="en-US"/>
               <a:t>Second level</a:t>
             </a:r>
-            <a:endParaRPr lang="en-US"/>
           </a:p>
           <a:p>
             <a:pPr lvl="2"/>
@@ -2662,7 +2625,6 @@
               <a:rPr lang="en-US"/>
               <a:t>Third level</a:t>
             </a:r>
-            <a:endParaRPr lang="en-US"/>
           </a:p>
           <a:p>
             <a:pPr lvl="3"/>
@@ -2670,7 +2632,6 @@
               <a:rPr lang="en-US"/>
               <a:t>Fourth level</a:t>
             </a:r>
-            <a:endParaRPr lang="en-US"/>
           </a:p>
           <a:p>
             <a:pPr lvl="4"/>
@@ -2678,7 +2639,6 @@
               <a:rPr lang="en-US"/>
               <a:t>Fifth level</a:t>
             </a:r>
-            <a:endParaRPr lang="en-US"/>
           </a:p>
         </p:txBody>
       </p:sp>
@@ -2717,6 +2677,7 @@
           <a:p>
             <a:fld id="{5BCAD085-E8A6-8845-BD4E-CB4CCA059FC4}" type="datetimeFigureOut">
               <a:rPr lang="en-US" smtClean="0"/>
+              <a:t>6/16/26</a:t>
             </a:fld>
             <a:endParaRPr lang="en-US"/>
           </a:p>
@@ -2794,6 +2755,7 @@
           <a:p>
             <a:fld id="{C1FF6DA9-008F-8B48-92A6-B652298478BF}" type="slidenum">
               <a:rPr lang="en-US" smtClean="0"/>
+              <a:t>‹#›</a:t>
             </a:fld>
             <a:endParaRPr lang="en-US"/>
           </a:p>
@@ -3126,6 +3088,7 @@
           <a:lstStyle/>
           <a:p>
             <a:pPr algn="ctr"/>
+            <a:endParaRPr/>
           </a:p>
         </p:txBody>
       </p:sp>
@@ -3170,6 +3133,7 @@
           <a:lstStyle/>
           <a:p>
             <a:pPr algn="ctr"/>
+            <a:endParaRPr/>
           </a:p>
         </p:txBody>
       </p:sp>
@@ -3214,6 +3178,7 @@
           <a:lstStyle/>
           <a:p>
             <a:pPr algn="ctr"/>
+            <a:endParaRPr/>
           </a:p>
         </p:txBody>
       </p:sp>
@@ -3256,12 +3221,6 @@
               </a:rPr>
               <a:t>YONSEI GSIS   |   TOPICS IN INTERNATIONAL FINANCE</a:t>
             </a:r>
-            <a:endParaRPr sz="1200" b="1">
-              <a:solidFill>
-                <a:srgbClr val="9DB2D6"/>
-              </a:solidFill>
-              <a:latin typeface="Calibri"/>
-            </a:endParaRPr>
           </a:p>
         </p:txBody>
       </p:sp>
@@ -3304,12 +3263,6 @@
               </a:rPr>
               <a:t>Stablecoins and the Exorbitant Privilege</a:t>
             </a:r>
-            <a:endParaRPr sz="3600" b="1" dirty="0">
-              <a:solidFill>
-                <a:srgbClr val="FFFFFF"/>
-              </a:solidFill>
-              <a:latin typeface="Georgia" panose="02040502050405090303"/>
-            </a:endParaRPr>
           </a:p>
         </p:txBody>
       </p:sp>
@@ -3374,12 +3327,6 @@
               </a:rPr>
               <a:t>A Reserve-Composition Channel in the T-Bill Market</a:t>
             </a:r>
-            <a:endParaRPr sz="2000" b="0" dirty="0">
-              <a:solidFill>
-                <a:srgbClr val="CADCFC"/>
-              </a:solidFill>
-              <a:latin typeface="Georgia" panose="02040502050405090303"/>
-            </a:endParaRPr>
           </a:p>
         </p:txBody>
       </p:sp>
@@ -3505,6 +3452,7 @@
           <a:lstStyle/>
           <a:p>
             <a:pPr algn="ctr"/>
+            <a:endParaRPr/>
           </a:p>
         </p:txBody>
       </p:sp>
@@ -3549,6 +3497,7 @@
           <a:lstStyle/>
           <a:p>
             <a:pPr algn="ctr"/>
+            <a:endParaRPr/>
           </a:p>
         </p:txBody>
       </p:sp>
@@ -3591,12 +3540,6 @@
               </a:rPr>
               <a:t>Bid-cover ↓</a:t>
             </a:r>
-            <a:endParaRPr sz="2400" b="1">
-              <a:solidFill>
-                <a:srgbClr val="FFFFFF"/>
-              </a:solidFill>
-              <a:latin typeface="Georgia" panose="02040502050405090303"/>
-            </a:endParaRPr>
           </a:p>
         </p:txBody>
       </p:sp>
@@ -3640,12 +3583,6 @@
               <a:t>USDT supply weakens
 T-bill auction demand</a:t>
             </a:r>
-            <a:endParaRPr sz="1200" b="0">
-              <a:solidFill>
-                <a:srgbClr val="AEC0DD"/>
-              </a:solidFill>
-              <a:latin typeface="Calibri"/>
-            </a:endParaRPr>
           </a:p>
         </p:txBody>
       </p:sp>
@@ -3690,6 +3627,7 @@
           <a:lstStyle/>
           <a:p>
             <a:pPr algn="ctr"/>
+            <a:endParaRPr/>
           </a:p>
         </p:txBody>
       </p:sp>
@@ -3734,6 +3672,7 @@
           <a:lstStyle/>
           <a:p>
             <a:pPr algn="ctr"/>
+            <a:endParaRPr/>
           </a:p>
         </p:txBody>
       </p:sp>
@@ -3776,12 +3715,6 @@
               </a:rPr>
               <a:t>USDT ≠ USDC</a:t>
             </a:r>
-            <a:endParaRPr sz="2400" b="1">
-              <a:solidFill>
-                <a:srgbClr val="FFFFFF"/>
-              </a:solidFill>
-              <a:latin typeface="Georgia" panose="02040502050405090303"/>
-            </a:endParaRPr>
           </a:p>
         </p:txBody>
       </p:sp>
@@ -3825,12 +3758,6 @@
               <a:t>A reserve-composition
 channel, issuer-specific</a:t>
             </a:r>
-            <a:endParaRPr sz="1200" b="0">
-              <a:solidFill>
-                <a:srgbClr val="AEC0DD"/>
-              </a:solidFill>
-              <a:latin typeface="Calibri"/>
-            </a:endParaRPr>
           </a:p>
         </p:txBody>
       </p:sp>
@@ -3875,6 +3802,7 @@
           <a:lstStyle/>
           <a:p>
             <a:pPr algn="ctr"/>
+            <a:endParaRPr/>
           </a:p>
         </p:txBody>
       </p:sp>
@@ -3919,6 +3847,7 @@
           <a:lstStyle/>
           <a:p>
             <a:pPr algn="ctr"/>
+            <a:endParaRPr/>
           </a:p>
         </p:txBody>
       </p:sp>
@@ -3961,12 +3890,6 @@
               </a:rPr>
               <a:t>Robust</a:t>
             </a:r>
-            <a:endParaRPr sz="2400" b="1">
-              <a:solidFill>
-                <a:srgbClr val="FFFFFF"/>
-              </a:solidFill>
-              <a:latin typeface="Georgia" panose="02040502050405090303"/>
-            </a:endParaRPr>
           </a:p>
         </p:txBody>
       </p:sp>
@@ -4010,12 +3933,6 @@
               <a:t>Survives every
 stress-test we ran</a:t>
             </a:r>
-            <a:endParaRPr sz="1200" b="0">
-              <a:solidFill>
-                <a:srgbClr val="AEC0DD"/>
-              </a:solidFill>
-              <a:latin typeface="Calibri"/>
-            </a:endParaRPr>
           </a:p>
         </p:txBody>
       </p:sp>
@@ -4085,6 +4002,7 @@
           <a:lstStyle/>
           <a:p>
             <a:pPr algn="ctr"/>
+            <a:endParaRPr/>
           </a:p>
         </p:txBody>
       </p:sp>
@@ -4129,6 +4047,7 @@
           <a:lstStyle/>
           <a:p>
             <a:pPr algn="ctr"/>
+            <a:endParaRPr/>
           </a:p>
         </p:txBody>
       </p:sp>
@@ -4170,11 +4089,6 @@
               </a:rPr>
               <a:t>ROBUSTNESS</a:t>
             </a:r>
-            <a:endParaRPr sz="1200" b="1">
-              <a:solidFill>
-                <a:srgbClr val="1B998B"/>
-              </a:solidFill>
-            </a:endParaRPr>
           </a:p>
         </p:txBody>
       </p:sp>
@@ -4216,11 +4130,6 @@
               </a:rPr>
               <a:t>Drop-2022 Subsample — Result Strengthens Without Crypto-Crisis Noise</a:t>
             </a:r>
-            <a:endParaRPr sz="2200" b="1">
-              <a:solidFill>
-                <a:srgbClr val="13294B"/>
-              </a:solidFill>
-            </a:endParaRPr>
           </a:p>
         </p:txBody>
       </p:sp>
@@ -4254,6 +4163,7 @@
                 <a:spcPts val="300"/>
               </a:spcAft>
             </a:pPr>
+            <a:endParaRPr/>
           </a:p>
         </p:txBody>
       </p:sp>
@@ -4298,6 +4208,7 @@
           <a:lstStyle/>
           <a:p>
             <a:pPr algn="ctr"/>
+            <a:endParaRPr/>
           </a:p>
         </p:txBody>
       </p:sp>
@@ -4339,11 +4250,6 @@
               </a:rPr>
               <a:t>Maturity</a:t>
             </a:r>
-            <a:endParaRPr sz="1300" b="1">
-              <a:solidFill>
-                <a:srgbClr val="FFFFFF"/>
-              </a:solidFill>
-            </a:endParaRPr>
           </a:p>
         </p:txBody>
       </p:sp>
@@ -4388,6 +4294,7 @@
           <a:lstStyle/>
           <a:p>
             <a:pPr algn="ctr"/>
+            <a:endParaRPr/>
           </a:p>
         </p:txBody>
       </p:sp>
@@ -4429,11 +4336,6 @@
               </a:rPr>
               <a:t>Full sample (N=51)</a:t>
             </a:r>
-            <a:endParaRPr sz="1300" b="1">
-              <a:solidFill>
-                <a:srgbClr val="FFFFFF"/>
-              </a:solidFill>
-            </a:endParaRPr>
           </a:p>
         </p:txBody>
       </p:sp>
@@ -4478,6 +4380,7 @@
           <a:lstStyle/>
           <a:p>
             <a:pPr algn="ctr"/>
+            <a:endParaRPr/>
           </a:p>
         </p:txBody>
       </p:sp>
@@ -4519,11 +4422,6 @@
               </a:rPr>
               <a:t>Drop-2022 (N=39)</a:t>
             </a:r>
-            <a:endParaRPr sz="1300" b="1">
-              <a:solidFill>
-                <a:srgbClr val="FFFFFF"/>
-              </a:solidFill>
-            </a:endParaRPr>
           </a:p>
         </p:txBody>
       </p:sp>
@@ -4568,6 +4466,7 @@
           <a:lstStyle/>
           <a:p>
             <a:pPr algn="ctr"/>
+            <a:endParaRPr/>
           </a:p>
         </p:txBody>
       </p:sp>
@@ -4609,11 +4508,6 @@
               </a:rPr>
               <a:t>Direction</a:t>
             </a:r>
-            <a:endParaRPr sz="1300" b="1">
-              <a:solidFill>
-                <a:srgbClr val="FFFFFF"/>
-              </a:solidFill>
-            </a:endParaRPr>
           </a:p>
         </p:txBody>
       </p:sp>
@@ -4658,6 +4552,7 @@
           <a:lstStyle/>
           <a:p>
             <a:pPr algn="ctr"/>
+            <a:endParaRPr/>
           </a:p>
         </p:txBody>
       </p:sp>
@@ -4699,11 +4594,6 @@
               </a:rPr>
               <a:t>4-Week</a:t>
             </a:r>
-            <a:endParaRPr sz="1350" b="0">
-              <a:solidFill>
-                <a:srgbClr val="33425C"/>
-              </a:solidFill>
-            </a:endParaRPr>
           </a:p>
         </p:txBody>
       </p:sp>
@@ -4748,6 +4638,7 @@
           <a:lstStyle/>
           <a:p>
             <a:pPr algn="ctr"/>
+            <a:endParaRPr/>
           </a:p>
         </p:txBody>
       </p:sp>
@@ -4789,11 +4680,6 @@
               </a:rPr>
               <a:t>−0.61 ns</a:t>
             </a:r>
-            <a:endParaRPr sz="1350" b="0">
-              <a:solidFill>
-                <a:srgbClr val="5B6B82"/>
-              </a:solidFill>
-            </a:endParaRPr>
           </a:p>
         </p:txBody>
       </p:sp>
@@ -4838,6 +4724,7 @@
           <a:lstStyle/>
           <a:p>
             <a:pPr algn="ctr"/>
+            <a:endParaRPr/>
           </a:p>
         </p:txBody>
       </p:sp>
@@ -4879,11 +4766,6 @@
               </a:rPr>
               <a:t>−1.495 ***</a:t>
             </a:r>
-            <a:endParaRPr sz="1350" b="1">
-              <a:solidFill>
-                <a:srgbClr val="1B998B"/>
-              </a:solidFill>
-            </a:endParaRPr>
           </a:p>
         </p:txBody>
       </p:sp>
@@ -4928,6 +4810,7 @@
           <a:lstStyle/>
           <a:p>
             <a:pPr algn="ctr"/>
+            <a:endParaRPr/>
           </a:p>
         </p:txBody>
       </p:sp>
@@ -4969,11 +4852,6 @@
               </a:rPr>
               <a:t>Strengthens ↑</a:t>
             </a:r>
-            <a:endParaRPr sz="1350" b="1">
-              <a:solidFill>
-                <a:srgbClr val="1B998B"/>
-              </a:solidFill>
-            </a:endParaRPr>
           </a:p>
         </p:txBody>
       </p:sp>
@@ -5018,6 +4896,7 @@
           <a:lstStyle/>
           <a:p>
             <a:pPr algn="ctr"/>
+            <a:endParaRPr/>
           </a:p>
         </p:txBody>
       </p:sp>
@@ -5059,11 +4938,6 @@
               </a:rPr>
               <a:t>8-Week</a:t>
             </a:r>
-            <a:endParaRPr sz="1350" b="0">
-              <a:solidFill>
-                <a:srgbClr val="33425C"/>
-              </a:solidFill>
-            </a:endParaRPr>
           </a:p>
         </p:txBody>
       </p:sp>
@@ -5108,6 +4982,7 @@
           <a:lstStyle/>
           <a:p>
             <a:pPr algn="ctr"/>
+            <a:endParaRPr/>
           </a:p>
         </p:txBody>
       </p:sp>
@@ -5149,11 +5024,6 @@
               </a:rPr>
               <a:t>−1.33 ***</a:t>
             </a:r>
-            <a:endParaRPr sz="1350" b="1">
-              <a:solidFill>
-                <a:srgbClr val="1B998B"/>
-              </a:solidFill>
-            </a:endParaRPr>
           </a:p>
         </p:txBody>
       </p:sp>
@@ -5198,6 +5068,7 @@
           <a:lstStyle/>
           <a:p>
             <a:pPr algn="ctr"/>
+            <a:endParaRPr/>
           </a:p>
         </p:txBody>
       </p:sp>
@@ -5239,11 +5110,6 @@
               </a:rPr>
               <a:t>−1.129 *</a:t>
             </a:r>
-            <a:endParaRPr sz="1350" b="0">
-              <a:solidFill>
-                <a:srgbClr val="5B6B82"/>
-              </a:solidFill>
-            </a:endParaRPr>
           </a:p>
         </p:txBody>
       </p:sp>
@@ -5288,6 +5154,7 @@
           <a:lstStyle/>
           <a:p>
             <a:pPr algn="ctr"/>
+            <a:endParaRPr/>
           </a:p>
         </p:txBody>
       </p:sp>
@@ -5329,11 +5196,6 @@
               </a:rPr>
               <a:t>Stable →</a:t>
             </a:r>
-            <a:endParaRPr sz="1350" b="0">
-              <a:solidFill>
-                <a:srgbClr val="5B6B82"/>
-              </a:solidFill>
-            </a:endParaRPr>
           </a:p>
         </p:txBody>
       </p:sp>
@@ -5378,6 +5240,7 @@
           <a:lstStyle/>
           <a:p>
             <a:pPr algn="ctr"/>
+            <a:endParaRPr/>
           </a:p>
         </p:txBody>
       </p:sp>
@@ -5419,11 +5282,6 @@
               </a:rPr>
               <a:t>13-Week</a:t>
             </a:r>
-            <a:endParaRPr sz="1350" b="0">
-              <a:solidFill>
-                <a:srgbClr val="33425C"/>
-              </a:solidFill>
-            </a:endParaRPr>
           </a:p>
         </p:txBody>
       </p:sp>
@@ -5468,6 +5326,7 @@
           <a:lstStyle/>
           <a:p>
             <a:pPr algn="ctr"/>
+            <a:endParaRPr/>
           </a:p>
         </p:txBody>
       </p:sp>
@@ -5509,11 +5368,6 @@
               </a:rPr>
               <a:t>−1.51 ***</a:t>
             </a:r>
-            <a:endParaRPr sz="1350" b="1">
-              <a:solidFill>
-                <a:srgbClr val="1B998B"/>
-              </a:solidFill>
-            </a:endParaRPr>
           </a:p>
         </p:txBody>
       </p:sp>
@@ -5558,6 +5412,7 @@
           <a:lstStyle/>
           <a:p>
             <a:pPr algn="ctr"/>
+            <a:endParaRPr/>
           </a:p>
         </p:txBody>
       </p:sp>
@@ -5599,11 +5454,6 @@
               </a:rPr>
               <a:t>−0.975 *</a:t>
             </a:r>
-            <a:endParaRPr sz="1350" b="0">
-              <a:solidFill>
-                <a:srgbClr val="5B6B82"/>
-              </a:solidFill>
-            </a:endParaRPr>
           </a:p>
         </p:txBody>
       </p:sp>
@@ -5648,6 +5498,7 @@
           <a:lstStyle/>
           <a:p>
             <a:pPr algn="ctr"/>
+            <a:endParaRPr/>
           </a:p>
         </p:txBody>
       </p:sp>
@@ -5689,11 +5540,6 @@
               </a:rPr>
               <a:t>Stable →</a:t>
             </a:r>
-            <a:endParaRPr sz="1350" b="0">
-              <a:solidFill>
-                <a:srgbClr val="5B6B82"/>
-              </a:solidFill>
-            </a:endParaRPr>
           </a:p>
         </p:txBody>
       </p:sp>
@@ -5738,6 +5584,7 @@
           <a:lstStyle/>
           <a:p>
             <a:pPr algn="ctr"/>
+            <a:endParaRPr/>
           </a:p>
         </p:txBody>
       </p:sp>
@@ -5779,11 +5626,6 @@
               </a:rPr>
               <a:t>26-Week</a:t>
             </a:r>
-            <a:endParaRPr sz="1350" b="0">
-              <a:solidFill>
-                <a:srgbClr val="33425C"/>
-              </a:solidFill>
-            </a:endParaRPr>
           </a:p>
         </p:txBody>
       </p:sp>
@@ -5828,6 +5670,7 @@
           <a:lstStyle/>
           <a:p>
             <a:pPr algn="ctr"/>
+            <a:endParaRPr/>
           </a:p>
         </p:txBody>
       </p:sp>
@@ -5869,11 +5712,6 @@
               </a:rPr>
               <a:t>−1.53 ***</a:t>
             </a:r>
-            <a:endParaRPr sz="1350" b="1">
-              <a:solidFill>
-                <a:srgbClr val="1B998B"/>
-              </a:solidFill>
-            </a:endParaRPr>
           </a:p>
         </p:txBody>
       </p:sp>
@@ -5918,6 +5756,7 @@
           <a:lstStyle/>
           <a:p>
             <a:pPr algn="ctr"/>
+            <a:endParaRPr/>
           </a:p>
         </p:txBody>
       </p:sp>
@@ -5959,11 +5798,6 @@
               </a:rPr>
               <a:t>−1.702 ***</a:t>
             </a:r>
-            <a:endParaRPr sz="1350" b="1">
-              <a:solidFill>
-                <a:srgbClr val="1B998B"/>
-              </a:solidFill>
-            </a:endParaRPr>
           </a:p>
         </p:txBody>
       </p:sp>
@@ -6008,6 +5842,7 @@
           <a:lstStyle/>
           <a:p>
             <a:pPr algn="ctr"/>
+            <a:endParaRPr/>
           </a:p>
         </p:txBody>
       </p:sp>
@@ -6049,11 +5884,6 @@
               </a:rPr>
               <a:t>Strengthens ↑</a:t>
             </a:r>
-            <a:endParaRPr sz="1350" b="1">
-              <a:solidFill>
-                <a:srgbClr val="1B998B"/>
-              </a:solidFill>
-            </a:endParaRPr>
           </a:p>
         </p:txBody>
       </p:sp>
@@ -6098,6 +5928,7 @@
           <a:lstStyle/>
           <a:p>
             <a:pPr algn="ctr"/>
+            <a:endParaRPr/>
           </a:p>
         </p:txBody>
       </p:sp>
@@ -6139,11 +5970,6 @@
               </a:rPr>
               <a:t>Reading the result</a:t>
             </a:r>
-            <a:endParaRPr sz="1400" b="1">
-              <a:solidFill>
-                <a:srgbClr val="E8A12C"/>
-              </a:solidFill>
-            </a:endParaRPr>
           </a:p>
         </p:txBody>
       </p:sp>
@@ -6185,11 +6011,6 @@
               </a:rPr>
               <a:t>2022 crypto crises (LUNA, Celsius, FTX) created non-fundamental supply noise. Dropping them: 4-Week and 26-Week strengthen markedly; 8/13-Week remain in the same range. The channel is cleaner in the non-crisis period — consistent with the reserve-composition mechanism.</a:t>
             </a:r>
-            <a:endParaRPr sz="1350" b="0">
-              <a:solidFill>
-                <a:srgbClr val="FFFFFF"/>
-              </a:solidFill>
-            </a:endParaRPr>
           </a:p>
         </p:txBody>
       </p:sp>
@@ -6231,11 +6052,6 @@
               </a:rPr>
               <a:t>Stablecoins &amp; the Exorbitant Privilege</a:t>
             </a:r>
-            <a:endParaRPr sz="900" b="0">
-              <a:solidFill>
-                <a:srgbClr val="5B6B82"/>
-              </a:solidFill>
-            </a:endParaRPr>
           </a:p>
         </p:txBody>
       </p:sp>
@@ -6271,12 +6087,6 @@
               </a:rPr>
               <a:t>10</a:t>
             </a:r>
-            <a:endParaRPr sz="1100" b="0">
-              <a:solidFill>
-                <a:srgbClr val="5B6B82"/>
-              </a:solidFill>
-              <a:latin typeface="Calibri"/>
-            </a:endParaRPr>
           </a:p>
         </p:txBody>
       </p:sp>
@@ -6311,11 +6121,6 @@
               </a:rPr>
               <a:t>BC_{m,t} = αₘ + β_USDT · ΔlnS^USDT_t + β_USDC · ΔlnS^USDC_t + δₘ · ln(Offering_{m,t}) + γ₁ · VIX_t + γ₂ · Δfedfunds_t + ε_t</a:t>
             </a:r>
-            <a:endParaRPr sz="1300" b="1">
-              <a:solidFill>
-                <a:srgbClr val="13294B"/>
-              </a:solidFill>
-            </a:endParaRPr>
           </a:p>
           <a:p>
             <a:pPr algn="ctr"/>
@@ -6327,11 +6132,6 @@
               </a:rPr>
               <a:t>Spec C. N = 51 (full) vs N = 39 (drop-2022). Newey-West HAC(1).</a:t>
             </a:r>
-            <a:endParaRPr lang="en-US" sz="1050" b="0">
-              <a:solidFill>
-                <a:srgbClr val="5B6B82"/>
-              </a:solidFill>
-            </a:endParaRPr>
           </a:p>
         </p:txBody>
       </p:sp>
@@ -6401,6 +6201,7 @@
           <a:lstStyle/>
           <a:p>
             <a:pPr algn="ctr"/>
+            <a:endParaRPr/>
           </a:p>
         </p:txBody>
       </p:sp>
@@ -6445,6 +6246,7 @@
           <a:lstStyle/>
           <a:p>
             <a:pPr algn="ctr"/>
+            <a:endParaRPr/>
           </a:p>
         </p:txBody>
       </p:sp>
@@ -6487,12 +6289,6 @@
               </a:rPr>
               <a:t>AN HONEST CAVEAT</a:t>
             </a:r>
-            <a:endParaRPr sz="1200" b="1">
-              <a:solidFill>
-                <a:srgbClr val="1B998B"/>
-              </a:solidFill>
-              <a:latin typeface="Calibri"/>
-            </a:endParaRPr>
           </a:p>
         </p:txBody>
       </p:sp>
@@ -6535,12 +6331,6 @@
               </a:rPr>
               <a:t>Frequency, Not Absence</a:t>
             </a:r>
-            <a:endParaRPr sz="2700" b="1">
-              <a:solidFill>
-                <a:srgbClr val="13294B"/>
-              </a:solidFill>
-              <a:latin typeface="Georgia" panose="02040502050405090303"/>
-            </a:endParaRPr>
           </a:p>
         </p:txBody>
       </p:sp>
@@ -6583,12 +6373,6 @@
               </a:rPr>
               <a:t>Why the appropriate unit of analysis is the month</a:t>
             </a:r>
-            <a:endParaRPr sz="1550" b="0">
-              <a:solidFill>
-                <a:srgbClr val="5B6B82"/>
-              </a:solidFill>
-              <a:latin typeface="Georgia" panose="02040502050405090303"/>
-            </a:endParaRPr>
           </a:p>
         </p:txBody>
       </p:sp>
@@ -6633,6 +6417,7 @@
           <a:lstStyle/>
           <a:p>
             <a:pPr algn="ctr"/>
+            <a:endParaRPr/>
           </a:p>
         </p:txBody>
       </p:sp>
@@ -6677,6 +6462,7 @@
           <a:lstStyle/>
           <a:p>
             <a:pPr algn="ctr"/>
+            <a:endParaRPr/>
           </a:p>
         </p:txBody>
       </p:sp>
@@ -6719,12 +6505,6 @@
               </a:rPr>
               <a:t>At the auction level, no signal</a:t>
             </a:r>
-            <a:endParaRPr sz="1700" b="1">
-              <a:solidFill>
-                <a:srgbClr val="13294B"/>
-              </a:solidFill>
-              <a:latin typeface="Georgia" panose="02040502050405090303"/>
-            </a:endParaRPr>
           </a:p>
         </p:txBody>
       </p:sp>
@@ -6767,12 +6547,6 @@
               </a:rPr>
               <a:t>Run auction by auction (N = 1,094), the USDT coefficient is not significant. Taken alone this looks like a non-result.</a:t>
             </a:r>
-            <a:endParaRPr sz="1350" b="0">
-              <a:solidFill>
-                <a:srgbClr val="33425C"/>
-              </a:solidFill>
-              <a:latin typeface="Calibri"/>
-            </a:endParaRPr>
           </a:p>
         </p:txBody>
       </p:sp>
@@ -6817,6 +6591,7 @@
           <a:lstStyle/>
           <a:p>
             <a:pPr algn="ctr"/>
+            <a:endParaRPr/>
           </a:p>
         </p:txBody>
       </p:sp>
@@ -6861,6 +6636,7 @@
           <a:lstStyle/>
           <a:p>
             <a:pPr algn="ctr"/>
+            <a:endParaRPr/>
           </a:p>
         </p:txBody>
       </p:sp>
@@ -6903,12 +6679,6 @@
               </a:rPr>
               <a:t>Why — a frequency mismatch</a:t>
             </a:r>
-            <a:endParaRPr sz="1700" b="1">
-              <a:solidFill>
-                <a:srgbClr val="1B998B"/>
-              </a:solidFill>
-              <a:latin typeface="Georgia" panose="02040502050405090303"/>
-            </a:endParaRPr>
           </a:p>
         </p:txBody>
       </p:sp>
@@ -6951,12 +6721,6 @@
               </a:rPr>
               <a:t>Stablecoin supply is a monthly series: ~86% of its variation is between months, ~17% within. The same monthly value repeats across ~17 auctions a month, and the pre-auction windows overlap. So N = 1,094 carries only ~51 independent supply observations. The right unit for a monthly regressor is the month — where the effect is significant.</a:t>
             </a:r>
-            <a:endParaRPr sz="1350" b="0">
-              <a:solidFill>
-                <a:srgbClr val="33425C"/>
-              </a:solidFill>
-              <a:latin typeface="Calibri"/>
-            </a:endParaRPr>
           </a:p>
         </p:txBody>
       </p:sp>
@@ -7001,6 +6765,7 @@
           <a:lstStyle/>
           <a:p>
             <a:pPr algn="ctr"/>
+            <a:endParaRPr/>
           </a:p>
         </p:txBody>
       </p:sp>
@@ -7043,12 +6808,6 @@
               </a:rPr>
               <a:t>Bottom line</a:t>
             </a:r>
-            <a:endParaRPr sz="1400" b="1">
-              <a:solidFill>
-                <a:srgbClr val="E8A12C"/>
-              </a:solidFill>
-              <a:latin typeface="Georgia" panose="02040502050405090303"/>
-            </a:endParaRPr>
           </a:p>
         </p:txBody>
       </p:sp>
@@ -7091,12 +6850,6 @@
               </a:rPr>
               <a:t>The auction-level null is the expected consequence of a frequency mismatch — not evidence against the channel.</a:t>
             </a:r>
-            <a:endParaRPr sz="1400" b="0">
-              <a:solidFill>
-                <a:srgbClr val="FFFFFF"/>
-              </a:solidFill>
-              <a:latin typeface="Calibri"/>
-            </a:endParaRPr>
           </a:p>
         </p:txBody>
       </p:sp>
@@ -7139,12 +6892,6 @@
               </a:rPr>
               <a:t>Stablecoins &amp; the Exorbitant Privilege</a:t>
             </a:r>
-            <a:endParaRPr sz="900" b="0">
-              <a:solidFill>
-                <a:srgbClr val="5B6B82"/>
-              </a:solidFill>
-              <a:latin typeface="Calibri"/>
-            </a:endParaRPr>
           </a:p>
         </p:txBody>
       </p:sp>
@@ -7180,12 +6927,6 @@
               </a:rPr>
               <a:t>11</a:t>
             </a:r>
-            <a:endParaRPr sz="1100" b="0">
-              <a:solidFill>
-                <a:srgbClr val="5B6B82"/>
-              </a:solidFill>
-              <a:latin typeface="Calibri"/>
-            </a:endParaRPr>
           </a:p>
         </p:txBody>
       </p:sp>
@@ -7255,6 +6996,7 @@
           <a:lstStyle/>
           <a:p>
             <a:pPr algn="ctr"/>
+            <a:endParaRPr/>
           </a:p>
         </p:txBody>
       </p:sp>
@@ -7299,6 +7041,7 @@
           <a:lstStyle/>
           <a:p>
             <a:pPr algn="ctr"/>
+            <a:endParaRPr/>
           </a:p>
         </p:txBody>
       </p:sp>
@@ -7341,12 +7084,6 @@
               </a:rPr>
               <a:t>SUPPORTING EVIDENCE &amp; MOTIVATION</a:t>
             </a:r>
-            <a:endParaRPr sz="1200" b="1">
-              <a:solidFill>
-                <a:srgbClr val="1B998B"/>
-              </a:solidFill>
-              <a:latin typeface="Calibri"/>
-            </a:endParaRPr>
           </a:p>
         </p:txBody>
       </p:sp>
@@ -7389,12 +7126,6 @@
               </a:rPr>
               <a:t>Two Secondary Checks</a:t>
             </a:r>
-            <a:endParaRPr sz="2700" b="1">
-              <a:solidFill>
-                <a:srgbClr val="13294B"/>
-              </a:solidFill>
-              <a:latin typeface="Georgia" panose="02040502050405090303"/>
-            </a:endParaRPr>
           </a:p>
         </p:txBody>
       </p:sp>
@@ -7437,12 +7168,6 @@
               </a:rPr>
               <a:t>Daily impulse responses, and an event study used as motivation</a:t>
             </a:r>
-            <a:endParaRPr sz="1550" b="0">
-              <a:solidFill>
-                <a:srgbClr val="5B6B82"/>
-              </a:solidFill>
-              <a:latin typeface="Georgia" panose="02040502050405090303"/>
-            </a:endParaRPr>
           </a:p>
         </p:txBody>
       </p:sp>
@@ -7487,6 +7212,7 @@
           <a:lstStyle/>
           <a:p>
             <a:pPr algn="ctr"/>
+            <a:endParaRPr/>
           </a:p>
         </p:txBody>
       </p:sp>
@@ -7531,6 +7257,7 @@
           <a:lstStyle/>
           <a:p>
             <a:pPr algn="ctr"/>
+            <a:endParaRPr/>
           </a:p>
         </p:txBody>
       </p:sp>
@@ -7573,12 +7300,6 @@
               </a:rPr>
               <a:t>Daily VAR / impulse response</a:t>
             </a:r>
-            <a:endParaRPr sz="1500" b="1">
-              <a:solidFill>
-                <a:srgbClr val="13294B"/>
-              </a:solidFill>
-              <a:latin typeface="Georgia" panose="02040502050405090303"/>
-            </a:endParaRPr>
           </a:p>
         </p:txBody>
       </p:sp>
@@ -7591,7 +7312,7 @@
           <p:nvPr/>
         </p:nvPicPr>
         <p:blipFill>
-          <a:blip r:embed="rId1"/>
+          <a:blip r:embed="rId2"/>
           <a:stretch>
             <a:fillRect/>
           </a:stretch>
@@ -7645,12 +7366,6 @@
               </a:rPr>
               <a:t>USDT supply Granger-causes spread (p = 0.020); day-1 IRF = −0.672 bps, reverting by day 3. USDT/USDC shocks explain 1.3% of spread variance (FEVD, 20-day). Consistent with a real but transient channel — supporting, not primary, evidence.</a:t>
             </a:r>
-            <a:endParaRPr sz="1150" b="0" dirty="0">
-              <a:solidFill>
-                <a:srgbClr val="33425C"/>
-              </a:solidFill>
-              <a:latin typeface="Calibri"/>
-            </a:endParaRPr>
           </a:p>
         </p:txBody>
       </p:sp>
@@ -7695,6 +7410,7 @@
           <a:lstStyle/>
           <a:p>
             <a:pPr algn="ctr"/>
+            <a:endParaRPr/>
           </a:p>
         </p:txBody>
       </p:sp>
@@ -7739,6 +7455,7 @@
           <a:lstStyle/>
           <a:p>
             <a:pPr algn="ctr"/>
+            <a:endParaRPr/>
           </a:p>
         </p:txBody>
       </p:sp>
@@ -7781,12 +7498,6 @@
               </a:rPr>
               <a:t>Multi-event study (motivation)</a:t>
             </a:r>
-            <a:endParaRPr sz="1500" b="1">
-              <a:solidFill>
-                <a:srgbClr val="E8A12C"/>
-              </a:solidFill>
-              <a:latin typeface="Georgia" panose="02040502050405090303"/>
-            </a:endParaRPr>
           </a:p>
         </p:txBody>
       </p:sp>
@@ -7799,7 +7510,7 @@
           <p:nvPr/>
         </p:nvPicPr>
         <p:blipFill>
-          <a:blip r:embed="rId2"/>
+          <a:blip r:embed="rId3"/>
           <a:stretch>
             <a:fillRect/>
           </a:stretch>
@@ -7853,12 +7564,6 @@
               </a:rPr>
               <a:t>LUNA · Celsius · FTX · BUSD (SVB dropped — confounded). Events disagree in sign; pooled p = 0.43 → no systematic effect. Narrative motivation, not identification.</a:t>
             </a:r>
-            <a:endParaRPr sz="1150" b="0">
-              <a:solidFill>
-                <a:srgbClr val="33425C"/>
-              </a:solidFill>
-              <a:latin typeface="Calibri"/>
-            </a:endParaRPr>
           </a:p>
         </p:txBody>
       </p:sp>
@@ -7901,12 +7606,6 @@
               </a:rPr>
               <a:t>Stablecoins &amp; the Exorbitant Privilege</a:t>
             </a:r>
-            <a:endParaRPr sz="900" b="0">
-              <a:solidFill>
-                <a:srgbClr val="5B6B82"/>
-              </a:solidFill>
-              <a:latin typeface="Calibri"/>
-            </a:endParaRPr>
           </a:p>
         </p:txBody>
       </p:sp>
@@ -7942,12 +7641,6 @@
               </a:rPr>
               <a:t>12</a:t>
             </a:r>
-            <a:endParaRPr sz="1100" b="0">
-              <a:solidFill>
-                <a:srgbClr val="5B6B82"/>
-              </a:solidFill>
-              <a:latin typeface="Calibri"/>
-            </a:endParaRPr>
           </a:p>
         </p:txBody>
       </p:sp>
@@ -8017,6 +7710,7 @@
           <a:lstStyle/>
           <a:p>
             <a:pPr algn="ctr"/>
+            <a:endParaRPr/>
           </a:p>
         </p:txBody>
       </p:sp>
@@ -8061,6 +7755,7 @@
           <a:lstStyle/>
           <a:p>
             <a:pPr algn="ctr"/>
+            <a:endParaRPr/>
           </a:p>
         </p:txBody>
       </p:sp>
@@ -8103,12 +7798,6 @@
               </a:rPr>
               <a:t>LIMITATIONS</a:t>
             </a:r>
-            <a:endParaRPr sz="1200" b="1">
-              <a:solidFill>
-                <a:srgbClr val="1B998B"/>
-              </a:solidFill>
-              <a:latin typeface="Calibri"/>
-            </a:endParaRPr>
           </a:p>
         </p:txBody>
       </p:sp>
@@ -8151,12 +7840,6 @@
               </a:rPr>
               <a:t>Why the Results Had to Change</a:t>
             </a:r>
-            <a:endParaRPr sz="2700" b="1">
-              <a:solidFill>
-                <a:srgbClr val="13294B"/>
-              </a:solidFill>
-              <a:latin typeface="Georgia" panose="02040502050405090303"/>
-            </a:endParaRPr>
           </a:p>
         </p:txBody>
       </p:sp>
@@ -8199,12 +7882,6 @@
               </a:rPr>
               <a:t>The feedback exposed three constraints that bind any study of this market today</a:t>
             </a:r>
-            <a:endParaRPr sz="1550" b="0">
-              <a:solidFill>
-                <a:srgbClr val="5B6B82"/>
-              </a:solidFill>
-              <a:latin typeface="Georgia" panose="02040502050405090303"/>
-            </a:endParaRPr>
           </a:p>
         </p:txBody>
       </p:sp>
@@ -8249,6 +7926,7 @@
           <a:lstStyle/>
           <a:p>
             <a:pPr algn="ctr"/>
+            <a:endParaRPr/>
           </a:p>
         </p:txBody>
       </p:sp>
@@ -8293,6 +7971,7 @@
           <a:lstStyle/>
           <a:p>
             <a:pPr algn="ctr"/>
+            <a:endParaRPr/>
           </a:p>
         </p:txBody>
       </p:sp>
@@ -8335,12 +8014,6 @@
               </a:rPr>
               <a:t>One macro regime</a:t>
             </a:r>
-            <a:endParaRPr sz="1600" b="1">
-              <a:solidFill>
-                <a:srgbClr val="C1121F"/>
-              </a:solidFill>
-              <a:latin typeface="Georgia" panose="02040502050405090303"/>
-            </a:endParaRPr>
           </a:p>
         </p:txBody>
       </p:sp>
@@ -8383,12 +8056,6 @@
               </a:rPr>
               <a:t>Our 51 months are dominated by a single Fed hiking cycle and its unwind. Trending variables correlate mechanically, so a levels regression flatters any hypothesis — ours included. Removing θ and the forward-fill took away the props; the stationarity tests did the rest.</a:t>
             </a:r>
-            <a:endParaRPr sz="1250" b="0">
-              <a:solidFill>
-                <a:srgbClr val="33425C"/>
-              </a:solidFill>
-              <a:latin typeface="Calibri"/>
-            </a:endParaRPr>
           </a:p>
         </p:txBody>
       </p:sp>
@@ -8433,6 +8100,7 @@
           <a:lstStyle/>
           <a:p>
             <a:pPr algn="ctr"/>
+            <a:endParaRPr/>
           </a:p>
         </p:txBody>
       </p:sp>
@@ -8477,6 +8145,7 @@
           <a:lstStyle/>
           <a:p>
             <a:pPr algn="ctr"/>
+            <a:endParaRPr/>
           </a:p>
         </p:txBody>
       </p:sp>
@@ -8519,12 +8188,6 @@
               </a:rPr>
               <a:t>Reserves are unobserved</a:t>
             </a:r>
-            <a:endParaRPr sz="1600" b="1">
-              <a:solidFill>
-                <a:srgbClr val="13294B"/>
-              </a:solidFill>
-              <a:latin typeface="Georgia" panose="02040502050405090303"/>
-            </a:endParaRPr>
           </a:p>
         </p:txBody>
       </p:sp>
@@ -8567,12 +8230,6 @@
               </a:rPr>
               <a:t>Tether attests quarterly: roughly two-thirds of the monthly reserve ratios are interpolation, and the estimated threshold moved 13% → 6.6% just by changing the fill method. The buffer-fragility hypothesis is currently untestable at monthly frequency — not false.</a:t>
             </a:r>
-            <a:endParaRPr sz="1250" b="0">
-              <a:solidFill>
-                <a:srgbClr val="33425C"/>
-              </a:solidFill>
-              <a:latin typeface="Calibri"/>
-            </a:endParaRPr>
           </a:p>
         </p:txBody>
       </p:sp>
@@ -8617,6 +8274,7 @@
           <a:lstStyle/>
           <a:p>
             <a:pPr algn="ctr"/>
+            <a:endParaRPr/>
           </a:p>
         </p:txBody>
       </p:sp>
@@ -8661,6 +8319,7 @@
           <a:lstStyle/>
           <a:p>
             <a:pPr algn="ctr"/>
+            <a:endParaRPr/>
           </a:p>
         </p:txBody>
       </p:sp>
@@ -8703,12 +8362,6 @@
               </a:rPr>
               <a:t>A hard power ceiling</a:t>
             </a:r>
-            <a:endParaRPr sz="1600" b="1">
-              <a:solidFill>
-                <a:srgbClr val="E8A12C"/>
-              </a:solidFill>
-              <a:latin typeface="Georgia" panose="02040502050405090303"/>
-            </a:endParaRPr>
           </a:p>
         </p:txBody>
       </p:sp>
@@ -8751,12 +8404,6 @@
               </a:rPr>
               <a:t>Two issuers, 51 months, no natural experiment. Controls, an issuer foil, and a placebo are the strongest identification available here — and supply shocks still explain only ~1.3% of spread variance. These are limits of the setting, not of the specification.</a:t>
             </a:r>
-            <a:endParaRPr sz="1250" b="0">
-              <a:solidFill>
-                <a:srgbClr val="33425C"/>
-              </a:solidFill>
-              <a:latin typeface="Calibri"/>
-            </a:endParaRPr>
           </a:p>
         </p:txBody>
       </p:sp>
@@ -8801,6 +8448,7 @@
           <a:lstStyle/>
           <a:p>
             <a:pPr algn="ctr"/>
+            <a:endParaRPr/>
           </a:p>
         </p:txBody>
       </p:sp>
@@ -8843,12 +8491,6 @@
               </a:rPr>
               <a:t>The honest reading</a:t>
             </a:r>
-            <a:endParaRPr sz="1400" b="1">
-              <a:solidFill>
-                <a:srgbClr val="E8A12C"/>
-              </a:solidFill>
-              <a:latin typeface="Georgia" panose="02040502050405090303"/>
-            </a:endParaRPr>
           </a:p>
         </p:txBody>
       </p:sp>
@@ -8891,12 +8533,6 @@
               </a:rPr>
               <a:t>The feedback did not break good results — it revealed which results this data could never have supported.</a:t>
             </a:r>
-            <a:endParaRPr sz="1400" b="0">
-              <a:solidFill>
-                <a:srgbClr val="FFFFFF"/>
-              </a:solidFill>
-              <a:latin typeface="Calibri"/>
-            </a:endParaRPr>
           </a:p>
         </p:txBody>
       </p:sp>
@@ -8939,12 +8575,6 @@
               </a:rPr>
               <a:t>Stablecoins &amp; the Exorbitant Privilege</a:t>
             </a:r>
-            <a:endParaRPr sz="900" b="0">
-              <a:solidFill>
-                <a:srgbClr val="5B6B82"/>
-              </a:solidFill>
-              <a:latin typeface="Calibri"/>
-            </a:endParaRPr>
           </a:p>
         </p:txBody>
       </p:sp>
@@ -8980,12 +8610,6 @@
               </a:rPr>
               <a:t>13</a:t>
             </a:r>
-            <a:endParaRPr sz="1100" b="0">
-              <a:solidFill>
-                <a:srgbClr val="5B6B82"/>
-              </a:solidFill>
-              <a:latin typeface="Calibri"/>
-            </a:endParaRPr>
           </a:p>
         </p:txBody>
       </p:sp>
@@ -9055,6 +8679,7 @@
           <a:lstStyle/>
           <a:p>
             <a:pPr algn="ctr"/>
+            <a:endParaRPr/>
           </a:p>
         </p:txBody>
       </p:sp>
@@ -9099,6 +8724,7 @@
           <a:lstStyle/>
           <a:p>
             <a:pPr algn="ctr"/>
+            <a:endParaRPr/>
           </a:p>
         </p:txBody>
       </p:sp>
@@ -9141,12 +8767,6 @@
               </a:rPr>
               <a:t>LIMITATIONS</a:t>
             </a:r>
-            <a:endParaRPr sz="1200" b="1">
-              <a:solidFill>
-                <a:srgbClr val="1B998B"/>
-              </a:solidFill>
-              <a:latin typeface="Calibri"/>
-            </a:endParaRPr>
           </a:p>
         </p:txBody>
       </p:sp>
@@ -9189,12 +8809,6 @@
               </a:rPr>
               <a:t>What We Can — and Cannot — Claim</a:t>
             </a:r>
-            <a:endParaRPr sz="2700" b="1">
-              <a:solidFill>
-                <a:srgbClr val="13294B"/>
-              </a:solidFill>
-              <a:latin typeface="Georgia" panose="02040502050405090303"/>
-            </a:endParaRPr>
           </a:p>
         </p:txBody>
       </p:sp>
@@ -9237,12 +8851,6 @@
               </a:rPr>
               <a:t>Drawing the boundary precisely is part of the result</a:t>
             </a:r>
-            <a:endParaRPr sz="1550" b="0">
-              <a:solidFill>
-                <a:srgbClr val="5B6B82"/>
-              </a:solidFill>
-              <a:latin typeface="Georgia" panose="02040502050405090303"/>
-            </a:endParaRPr>
           </a:p>
         </p:txBody>
       </p:sp>
@@ -9287,6 +8895,7 @@
           <a:lstStyle/>
           <a:p>
             <a:pPr algn="ctr"/>
+            <a:endParaRPr/>
           </a:p>
         </p:txBody>
       </p:sp>
@@ -9331,6 +8940,7 @@
           <a:lstStyle/>
           <a:p>
             <a:pPr algn="ctr"/>
+            <a:endParaRPr/>
           </a:p>
         </p:txBody>
       </p:sp>
@@ -9373,12 +8983,6 @@
               </a:rPr>
               <a:t>Supported by the data</a:t>
             </a:r>
-            <a:endParaRPr sz="1700" b="1">
-              <a:solidFill>
-                <a:srgbClr val="1B998B"/>
-              </a:solidFill>
-              <a:latin typeface="Georgia" panose="02040502050405090303"/>
-            </a:endParaRPr>
           </a:p>
         </p:txBody>
       </p:sp>
@@ -9430,12 +9034,6 @@
               </a:rPr>
               <a:t>USDT supply growth is associated with weaker T-bill auction demand — robust to every check we ran</a:t>
             </a:r>
-            <a:endParaRPr sz="1350" b="0" dirty="0">
-              <a:solidFill>
-                <a:srgbClr val="33425C"/>
-              </a:solidFill>
-              <a:latin typeface="Calibri"/>
-            </a:endParaRPr>
           </a:p>
           <a:p>
             <a:pPr algn="l">
@@ -9464,12 +9062,6 @@
               </a:rPr>
               <a:t>The channel is issuer-specific (USDT ≠ USDC), consistent with reserve composition</a:t>
             </a:r>
-            <a:endParaRPr sz="1350" b="0" dirty="0">
-              <a:solidFill>
-                <a:srgbClr val="33425C"/>
-              </a:solidFill>
-              <a:latin typeface="Calibri"/>
-            </a:endParaRPr>
           </a:p>
           <a:p>
             <a:pPr algn="l">
@@ -9498,12 +9090,6 @@
               </a:rPr>
               <a:t>The structural fact: programmatic T-bill purchases at sovereign-holder scale</a:t>
             </a:r>
-            <a:endParaRPr sz="1350" b="0" dirty="0">
-              <a:solidFill>
-                <a:srgbClr val="33425C"/>
-              </a:solidFill>
-              <a:latin typeface="Calibri"/>
-            </a:endParaRPr>
           </a:p>
         </p:txBody>
       </p:sp>
@@ -9548,6 +9134,7 @@
           <a:lstStyle/>
           <a:p>
             <a:pPr algn="ctr"/>
+            <a:endParaRPr/>
           </a:p>
         </p:txBody>
       </p:sp>
@@ -9592,6 +9179,7 @@
           <a:lstStyle/>
           <a:p>
             <a:pPr algn="ctr"/>
+            <a:endParaRPr/>
           </a:p>
         </p:txBody>
       </p:sp>
@@ -9634,12 +9222,6 @@
               </a:rPr>
               <a:t>Beyond the data — for now</a:t>
             </a:r>
-            <a:endParaRPr sz="1700" b="1">
-              <a:solidFill>
-                <a:srgbClr val="C1121F"/>
-              </a:solidFill>
-              <a:latin typeface="Georgia" panose="02040502050405090303"/>
-            </a:endParaRPr>
           </a:p>
         </p:txBody>
       </p:sp>
@@ -9691,12 +9273,6 @@
               </a:rPr>
               <a:t>A causal privilege effect in yield levels (β₁): one rate cycle cannot identify it</a:t>
             </a:r>
-            <a:endParaRPr sz="1350" b="0">
-              <a:solidFill>
-                <a:srgbClr val="33425C"/>
-              </a:solidFill>
-              <a:latin typeface="Calibri"/>
-            </a:endParaRPr>
           </a:p>
           <a:p>
             <a:pPr algn="l">
@@ -9725,12 +9301,6 @@
               </a:rPr>
               <a:t>A reserve-buffer threshold (≈13%): reserves are not observed at monthly frequency</a:t>
             </a:r>
-            <a:endParaRPr sz="1350" b="0">
-              <a:solidFill>
-                <a:srgbClr val="33425C"/>
-              </a:solidFill>
-              <a:latin typeface="Calibri"/>
-            </a:endParaRPr>
           </a:p>
           <a:p>
             <a:pPr algn="l">
@@ -9759,12 +9329,6 @@
               </a:rPr>
               <a:t>Run-scenario fragility: no clean redemption episode in sample (SVB is confounded)</a:t>
             </a:r>
-            <a:endParaRPr sz="1350" b="0">
-              <a:solidFill>
-                <a:srgbClr val="33425C"/>
-              </a:solidFill>
-              <a:latin typeface="Calibri"/>
-            </a:endParaRPr>
           </a:p>
         </p:txBody>
       </p:sp>
@@ -9809,6 +9373,7 @@
           <a:lstStyle/>
           <a:p>
             <a:pPr algn="ctr"/>
+            <a:endParaRPr/>
           </a:p>
         </p:txBody>
       </p:sp>
@@ -9851,12 +9416,6 @@
               </a:rPr>
               <a:t>Untested is not rejected</a:t>
             </a:r>
-            <a:endParaRPr sz="1400" b="1">
-              <a:solidFill>
-                <a:srgbClr val="E8A12C"/>
-              </a:solidFill>
-              <a:latin typeface="Georgia" panose="02040502050405090303"/>
-            </a:endParaRPr>
           </a:p>
         </p:txBody>
       </p:sp>
@@ -9899,12 +9458,6 @@
               </a:rPr>
               <a:t>The question is ahead of its data — and the data is catching up.</a:t>
             </a:r>
-            <a:endParaRPr sz="1400" b="0">
-              <a:solidFill>
-                <a:srgbClr val="FFFFFF"/>
-              </a:solidFill>
-              <a:latin typeface="Calibri"/>
-            </a:endParaRPr>
           </a:p>
         </p:txBody>
       </p:sp>
@@ -9947,12 +9500,6 @@
               </a:rPr>
               <a:t>Stablecoins &amp; the Exorbitant Privilege</a:t>
             </a:r>
-            <a:endParaRPr sz="900" b="0">
-              <a:solidFill>
-                <a:srgbClr val="5B6B82"/>
-              </a:solidFill>
-              <a:latin typeface="Calibri"/>
-            </a:endParaRPr>
           </a:p>
         </p:txBody>
       </p:sp>
@@ -9988,12 +9535,6 @@
               </a:rPr>
               <a:t>14</a:t>
             </a:r>
-            <a:endParaRPr sz="1100" b="0">
-              <a:solidFill>
-                <a:srgbClr val="5B6B82"/>
-              </a:solidFill>
-              <a:latin typeface="Calibri"/>
-            </a:endParaRPr>
           </a:p>
         </p:txBody>
       </p:sp>
@@ -10063,6 +9604,7 @@
           <a:lstStyle/>
           <a:p>
             <a:pPr algn="ctr"/>
+            <a:endParaRPr/>
           </a:p>
         </p:txBody>
       </p:sp>
@@ -10107,6 +9649,7 @@
           <a:lstStyle/>
           <a:p>
             <a:pPr algn="ctr"/>
+            <a:endParaRPr/>
           </a:p>
         </p:txBody>
       </p:sp>
@@ -10149,12 +9692,6 @@
               </a:rPr>
               <a:t>LOOKING FORWARD</a:t>
             </a:r>
-            <a:endParaRPr sz="1200" b="1">
-              <a:solidFill>
-                <a:srgbClr val="1B998B"/>
-              </a:solidFill>
-              <a:latin typeface="Calibri"/>
-            </a:endParaRPr>
           </a:p>
         </p:txBody>
       </p:sp>
@@ -10197,12 +9734,6 @@
               </a:rPr>
               <a:t>The Constraints Relax Mechanically</a:t>
             </a:r>
-            <a:endParaRPr sz="2700" b="1">
-              <a:solidFill>
-                <a:srgbClr val="13294B"/>
-              </a:solidFill>
-              <a:latin typeface="Georgia" panose="02040502050405090303"/>
-            </a:endParaRPr>
           </a:p>
         </p:txBody>
       </p:sp>
@@ -10245,12 +9776,6 @@
               </a:rPr>
               <a:t>Time, regulation, and scale each remove one of the binding limits</a:t>
             </a:r>
-            <a:endParaRPr sz="1550" b="0">
-              <a:solidFill>
-                <a:srgbClr val="5B6B82"/>
-              </a:solidFill>
-              <a:latin typeface="Georgia" panose="02040502050405090303"/>
-            </a:endParaRPr>
           </a:p>
         </p:txBody>
       </p:sp>
@@ -10295,6 +9820,7 @@
           <a:lstStyle/>
           <a:p>
             <a:pPr algn="ctr"/>
+            <a:endParaRPr/>
           </a:p>
         </p:txBody>
       </p:sp>
@@ -10339,6 +9865,7 @@
           <a:lstStyle/>
           <a:p>
             <a:pPr algn="ctr"/>
+            <a:endParaRPr/>
           </a:p>
         </p:txBody>
       </p:sp>
@@ -10381,12 +9908,6 @@
               </a:rPr>
               <a:t>Time → regimes</a:t>
             </a:r>
-            <a:endParaRPr sz="1600" b="1">
-              <a:solidFill>
-                <a:srgbClr val="1B998B"/>
-              </a:solidFill>
-              <a:latin typeface="Georgia" panose="02040502050405090303"/>
-            </a:endParaRPr>
           </a:p>
         </p:txBody>
       </p:sp>
@@ -10429,12 +9950,6 @@
               </a:rPr>
               <a:t>Each year adds 12 observations. By 2030 the sample roughly doubles (~100 months) and spans at least two full rate cycles. Regime variation — not just a larger N — is what separates a real channel from a shared trend.</a:t>
             </a:r>
-            <a:endParaRPr sz="1250" b="0">
-              <a:solidFill>
-                <a:srgbClr val="33425C"/>
-              </a:solidFill>
-              <a:latin typeface="Calibri"/>
-            </a:endParaRPr>
           </a:p>
         </p:txBody>
       </p:sp>
@@ -10479,6 +9994,7 @@
           <a:lstStyle/>
           <a:p>
             <a:pPr algn="ctr"/>
+            <a:endParaRPr/>
           </a:p>
         </p:txBody>
       </p:sp>
@@ -10523,6 +10039,7 @@
           <a:lstStyle/>
           <a:p>
             <a:pPr algn="ctr"/>
+            <a:endParaRPr/>
           </a:p>
         </p:txBody>
       </p:sp>
@@ -10565,12 +10082,6 @@
               </a:rPr>
               <a:t>Regulation → real data</a:t>
             </a:r>
-            <a:endParaRPr sz="1600" b="1">
-              <a:solidFill>
-                <a:srgbClr val="13294B"/>
-              </a:solidFill>
-              <a:latin typeface="Georgia" panose="02040502050405090303"/>
-            </a:endParaRPr>
           </a:p>
         </p:txBody>
       </p:sp>
@@ -10613,12 +10124,6 @@
               </a:rPr>
               <a:t>The 2025 US stablecoin law (GENIUS) and the EU's MiCA mandate monthly, certified reserve disclosures. θ and L become observed rather than interpolated, and the issuer panel widens as banks and fintechs enter. The buffer hypothesis becomes testable for the first time.</a:t>
             </a:r>
-            <a:endParaRPr sz="1250" b="0">
-              <a:solidFill>
-                <a:srgbClr val="33425C"/>
-              </a:solidFill>
-              <a:latin typeface="Calibri"/>
-            </a:endParaRPr>
           </a:p>
         </p:txBody>
       </p:sp>
@@ -10663,6 +10168,7 @@
           <a:lstStyle/>
           <a:p>
             <a:pPr algn="ctr"/>
+            <a:endParaRPr/>
           </a:p>
         </p:txBody>
       </p:sp>
@@ -10707,6 +10213,7 @@
           <a:lstStyle/>
           <a:p>
             <a:pPr algn="ctr"/>
+            <a:endParaRPr/>
           </a:p>
         </p:txBody>
       </p:sp>
@@ -10749,12 +10256,6 @@
               </a:rPr>
               <a:t>Scale → detectability</a:t>
             </a:r>
-            <a:endParaRPr sz="1600" b="1">
-              <a:solidFill>
-                <a:srgbClr val="E8A12C"/>
-              </a:solidFill>
-              <a:latin typeface="Georgia" panose="02040502050405090303"/>
-            </a:endParaRPr>
           </a:p>
         </p:txBody>
       </p:sp>
@@ -10797,12 +10298,6 @@
               </a:rPr>
               <a:t>Combined USDT + USDC supply is ≈ $262B at the end of our sample — already on par with a mid-sized sovereign holder of US debt. Official and industry projections reach $1–2T by 2028–30; at that scale, issuers become marginal price-setters in the bill market.</a:t>
             </a:r>
-            <a:endParaRPr sz="1250" b="0">
-              <a:solidFill>
-                <a:srgbClr val="33425C"/>
-              </a:solidFill>
-              <a:latin typeface="Calibri"/>
-            </a:endParaRPr>
           </a:p>
         </p:txBody>
       </p:sp>
@@ -10847,6 +10342,7 @@
           <a:lstStyle/>
           <a:p>
             <a:pPr algn="ctr"/>
+            <a:endParaRPr/>
           </a:p>
         </p:txBody>
       </p:sp>
@@ -10889,12 +10385,6 @@
               </a:rPr>
               <a:t>The same test rig, better inputs</a:t>
             </a:r>
-            <a:endParaRPr sz="1400" b="1">
-              <a:solidFill>
-                <a:srgbClr val="E8A12C"/>
-              </a:solidFill>
-              <a:latin typeface="Georgia" panose="02040502050405090303"/>
-            </a:endParaRPr>
           </a:p>
         </p:txBody>
       </p:sp>
@@ -10937,12 +10427,6 @@
               </a:rPr>
               <a:t>Every analysis in this paper is scripted and reproducible — it can simply be re-run as each constraint lifts.</a:t>
             </a:r>
-            <a:endParaRPr sz="1400" b="0">
-              <a:solidFill>
-                <a:srgbClr val="FFFFFF"/>
-              </a:solidFill>
-              <a:latin typeface="Calibri"/>
-            </a:endParaRPr>
           </a:p>
         </p:txBody>
       </p:sp>
@@ -10985,12 +10469,6 @@
               </a:rPr>
               <a:t>Stablecoins &amp; the Exorbitant Privilege</a:t>
             </a:r>
-            <a:endParaRPr sz="900" b="0">
-              <a:solidFill>
-                <a:srgbClr val="5B6B82"/>
-              </a:solidFill>
-              <a:latin typeface="Calibri"/>
-            </a:endParaRPr>
           </a:p>
         </p:txBody>
       </p:sp>
@@ -11026,12 +10504,6 @@
               </a:rPr>
               <a:t>15</a:t>
             </a:r>
-            <a:endParaRPr sz="1100" b="0">
-              <a:solidFill>
-                <a:srgbClr val="5B6B82"/>
-              </a:solidFill>
-              <a:latin typeface="Calibri"/>
-            </a:endParaRPr>
           </a:p>
         </p:txBody>
       </p:sp>
@@ -11101,6 +10573,7 @@
           <a:lstStyle/>
           <a:p>
             <a:pPr algn="ctr"/>
+            <a:endParaRPr/>
           </a:p>
         </p:txBody>
       </p:sp>
@@ -11145,6 +10618,7 @@
           <a:lstStyle/>
           <a:p>
             <a:pPr algn="ctr"/>
+            <a:endParaRPr/>
           </a:p>
         </p:txBody>
       </p:sp>
@@ -11187,12 +10661,6 @@
               </a:rPr>
               <a:t>LOOKING FORWARD</a:t>
             </a:r>
-            <a:endParaRPr sz="1200" b="1">
-              <a:solidFill>
-                <a:srgbClr val="1B998B"/>
-              </a:solidFill>
-              <a:latin typeface="Calibri"/>
-            </a:endParaRPr>
           </a:p>
         </p:txBody>
       </p:sp>
@@ -11235,12 +10703,6 @@
               </a:rPr>
               <a:t>What We Expect — Falsifiable Predictions</a:t>
             </a:r>
-            <a:endParaRPr sz="2700" b="1">
-              <a:solidFill>
-                <a:srgbClr val="13294B"/>
-              </a:solidFill>
-              <a:latin typeface="Georgia" panose="02040502050405090303"/>
-            </a:endParaRPr>
           </a:p>
         </p:txBody>
       </p:sp>
@@ -11283,12 +10745,6 @@
               </a:rPr>
               <a:t>Each claim comes with the evidence that would confirm or kill it</a:t>
             </a:r>
-            <a:endParaRPr sz="1550" b="0">
-              <a:solidFill>
-                <a:srgbClr val="5B6B82"/>
-              </a:solidFill>
-              <a:latin typeface="Georgia" panose="02040502050405090303"/>
-            </a:endParaRPr>
           </a:p>
         </p:txBody>
       </p:sp>
@@ -11333,6 +10789,7 @@
           <a:lstStyle/>
           <a:p>
             <a:pPr algn="ctr"/>
+            <a:endParaRPr/>
           </a:p>
         </p:txBody>
       </p:sp>
@@ -11377,6 +10834,7 @@
           <a:lstStyle/>
           <a:p>
             <a:pPr algn="ctr"/>
+            <a:endParaRPr/>
           </a:p>
         </p:txBody>
       </p:sp>
@@ -11419,12 +10877,6 @@
               </a:rPr>
               <a:t>Bid-cover sharpens</a:t>
             </a:r>
-            <a:endParaRPr sz="1500" b="1">
-              <a:solidFill>
-                <a:srgbClr val="1B998B"/>
-              </a:solidFill>
-              <a:latin typeface="Georgia" panose="02040502050405090303"/>
-            </a:endParaRPr>
           </a:p>
         </p:txBody>
       </p:sp>
@@ -11467,12 +10919,6 @@
               </a:rPr>
               <a:t>If the channel is real, β stays near −1.4 and significance grows with the sample. If it was an artifact of the 2022–23 crypto winter, it attenuates toward zero as those months roll out of the window.</a:t>
             </a:r>
-            <a:endParaRPr sz="1200" b="0">
-              <a:solidFill>
-                <a:srgbClr val="33425C"/>
-              </a:solidFill>
-              <a:latin typeface="Calibri"/>
-            </a:endParaRPr>
           </a:p>
         </p:txBody>
       </p:sp>
@@ -11517,6 +10963,7 @@
           <a:lstStyle/>
           <a:p>
             <a:pPr algn="ctr"/>
+            <a:endParaRPr/>
           </a:p>
         </p:txBody>
       </p:sp>
@@ -11561,6 +11008,7 @@
           <a:lstStyle/>
           <a:p>
             <a:pPr algn="ctr"/>
+            <a:endParaRPr/>
           </a:p>
         </p:txBody>
       </p:sp>
@@ -11603,12 +11051,6 @@
               </a:rPr>
               <a:t>Privilege becomes measurable</a:t>
             </a:r>
-            <a:endParaRPr sz="1500" b="1">
-              <a:solidFill>
-                <a:srgbClr val="13294B"/>
-              </a:solidFill>
-              <a:latin typeface="Georgia" panose="02040502050405090303"/>
-            </a:endParaRPr>
           </a:p>
         </p:txBody>
       </p:sp>
@@ -11651,12 +11093,6 @@
               </a:rPr>
               <a:t>Across two or more rate cycles the spread regression becomes estimable in differences. Safe-asset demand-curve logic predicts a small, few-bps compression per $100B of issuance — visible only at scale.</a:t>
             </a:r>
-            <a:endParaRPr sz="1200" b="0">
-              <a:solidFill>
-                <a:srgbClr val="33425C"/>
-              </a:solidFill>
-              <a:latin typeface="Calibri"/>
-            </a:endParaRPr>
           </a:p>
         </p:txBody>
       </p:sp>
@@ -11701,6 +11137,7 @@
           <a:lstStyle/>
           <a:p>
             <a:pPr algn="ctr"/>
+            <a:endParaRPr/>
           </a:p>
         </p:txBody>
       </p:sp>
@@ -11745,6 +11182,7 @@
           <a:lstStyle/>
           <a:p>
             <a:pPr algn="ctr"/>
+            <a:endParaRPr/>
           </a:p>
         </p:txBody>
       </p:sp>
@@ -11787,12 +11225,6 @@
               </a:rPr>
               <a:t>Fragility becomes testable</a:t>
             </a:r>
-            <a:endParaRPr sz="1500" b="1">
-              <a:solidFill>
-                <a:srgbClr val="C1121F"/>
-              </a:solidFill>
-              <a:latin typeface="Georgia" panose="02040502050405090303"/>
-            </a:endParaRPr>
           </a:p>
         </p:txBody>
       </p:sp>
@@ -11835,12 +11267,6 @@
               </a:rPr>
               <a:t>Observed monthly reserves plus the first large redemption under the new regime test the buffer threshold directly. At $1T+ scale a forced bill sale is macro-relevant — the New Triffin question returns.</a:t>
             </a:r>
-            <a:endParaRPr sz="1200" b="0">
-              <a:solidFill>
-                <a:srgbClr val="33425C"/>
-              </a:solidFill>
-              <a:latin typeface="Calibri"/>
-            </a:endParaRPr>
           </a:p>
         </p:txBody>
       </p:sp>
@@ -11885,6 +11311,7 @@
           <a:lstStyle/>
           <a:p>
             <a:pPr algn="ctr"/>
+            <a:endParaRPr/>
           </a:p>
         </p:txBody>
       </p:sp>
@@ -11927,12 +11354,6 @@
               </a:rPr>
               <a:t>EXPECTED PATH</a:t>
             </a:r>
-            <a:endParaRPr sz="1100" b="1">
-              <a:solidFill>
-                <a:srgbClr val="E8A12C"/>
-              </a:solidFill>
-              <a:latin typeface="Calibri"/>
-            </a:endParaRPr>
           </a:p>
         </p:txBody>
       </p:sp>
@@ -11977,6 +11398,7 @@
           <a:lstStyle/>
           <a:p>
             <a:pPr algn="ctr"/>
+            <a:endParaRPr/>
           </a:p>
         </p:txBody>
       </p:sp>
@@ -12019,12 +11441,6 @@
               </a:rPr>
               <a:t>2026–27</a:t>
             </a:r>
-            <a:endParaRPr sz="1400" b="1">
-              <a:solidFill>
-                <a:srgbClr val="FFFFFF"/>
-              </a:solidFill>
-              <a:latin typeface="Georgia" panose="02040502050405090303"/>
-            </a:endParaRPr>
           </a:p>
         </p:txBody>
       </p:sp>
@@ -12067,12 +11483,6 @@
               </a:rPr>
               <a:t>Monthly certified reserve reports begin (GENIUS / MiCA)</a:t>
             </a:r>
-            <a:endParaRPr sz="1050" b="0">
-              <a:solidFill>
-                <a:srgbClr val="AEC0DD"/>
-              </a:solidFill>
-              <a:latin typeface="Calibri"/>
-            </a:endParaRPr>
           </a:p>
         </p:txBody>
       </p:sp>
@@ -12115,12 +11525,6 @@
               </a:rPr>
               <a:t>2027–28</a:t>
             </a:r>
-            <a:endParaRPr sz="1400" b="1">
-              <a:solidFill>
-                <a:srgbClr val="FFFFFF"/>
-              </a:solidFill>
-              <a:latin typeface="Georgia" panose="02040502050405090303"/>
-            </a:endParaRPr>
           </a:p>
         </p:txBody>
       </p:sp>
@@ -12163,12 +11567,6 @@
               </a:rPr>
               <a:t>Sample spans a full easing cycle (~75 months)</a:t>
             </a:r>
-            <a:endParaRPr sz="1050" b="0">
-              <a:solidFill>
-                <a:srgbClr val="AEC0DD"/>
-              </a:solidFill>
-              <a:latin typeface="Calibri"/>
-            </a:endParaRPr>
           </a:p>
         </p:txBody>
       </p:sp>
@@ -12211,12 +11609,6 @@
               </a:rPr>
               <a:t>2028–29</a:t>
             </a:r>
-            <a:endParaRPr sz="1400" b="1">
-              <a:solidFill>
-                <a:srgbClr val="FFFFFF"/>
-              </a:solidFill>
-              <a:latin typeface="Georgia" panose="02040502050405090303"/>
-            </a:endParaRPr>
           </a:p>
         </p:txBody>
       </p:sp>
@@ -12259,12 +11651,6 @@
               </a:rPr>
               <a:t>2–3 years of observed θ, L → threshold test on real data</a:t>
             </a:r>
-            <a:endParaRPr sz="1050" b="0">
-              <a:solidFill>
-                <a:srgbClr val="AEC0DD"/>
-              </a:solidFill>
-              <a:latin typeface="Calibri"/>
-            </a:endParaRPr>
           </a:p>
         </p:txBody>
       </p:sp>
@@ -12307,12 +11693,6 @@
               </a:rPr>
               <a:t>2030</a:t>
             </a:r>
-            <a:endParaRPr sz="1400" b="1">
-              <a:solidFill>
-                <a:srgbClr val="FFFFFF"/>
-              </a:solidFill>
-              <a:latin typeface="Georgia" panose="02040502050405090303"/>
-            </a:endParaRPr>
           </a:p>
         </p:txBody>
       </p:sp>
@@ -12355,12 +11735,6 @@
               </a:rPr>
               <a:t>~100 months, ≥2 cycles, wider issuer panel — full re-run</a:t>
             </a:r>
-            <a:endParaRPr sz="1050" b="0">
-              <a:solidFill>
-                <a:srgbClr val="AEC0DD"/>
-              </a:solidFill>
-              <a:latin typeface="Calibri"/>
-            </a:endParaRPr>
           </a:p>
         </p:txBody>
       </p:sp>
@@ -12403,12 +11777,6 @@
               </a:rPr>
               <a:t>Stablecoins &amp; the Exorbitant Privilege</a:t>
             </a:r>
-            <a:endParaRPr sz="900" b="0">
-              <a:solidFill>
-                <a:srgbClr val="5B6B82"/>
-              </a:solidFill>
-              <a:latin typeface="Calibri"/>
-            </a:endParaRPr>
           </a:p>
         </p:txBody>
       </p:sp>
@@ -12444,12 +11812,6 @@
               </a:rPr>
               <a:t>16</a:t>
             </a:r>
-            <a:endParaRPr sz="1100" b="0">
-              <a:solidFill>
-                <a:srgbClr val="5B6B82"/>
-              </a:solidFill>
-              <a:latin typeface="Calibri"/>
-            </a:endParaRPr>
           </a:p>
         </p:txBody>
       </p:sp>
@@ -12519,6 +11881,7 @@
           <a:lstStyle/>
           <a:p>
             <a:pPr algn="ctr"/>
+            <a:endParaRPr/>
           </a:p>
         </p:txBody>
       </p:sp>
@@ -12563,6 +11926,7 @@
           <a:lstStyle/>
           <a:p>
             <a:pPr algn="ctr"/>
+            <a:endParaRPr/>
           </a:p>
         </p:txBody>
       </p:sp>
@@ -12605,12 +11969,6 @@
               </a:rPr>
               <a:t>CONCLUSION</a:t>
             </a:r>
-            <a:endParaRPr sz="1200" b="1">
-              <a:solidFill>
-                <a:srgbClr val="1B998B"/>
-              </a:solidFill>
-              <a:latin typeface="Calibri"/>
-            </a:endParaRPr>
           </a:p>
         </p:txBody>
       </p:sp>
@@ -12653,12 +12011,6 @@
               </a:rPr>
               <a:t>The Defensible Claim</a:t>
             </a:r>
-            <a:endParaRPr sz="2700" b="1">
-              <a:solidFill>
-                <a:srgbClr val="13294B"/>
-              </a:solidFill>
-              <a:latin typeface="Georgia" panose="02040502050405090303"/>
-            </a:endParaRPr>
           </a:p>
         </p:txBody>
       </p:sp>
@@ -12703,6 +12055,7 @@
           <a:lstStyle/>
           <a:p>
             <a:pPr algn="ctr"/>
+            <a:endParaRPr/>
           </a:p>
         </p:txBody>
       </p:sp>
@@ -12747,6 +12100,7 @@
           <a:lstStyle/>
           <a:p>
             <a:pPr algn="ctr"/>
+            <a:endParaRPr/>
           </a:p>
         </p:txBody>
       </p:sp>
@@ -12781,7 +12135,7 @@
               </a:spcAft>
             </a:pPr>
             <a:r>
-              <a:rPr sz="1800" b="1">
+              <a:rPr sz="1800" b="1" dirty="0">
                 <a:solidFill>
                   <a:srgbClr val="13294B"/>
                 </a:solidFill>
@@ -12789,12 +12143,6 @@
               </a:rPr>
               <a:t>USDT supply growth is associated with lower T-bill auction bid-cover at all maturities, while USDC is not.</a:t>
             </a:r>
-            <a:endParaRPr sz="1800" b="1">
-              <a:solidFill>
-                <a:srgbClr val="13294B"/>
-              </a:solidFill>
-              <a:latin typeface="Georgia" panose="02040502050405090303"/>
-            </a:endParaRPr>
           </a:p>
           <a:p>
             <a:pPr algn="l">
@@ -12806,7 +12154,7 @@
               </a:spcAft>
             </a:pPr>
             <a:r>
-              <a:rPr sz="1450" b="0">
+              <a:rPr sz="1450" b="0" dirty="0">
                 <a:solidFill>
                   <a:srgbClr val="33425C"/>
                 </a:solidFill>
@@ -12815,7 +12163,7 @@
               <a:t>Robust to controlling auction size and to removing all interpolated reserve controls, and it passes a 2,000-</a:t>
             </a:r>
             <a:r>
-              <a:rPr lang="en-US" altLang="en-US" sz="1450" b="0">
+              <a:rPr lang="en-US" altLang="en-US" sz="1450" b="0" dirty="0">
                 <a:solidFill>
                   <a:srgbClr val="33425C"/>
                 </a:solidFill>
@@ -12824,7 +12172,7 @@
               <a:t>shuffle </a:t>
             </a:r>
             <a:r>
-              <a:rPr sz="1450" b="0">
+              <a:rPr sz="1450" b="0" dirty="0">
                 <a:solidFill>
                   <a:srgbClr val="33425C"/>
                 </a:solidFill>
@@ -12832,12 +12180,6 @@
               </a:rPr>
               <a:t>placebo at 3 of 4 maturities (8/13/26-Week). At the individual-auction frequency the association is not detectable, consistent with stablecoin supply being a monthly-frequency variable.</a:t>
             </a:r>
-            <a:endParaRPr sz="1450" b="0">
-              <a:solidFill>
-                <a:srgbClr val="33425C"/>
-              </a:solidFill>
-              <a:latin typeface="Georgia" panose="02040502050405090303"/>
-            </a:endParaRPr>
           </a:p>
         </p:txBody>
       </p:sp>
@@ -12889,12 +12231,6 @@
               </a:rPr>
               <a:t>The structural privilege channel is real — USDT is a programmatic T-bill buyer</a:t>
             </a:r>
-            <a:endParaRPr sz="1500" b="0">
-              <a:solidFill>
-                <a:srgbClr val="33425C"/>
-              </a:solidFill>
-              <a:latin typeface="Calibri"/>
-            </a:endParaRPr>
           </a:p>
           <a:p>
             <a:pPr algn="l">
@@ -12923,12 +12259,6 @@
               </a:rPr>
               <a:t>Its imprint is visible in auction demand, not in the spurious levels regression</a:t>
             </a:r>
-            <a:endParaRPr sz="1500" b="0">
-              <a:solidFill>
-                <a:srgbClr val="33425C"/>
-              </a:solidFill>
-              <a:latin typeface="Calibri"/>
-            </a:endParaRPr>
           </a:p>
           <a:p>
             <a:pPr algn="l">
@@ -12957,12 +12287,6 @@
               </a:rPr>
               <a:t>Stated carefully, the finding survives every robustness check we could devise</a:t>
             </a:r>
-            <a:endParaRPr sz="1500" b="0">
-              <a:solidFill>
-                <a:srgbClr val="33425C"/>
-              </a:solidFill>
-              <a:latin typeface="Calibri"/>
-            </a:endParaRPr>
           </a:p>
         </p:txBody>
       </p:sp>
@@ -13005,12 +12329,6 @@
               </a:rPr>
               <a:t>Stablecoins &amp; the Exorbitant Privilege</a:t>
             </a:r>
-            <a:endParaRPr sz="900" b="0">
-              <a:solidFill>
-                <a:srgbClr val="5B6B82"/>
-              </a:solidFill>
-              <a:latin typeface="Calibri"/>
-            </a:endParaRPr>
           </a:p>
         </p:txBody>
       </p:sp>
@@ -13046,12 +12364,6 @@
               </a:rPr>
               <a:t>17</a:t>
             </a:r>
-            <a:endParaRPr sz="1100" b="0">
-              <a:solidFill>
-                <a:srgbClr val="5B6B82"/>
-              </a:solidFill>
-              <a:latin typeface="Calibri"/>
-            </a:endParaRPr>
           </a:p>
         </p:txBody>
       </p:sp>
@@ -13121,6 +12433,7 @@
           <a:lstStyle/>
           <a:p>
             <a:pPr algn="ctr"/>
+            <a:endParaRPr/>
           </a:p>
         </p:txBody>
       </p:sp>
@@ -13165,6 +12478,7 @@
           <a:lstStyle/>
           <a:p>
             <a:pPr algn="ctr"/>
+            <a:endParaRPr/>
           </a:p>
         </p:txBody>
       </p:sp>
@@ -13209,6 +12523,7 @@
           <a:lstStyle/>
           <a:p>
             <a:pPr algn="ctr"/>
+            <a:endParaRPr/>
           </a:p>
         </p:txBody>
       </p:sp>
@@ -13251,12 +12566,6 @@
               </a:rPr>
               <a:t>A robust result, honestly earned.</a:t>
             </a:r>
-            <a:endParaRPr sz="3400" b="1">
-              <a:solidFill>
-                <a:srgbClr val="FFFFFF"/>
-              </a:solidFill>
-              <a:latin typeface="Georgia" panose="02040502050405090303"/>
-            </a:endParaRPr>
           </a:p>
         </p:txBody>
       </p:sp>
@@ -13299,12 +12608,6 @@
               </a:rPr>
               <a:t>USDT supply growth → weaker T-bill auction demand, and USDT ≠ USDC.</a:t>
             </a:r>
-            <a:endParaRPr sz="1700" b="0" dirty="0">
-              <a:solidFill>
-                <a:srgbClr val="CADCFC"/>
-              </a:solidFill>
-              <a:latin typeface="Calibri"/>
-            </a:endParaRPr>
           </a:p>
           <a:p>
             <a:pPr algn="l">
@@ -13324,12 +12627,6 @@
               </a:rPr>
               <a:t>Survives offering size, zero interpolated data, the rate-cycle control, and a placebo.</a:t>
             </a:r>
-            <a:endParaRPr sz="1700" b="0" dirty="0">
-              <a:solidFill>
-                <a:srgbClr val="CADCFC"/>
-              </a:solidFill>
-              <a:latin typeface="Calibri"/>
-            </a:endParaRPr>
           </a:p>
           <a:p>
             <a:pPr algn="l">
@@ -13349,12 +12646,6 @@
               </a:rPr>
               <a:t>The spurious levels results are dropped; the VAR and event study remain as support.</a:t>
             </a:r>
-            <a:endParaRPr sz="1700" b="0" dirty="0">
-              <a:solidFill>
-                <a:srgbClr val="CADCFC"/>
-              </a:solidFill>
-              <a:latin typeface="Calibri"/>
-            </a:endParaRPr>
           </a:p>
           <a:p>
             <a:pPr algn="l">
@@ -13374,12 +12665,6 @@
               </a:rPr>
               <a:t>Diagnosis, stress-testing, and reconciliation were a shared, group effort.</a:t>
             </a:r>
-            <a:endParaRPr sz="1700" b="0" dirty="0">
-              <a:solidFill>
-                <a:srgbClr val="CADCFC"/>
-              </a:solidFill>
-              <a:latin typeface="Calibri"/>
-            </a:endParaRPr>
           </a:p>
         </p:txBody>
       </p:sp>
@@ -13449,6 +12734,7 @@
           <a:lstStyle/>
           <a:p>
             <a:pPr algn="ctr"/>
+            <a:endParaRPr/>
           </a:p>
         </p:txBody>
       </p:sp>
@@ -13493,6 +12779,7 @@
           <a:lstStyle/>
           <a:p>
             <a:pPr algn="ctr"/>
+            <a:endParaRPr/>
           </a:p>
         </p:txBody>
       </p:sp>
@@ -13535,12 +12822,6 @@
               </a:rPr>
               <a:t>MOTIVATION</a:t>
             </a:r>
-            <a:endParaRPr sz="1200" b="1">
-              <a:solidFill>
-                <a:srgbClr val="1B998B"/>
-              </a:solidFill>
-              <a:latin typeface="Calibri"/>
-            </a:endParaRPr>
           </a:p>
         </p:txBody>
       </p:sp>
@@ -13583,12 +12864,6 @@
               </a:rPr>
               <a:t>The Question — A Structural Fact, Then a Test</a:t>
             </a:r>
-            <a:endParaRPr sz="2700" b="1">
-              <a:solidFill>
-                <a:srgbClr val="13294B"/>
-              </a:solidFill>
-              <a:latin typeface="Georgia" panose="02040502050405090303"/>
-            </a:endParaRPr>
           </a:p>
         </p:txBody>
       </p:sp>
@@ -13631,12 +12906,6 @@
               </a:rPr>
               <a:t>Stablecoin issuers have quietly become major buyers of US Treasury bills</a:t>
             </a:r>
-            <a:endParaRPr sz="1550" b="0">
-              <a:solidFill>
-                <a:srgbClr val="5B6B82"/>
-              </a:solidFill>
-              <a:latin typeface="Georgia" panose="02040502050405090303"/>
-            </a:endParaRPr>
           </a:p>
         </p:txBody>
       </p:sp>
@@ -13681,6 +12950,7 @@
           <a:lstStyle/>
           <a:p>
             <a:pPr algn="ctr"/>
+            <a:endParaRPr/>
           </a:p>
         </p:txBody>
       </p:sp>
@@ -13725,6 +12995,7 @@
           <a:lstStyle/>
           <a:p>
             <a:pPr algn="ctr"/>
+            <a:endParaRPr/>
           </a:p>
         </p:txBody>
       </p:sp>
@@ -13767,12 +13038,6 @@
               </a:rPr>
               <a:t>The structural fact</a:t>
             </a:r>
-            <a:endParaRPr sz="1700" b="1">
-              <a:solidFill>
-                <a:srgbClr val="1B998B"/>
-              </a:solidFill>
-              <a:latin typeface="Georgia" panose="02040502050405090303"/>
-            </a:endParaRPr>
           </a:p>
         </p:txBody>
       </p:sp>
@@ -13807,7 +13072,7 @@
               </a:spcAft>
             </a:pPr>
             <a:r>
-              <a:rPr sz="1350" b="0">
+              <a:rPr sz="1350" b="0" dirty="0">
                 <a:solidFill>
                   <a:srgbClr val="33425C"/>
                 </a:solidFill>
@@ -13815,12 +13080,6 @@
               </a:rPr>
               <a:t>Stablecoin issuers hold their reserves largely in short-term US Treasuries. USDT alone is now one of the largest holders of T-bills in the world — by construction.</a:t>
             </a:r>
-            <a:endParaRPr sz="1350" b="0">
-              <a:solidFill>
-                <a:srgbClr val="33425C"/>
-              </a:solidFill>
-              <a:latin typeface="Calibri"/>
-            </a:endParaRPr>
           </a:p>
         </p:txBody>
       </p:sp>
@@ -13865,6 +13124,7 @@
           <a:lstStyle/>
           <a:p>
             <a:pPr algn="ctr"/>
+            <a:endParaRPr/>
           </a:p>
         </p:txBody>
       </p:sp>
@@ -13909,6 +13169,7 @@
           <a:lstStyle/>
           <a:p>
             <a:pPr algn="ctr"/>
+            <a:endParaRPr/>
           </a:p>
         </p:txBody>
       </p:sp>
@@ -13951,12 +13212,6 @@
               </a:rPr>
               <a:t>The mechanism</a:t>
             </a:r>
-            <a:endParaRPr sz="1700" b="1">
-              <a:solidFill>
-                <a:srgbClr val="13294B"/>
-              </a:solidFill>
-              <a:latin typeface="Georgia" panose="02040502050405090303"/>
-            </a:endParaRPr>
           </a:p>
         </p:txBody>
       </p:sp>
@@ -13999,12 +13254,6 @@
               </a:rPr>
               <a:t>When USDT grows, it mechanically buys T-bills. This is programmatic, rule-bound demand for US government debt — a candidate channel of the 'exorbitant privilege'.</a:t>
             </a:r>
-            <a:endParaRPr sz="1350" b="0">
-              <a:solidFill>
-                <a:srgbClr val="33425C"/>
-              </a:solidFill>
-              <a:latin typeface="Calibri"/>
-            </a:endParaRPr>
           </a:p>
         </p:txBody>
       </p:sp>
@@ -14049,6 +13298,7 @@
           <a:lstStyle/>
           <a:p>
             <a:pPr algn="ctr"/>
+            <a:endParaRPr/>
           </a:p>
         </p:txBody>
       </p:sp>
@@ -14093,6 +13343,7 @@
           <a:lstStyle/>
           <a:p>
             <a:pPr algn="ctr"/>
+            <a:endParaRPr/>
           </a:p>
         </p:txBody>
       </p:sp>
@@ -14135,12 +13386,6 @@
               </a:rPr>
               <a:t>The question</a:t>
             </a:r>
-            <a:endParaRPr sz="1700" b="1">
-              <a:solidFill>
-                <a:srgbClr val="E8A12C"/>
-              </a:solidFill>
-              <a:latin typeface="Georgia" panose="02040502050405090303"/>
-            </a:endParaRPr>
           </a:p>
         </p:txBody>
       </p:sp>
@@ -14183,12 +13428,6 @@
               </a:rPr>
               <a:t>Does this demand actually show up in the US Treasury market? We test it against T-bill auction demand (bid-cover) and stress-test every result.</a:t>
             </a:r>
-            <a:endParaRPr sz="1350" b="0">
-              <a:solidFill>
-                <a:srgbClr val="33425C"/>
-              </a:solidFill>
-              <a:latin typeface="Calibri"/>
-            </a:endParaRPr>
           </a:p>
         </p:txBody>
       </p:sp>
@@ -14231,12 +13470,6 @@
               </a:rPr>
               <a:t>Stablecoins &amp; the Exorbitant Privilege</a:t>
             </a:r>
-            <a:endParaRPr sz="900" b="0">
-              <a:solidFill>
-                <a:srgbClr val="5B6B82"/>
-              </a:solidFill>
-              <a:latin typeface="Calibri"/>
-            </a:endParaRPr>
           </a:p>
         </p:txBody>
       </p:sp>
@@ -14279,12 +13512,6 @@
               </a:rPr>
               <a:t>2</a:t>
             </a:r>
-            <a:endParaRPr sz="1100" b="0">
-              <a:solidFill>
-                <a:srgbClr val="5B6B82"/>
-              </a:solidFill>
-              <a:latin typeface="Calibri"/>
-            </a:endParaRPr>
           </a:p>
         </p:txBody>
       </p:sp>
@@ -14354,6 +13581,7 @@
           <a:lstStyle/>
           <a:p>
             <a:pPr algn="ctr"/>
+            <a:endParaRPr/>
           </a:p>
         </p:txBody>
       </p:sp>
@@ -14398,6 +13626,7 @@
           <a:lstStyle/>
           <a:p>
             <a:pPr algn="ctr"/>
+            <a:endParaRPr/>
           </a:p>
         </p:txBody>
       </p:sp>
@@ -14440,12 +13669,6 @@
               </a:rPr>
               <a:t>AFTER THE PROFESSOR'S FEEDBACK</a:t>
             </a:r>
-            <a:endParaRPr sz="1200" b="1">
-              <a:solidFill>
-                <a:srgbClr val="1B998B"/>
-              </a:solidFill>
-              <a:latin typeface="Calibri"/>
-            </a:endParaRPr>
           </a:p>
         </p:txBody>
       </p:sp>
@@ -14488,12 +13711,6 @@
               </a:rPr>
               <a:t>What We Changed</a:t>
             </a:r>
-            <a:endParaRPr sz="2700" b="1">
-              <a:solidFill>
-                <a:srgbClr val="13294B"/>
-              </a:solidFill>
-              <a:latin typeface="Georgia" panose="02040502050405090303"/>
-            </a:endParaRPr>
           </a:p>
         </p:txBody>
       </p:sp>
@@ -14536,12 +13753,6 @@
               </a:rPr>
               <a:t>We rebuilt the analysis around the professor's corrections</a:t>
             </a:r>
-            <a:endParaRPr sz="1550" b="0">
-              <a:solidFill>
-                <a:srgbClr val="5B6B82"/>
-              </a:solidFill>
-              <a:latin typeface="Georgia" panose="02040502050405090303"/>
-            </a:endParaRPr>
           </a:p>
         </p:txBody>
       </p:sp>
@@ -14586,6 +13797,7 @@
           <a:lstStyle/>
           <a:p>
             <a:pPr algn="ctr"/>
+            <a:endParaRPr/>
           </a:p>
         </p:txBody>
       </p:sp>
@@ -14630,6 +13842,7 @@
           <a:lstStyle/>
           <a:p>
             <a:pPr algn="ctr"/>
+            <a:endParaRPr/>
           </a:p>
         </p:txBody>
       </p:sp>
@@ -14672,12 +13885,6 @@
               </a:rPr>
               <a:t>Specification</a:t>
             </a:r>
-            <a:endParaRPr sz="1600" b="1">
-              <a:solidFill>
-                <a:srgbClr val="1B998B"/>
-              </a:solidFill>
-              <a:latin typeface="Georgia" panose="02040502050405090303"/>
-            </a:endParaRPr>
           </a:p>
         </p:txBody>
       </p:sp>
@@ -14712,20 +13919,50 @@
               </a:spcAft>
             </a:pPr>
             <a:r>
-              <a:rPr sz="1350" b="0">
+              <a:rPr sz="1350" b="0" dirty="0">
                 <a:solidFill>
                   <a:srgbClr val="33425C"/>
                 </a:solidFill>
                 <a:latin typeface="Calibri"/>
               </a:rPr>
-              <a:t>Exploit the panel: each issuer (USDT, USDC) a separate observation. Stop combining Treasury and liquid reserves; drop θ (θ + L ≈ 1, collinear). Show the estimating equation on every result.</a:t>
-            </a:r>
-            <a:endParaRPr sz="1350" b="0">
-              <a:solidFill>
-                <a:srgbClr val="33425C"/>
-              </a:solidFill>
-              <a:latin typeface="Calibri"/>
-            </a:endParaRPr>
+              <a:t>Exploit the panel: each issuer (USDT, USDC) a separate observation. Stop combining Treasury and liquid reserves; drop </a:t>
+            </a:r>
+            <a:r>
+              <a:rPr sz="1350" b="0" dirty="0" err="1">
+                <a:solidFill>
+                  <a:srgbClr val="33425C"/>
+                </a:solidFill>
+                <a:latin typeface="Calibri"/>
+              </a:rPr>
+              <a:t>θ</a:t>
+            </a:r>
+            <a:r>
+              <a:rPr sz="1350" b="0" dirty="0">
+                <a:solidFill>
+                  <a:srgbClr val="33425C"/>
+                </a:solidFill>
+                <a:latin typeface="Calibri"/>
+              </a:rPr>
+              <a:t> (</a:t>
+            </a:r>
+            <a:r>
+              <a:rPr sz="1350" b="0" dirty="0" err="1">
+                <a:solidFill>
+                  <a:srgbClr val="33425C"/>
+                </a:solidFill>
+                <a:latin typeface="Calibri"/>
+              </a:rPr>
+              <a:t>θ</a:t>
+            </a:r>
+            <a:r>
+              <a:rPr sz="1350" b="0" dirty="0">
+                <a:solidFill>
+                  <a:srgbClr val="33425C"/>
+                </a:solidFill>
+                <a:latin typeface="Calibri"/>
+              </a:rPr>
+              <a:t> + L ≈ 1, collinear). Show the estimating equation on every result.</a:t>
+            </a:r>
           </a:p>
         </p:txBody>
       </p:sp>
@@ -14770,6 +14007,7 @@
           <a:lstStyle/>
           <a:p>
             <a:pPr algn="ctr"/>
+            <a:endParaRPr/>
           </a:p>
         </p:txBody>
       </p:sp>
@@ -14814,6 +14052,7 @@
           <a:lstStyle/>
           <a:p>
             <a:pPr algn="ctr"/>
+            <a:endParaRPr/>
           </a:p>
         </p:txBody>
       </p:sp>
@@ -14856,12 +14095,6 @@
               </a:rPr>
               <a:t>Data construction</a:t>
             </a:r>
-            <a:endParaRPr sz="1600" b="1">
-              <a:solidFill>
-                <a:srgbClr val="13294B"/>
-              </a:solidFill>
-              <a:latin typeface="Georgia" panose="02040502050405090303"/>
-            </a:endParaRPr>
           </a:p>
         </p:txBody>
       </p:sp>
@@ -14904,12 +14137,6 @@
               </a:rPr>
               <a:t>Replace forward-filling of the quarterly reserve attestations with a time-weighted linear interpolation between consecutive attestation dates.</a:t>
             </a:r>
-            <a:endParaRPr sz="1350" b="0">
-              <a:solidFill>
-                <a:srgbClr val="33425C"/>
-              </a:solidFill>
-              <a:latin typeface="Calibri"/>
-            </a:endParaRPr>
           </a:p>
         </p:txBody>
       </p:sp>
@@ -14954,6 +14181,7 @@
           <a:lstStyle/>
           <a:p>
             <a:pPr algn="ctr"/>
+            <a:endParaRPr/>
           </a:p>
         </p:txBody>
       </p:sp>
@@ -14998,6 +14226,7 @@
           <a:lstStyle/>
           <a:p>
             <a:pPr algn="ctr"/>
+            <a:endParaRPr/>
           </a:p>
         </p:txBody>
       </p:sp>
@@ -15040,12 +14269,6 @@
               </a:rPr>
               <a:t>Event study</a:t>
             </a:r>
-            <a:endParaRPr sz="1600" b="1">
-              <a:solidFill>
-                <a:srgbClr val="E8A12C"/>
-              </a:solidFill>
-              <a:latin typeface="Georgia" panose="02040502050405090303"/>
-            </a:endParaRPr>
           </a:p>
         </p:txBody>
       </p:sp>
@@ -15080,7 +14303,7 @@
               </a:spcAft>
             </a:pPr>
             <a:r>
-              <a:rPr sz="1350" b="0">
+              <a:rPr sz="1350" b="0" dirty="0">
                 <a:solidFill>
                   <a:srgbClr val="33425C"/>
                 </a:solidFill>
@@ -15088,12 +14311,6 @@
               </a:rPr>
               <a:t>LUNA · Celsius · FTX · BUSD studied. Drop SVB — confounded by the simultaneous banking crisis. Events disagree in sign; pooled p = 0.43 → motivation only, not identification.</a:t>
             </a:r>
-            <a:endParaRPr sz="1350" b="0">
-              <a:solidFill>
-                <a:srgbClr val="33425C"/>
-              </a:solidFill>
-              <a:latin typeface="Calibri"/>
-            </a:endParaRPr>
           </a:p>
         </p:txBody>
       </p:sp>
@@ -15138,6 +14355,7 @@
           <a:lstStyle/>
           <a:p>
             <a:pPr algn="ctr"/>
+            <a:endParaRPr/>
           </a:p>
         </p:txBody>
       </p:sp>
@@ -15182,6 +14400,7 @@
           <a:lstStyle/>
           <a:p>
             <a:pPr algn="ctr"/>
+            <a:endParaRPr/>
           </a:p>
         </p:txBody>
       </p:sp>
@@ -15224,12 +14443,6 @@
               </a:rPr>
               <a:t>Focus</a:t>
             </a:r>
-            <a:endParaRPr sz="1600" b="1">
-              <a:solidFill>
-                <a:srgbClr val="5B8DEF"/>
-              </a:solidFill>
-              <a:latin typeface="Georgia" panose="02040502050405090303"/>
-            </a:endParaRPr>
           </a:p>
         </p:txBody>
       </p:sp>
@@ -15272,12 +14485,6 @@
               </a:rPr>
               <a:t>Re-centre the analysis on the bid-cover ratio as a stationary, directly observable outcome — and stress-test the new result.</a:t>
             </a:r>
-            <a:endParaRPr sz="1350" b="0">
-              <a:solidFill>
-                <a:srgbClr val="33425C"/>
-              </a:solidFill>
-              <a:latin typeface="Calibri"/>
-            </a:endParaRPr>
           </a:p>
         </p:txBody>
       </p:sp>
@@ -15320,12 +14527,6 @@
               </a:rPr>
               <a:t>Stablecoins &amp; the Exorbitant Privilege</a:t>
             </a:r>
-            <a:endParaRPr sz="900" b="0">
-              <a:solidFill>
-                <a:srgbClr val="5B6B82"/>
-              </a:solidFill>
-              <a:latin typeface="Calibri"/>
-            </a:endParaRPr>
           </a:p>
         </p:txBody>
       </p:sp>
@@ -15368,12 +14569,6 @@
               </a:rPr>
               <a:t>3</a:t>
             </a:r>
-            <a:endParaRPr sz="1100" b="0">
-              <a:solidFill>
-                <a:srgbClr val="5B6B82"/>
-              </a:solidFill>
-              <a:latin typeface="Calibri"/>
-            </a:endParaRPr>
           </a:p>
         </p:txBody>
       </p:sp>
@@ -15443,6 +14638,7 @@
           <a:lstStyle/>
           <a:p>
             <a:pPr algn="ctr"/>
+            <a:endParaRPr/>
           </a:p>
         </p:txBody>
       </p:sp>
@@ -15487,6 +14683,7 @@
           <a:lstStyle/>
           <a:p>
             <a:pPr algn="ctr"/>
+            <a:endParaRPr/>
           </a:p>
         </p:txBody>
       </p:sp>
@@ -15529,12 +14726,6 @@
               </a:rPr>
               <a:t>AFTER THE PROFESSOR'S FEEDBACK</a:t>
             </a:r>
-            <a:endParaRPr sz="1200" b="1">
-              <a:solidFill>
-                <a:srgbClr val="1B998B"/>
-              </a:solidFill>
-              <a:latin typeface="Calibri"/>
-            </a:endParaRPr>
           </a:p>
         </p:txBody>
       </p:sp>
@@ -15577,12 +14768,6 @@
               </a:rPr>
               <a:t>What the Re-Run Revealed</a:t>
             </a:r>
-            <a:endParaRPr sz="2700" b="1">
-              <a:solidFill>
-                <a:srgbClr val="13294B"/>
-              </a:solidFill>
-              <a:latin typeface="Georgia" panose="02040502050405090303"/>
-            </a:endParaRPr>
           </a:p>
         </p:txBody>
       </p:sp>
@@ -15617,7 +14802,7 @@
               </a:spcAft>
             </a:pPr>
             <a:r>
-              <a:rPr lang="en-US" altLang="en-US" sz="1550" b="0">
+              <a:rPr lang="en-US" altLang="en-US" sz="1550" b="0" dirty="0">
                 <a:solidFill>
                   <a:srgbClr val="5B6B82"/>
                 </a:solidFill>
@@ -15625,12 +14810,6 @@
               </a:rPr>
               <a:t>We re-ran the two headline coefficients under the professor's corrected specification</a:t>
             </a:r>
-            <a:endParaRPr lang="en-US" altLang="en-US" sz="1550" b="0">
-              <a:solidFill>
-                <a:srgbClr val="5B6B82"/>
-              </a:solidFill>
-              <a:latin typeface="Georgia" panose="02040502050405090303"/>
-            </a:endParaRPr>
           </a:p>
         </p:txBody>
       </p:sp>
@@ -15675,6 +14854,7 @@
           <a:lstStyle/>
           <a:p>
             <a:pPr algn="ctr"/>
+            <a:endParaRPr/>
           </a:p>
         </p:txBody>
       </p:sp>
@@ -15719,6 +14899,7 @@
           <a:lstStyle/>
           <a:p>
             <a:pPr algn="ctr"/>
+            <a:endParaRPr/>
           </a:p>
         </p:txBody>
       </p:sp>
@@ -15761,12 +14942,6 @@
               </a:rPr>
               <a:t>Neither Result Survived</a:t>
             </a:r>
-            <a:endParaRPr sz="1600" b="1">
-              <a:solidFill>
-                <a:srgbClr val="C1121F"/>
-              </a:solidFill>
-              <a:latin typeface="Georgia" panose="02040502050405090303"/>
-            </a:endParaRPr>
           </a:p>
         </p:txBody>
       </p:sp>
@@ -15798,7 +14973,7 @@
               </a:spcAft>
             </a:pPr>
             <a:r>
-              <a:rPr sz="1400" b="1">
+              <a:rPr sz="1400" b="1" dirty="0">
                 <a:solidFill>
                   <a:srgbClr val="13294B"/>
                 </a:solidFill>
@@ -15806,12 +14981,6 @@
               </a:rPr>
               <a:t>β₁ — Privilege Amplification</a:t>
             </a:r>
-            <a:endParaRPr sz="1400" b="1">
-              <a:solidFill>
-                <a:srgbClr val="13294B"/>
-              </a:solidFill>
-              <a:latin typeface="Calibri"/>
-            </a:endParaRPr>
           </a:p>
           <a:p>
             <a:pPr algn="l">
@@ -15820,7 +14989,7 @@
               </a:spcBef>
             </a:pPr>
             <a:r>
-              <a:rPr sz="1200" b="0">
+              <a:rPr sz="1200" b="0" dirty="0">
                 <a:solidFill>
                   <a:srgbClr val="33425C"/>
                 </a:solidFill>
@@ -15828,17 +14997,11 @@
               </a:rPr>
               <a:t>→  Measures the baseline direct effect of stablecoin supply growth on yield spreads, independent of the buffer level</a:t>
             </a:r>
-            <a:endParaRPr sz="1200" b="0">
-              <a:solidFill>
-                <a:srgbClr val="33425C"/>
-              </a:solidFill>
-              <a:latin typeface="Calibri"/>
-            </a:endParaRPr>
           </a:p>
           <a:p>
             <a:pPr algn="l"/>
             <a:r>
-              <a:rPr sz="1200" b="0">
+              <a:rPr sz="1200" b="0" dirty="0">
                 <a:solidFill>
                   <a:srgbClr val="33425C"/>
                 </a:solidFill>
@@ -15846,17 +15009,11 @@
               </a:rPr>
               <a:t>→  Before: β₁ = −7.57 (p = 0.004) — statistically significant</a:t>
             </a:r>
-            <a:endParaRPr sz="1200" b="0">
-              <a:solidFill>
-                <a:srgbClr val="33425C"/>
-              </a:solidFill>
-              <a:latin typeface="Calibri"/>
-            </a:endParaRPr>
           </a:p>
           <a:p>
             <a:pPr algn="l"/>
             <a:r>
-              <a:rPr sz="1200" b="1">
+              <a:rPr sz="1200" b="1" dirty="0">
                 <a:solidFill>
                   <a:srgbClr val="E8A12C"/>
                 </a:solidFill>
@@ -15864,12 +15021,6 @@
               </a:rPr>
               <a:t>→  After re-run: β₁ = +2.74 — not significant; sign flipped</a:t>
             </a:r>
-            <a:endParaRPr sz="1200" b="1">
-              <a:solidFill>
-                <a:srgbClr val="E8A12C"/>
-              </a:solidFill>
-              <a:latin typeface="Calibri"/>
-            </a:endParaRPr>
           </a:p>
           <a:p>
             <a:pPr algn="l">
@@ -15878,7 +15029,7 @@
               </a:spcAft>
             </a:pPr>
             <a:r>
-              <a:rPr sz="1200" b="0">
+              <a:rPr sz="1200" b="0" dirty="0">
                 <a:solidFill>
                   <a:srgbClr val="33425C"/>
                 </a:solidFill>
@@ -15886,12 +15037,6 @@
               </a:rPr>
               <a:t>→  Verdict: amplification claim does not hold</a:t>
             </a:r>
-            <a:endParaRPr sz="1200" b="0">
-              <a:solidFill>
-                <a:srgbClr val="33425C"/>
-              </a:solidFill>
-              <a:latin typeface="Calibri"/>
-            </a:endParaRPr>
           </a:p>
           <a:p>
             <a:pPr algn="l">
@@ -15903,7 +15048,7 @@
               </a:spcAft>
             </a:pPr>
             <a:r>
-              <a:rPr sz="1400" b="1">
+              <a:rPr sz="1400" b="1" dirty="0">
                 <a:solidFill>
                   <a:srgbClr val="13294B"/>
                 </a:solidFill>
@@ -15911,12 +15056,6 @@
               </a:rPr>
               <a:t>β₄ — Buffer Interaction</a:t>
             </a:r>
-            <a:endParaRPr sz="1400" b="1">
-              <a:solidFill>
-                <a:srgbClr val="13294B"/>
-              </a:solidFill>
-              <a:latin typeface="Calibri"/>
-            </a:endParaRPr>
           </a:p>
           <a:p>
             <a:pPr algn="l">
@@ -15925,7 +15064,7 @@
               </a:spcBef>
             </a:pPr>
             <a:r>
-              <a:rPr sz="1200" b="0">
+              <a:rPr sz="1200" b="0" dirty="0">
                 <a:solidFill>
                   <a:srgbClr val="33425C"/>
                 </a:solidFill>
@@ -15933,17 +15072,11 @@
               </a:rPr>
               <a:t>→  Tests whether the reserve buffer level amplifies or dampens the effect of stablecoin supply growth on spreads</a:t>
             </a:r>
-            <a:endParaRPr sz="1200" b="0">
-              <a:solidFill>
-                <a:srgbClr val="33425C"/>
-              </a:solidFill>
-              <a:latin typeface="Calibri"/>
-            </a:endParaRPr>
           </a:p>
           <a:p>
             <a:pPr algn="l"/>
             <a:r>
-              <a:rPr sz="1200" b="0">
+              <a:rPr sz="1200" b="0" dirty="0">
                 <a:solidFill>
                   <a:srgbClr val="33425C"/>
                 </a:solidFill>
@@ -15951,17 +15084,11 @@
               </a:rPr>
               <a:t>→  Levels regression: β₄ = −35.89 (p = 0.032) — appeared significant</a:t>
             </a:r>
-            <a:endParaRPr sz="1200" b="0">
-              <a:solidFill>
-                <a:srgbClr val="33425C"/>
-              </a:solidFill>
-              <a:latin typeface="Calibri"/>
-            </a:endParaRPr>
           </a:p>
           <a:p>
             <a:pPr algn="l"/>
             <a:r>
-              <a:rPr sz="1200" b="1">
+              <a:rPr sz="1200" b="1" dirty="0">
                 <a:solidFill>
                   <a:srgbClr val="E8A12C"/>
                 </a:solidFill>
@@ -15969,17 +15096,11 @@
               </a:rPr>
               <a:t>→  First-differenced: β₄ = −107 (p = 0.46) — collapses to insignificance</a:t>
             </a:r>
-            <a:endParaRPr sz="1200" b="1">
-              <a:solidFill>
-                <a:srgbClr val="E8A12C"/>
-              </a:solidFill>
-              <a:latin typeface="Calibri"/>
-            </a:endParaRPr>
           </a:p>
           <a:p>
             <a:pPr algn="l"/>
             <a:r>
-              <a:rPr sz="1200" b="0">
+              <a:rPr sz="1200" b="0" dirty="0">
                 <a:solidFill>
                   <a:srgbClr val="33425C"/>
                 </a:solidFill>
@@ -15987,12 +15108,6 @@
               </a:rPr>
               <a:t>→  Result vanishes under differencing — consistent with spurious regression</a:t>
             </a:r>
-            <a:endParaRPr sz="1200" b="0">
-              <a:solidFill>
-                <a:srgbClr val="33425C"/>
-              </a:solidFill>
-              <a:latin typeface="Calibri"/>
-            </a:endParaRPr>
           </a:p>
         </p:txBody>
       </p:sp>
@@ -16037,6 +15152,7 @@
           <a:lstStyle/>
           <a:p>
             <a:pPr algn="ctr"/>
+            <a:endParaRPr/>
           </a:p>
         </p:txBody>
       </p:sp>
@@ -16079,12 +15195,6 @@
               </a:rPr>
               <a:t>What we dropped from the main claims</a:t>
             </a:r>
-            <a:endParaRPr sz="1600" b="1">
-              <a:solidFill>
-                <a:srgbClr val="E8A12C"/>
-              </a:solidFill>
-              <a:latin typeface="Georgia" panose="02040502050405090303"/>
-            </a:endParaRPr>
           </a:p>
         </p:txBody>
       </p:sp>
@@ -16119,7 +15229,7 @@
               </a:spcAft>
             </a:pPr>
             <a:r>
-              <a:rPr sz="1600" b="1">
+              <a:rPr sz="1600" b="1" dirty="0">
                 <a:solidFill>
                   <a:srgbClr val="FFFFFF"/>
                 </a:solidFill>
@@ -16127,38 +15237,32 @@
               </a:rPr>
               <a:t>β₁ (privilege amplification)   ·   the ≈13% reserve threshold   ·   the LSTAR model</a:t>
             </a:r>
-            <a:endParaRPr sz="1600" b="1">
+          </a:p>
+          <a:p>
+            <a:pPr algn="l">
+              <a:lnSpc>
+                <a:spcPct val="110000"/>
+              </a:lnSpc>
+              <a:spcAft>
+                <a:spcPts val="300"/>
+              </a:spcAft>
+            </a:pPr>
+            <a:r>
+              <a:rPr sz="1200" dirty="0">
+                <a:solidFill>
+                  <a:srgbClr val="FFFFFF"/>
+                </a:solidFill>
+                <a:latin typeface="Calibri"/>
+              </a:rPr>
+              <a:t>β₁ and β₄ lost significance when re-run correctly. The threshold and LSTAR ran only in the (now-invalid) levels regression — we do not carry them forward.</a:t>
+            </a:r>
+            <a:endParaRPr sz="1200" b="0" dirty="0">
               <a:solidFill>
                 <a:srgbClr val="FFFFFF"/>
               </a:solidFill>
               <a:latin typeface="Calibri"/>
             </a:endParaRPr>
           </a:p>
-          <a:p>
-            <a:pPr algn="l">
-              <a:lnSpc>
-                <a:spcPct val="110000"/>
-              </a:lnSpc>
-              <a:spcAft>
-                <a:spcPts val="300"/>
-              </a:spcAft>
-            </a:pPr>
-            <a:r>
-              <a:rPr sz="1200">
-                <a:solidFill>
-                  <a:srgbClr val="FFFFFF"/>
-                </a:solidFill>
-                <a:latin typeface="Calibri"/>
-              </a:rPr>
-              <a:t>β₁ and β₄ lost significance when re-run correctly. The threshold and LSTAR ran only in the (now-invalid) levels regression — we do not carry them forward.</a:t>
-            </a:r>
-            <a:endParaRPr sz="1200" b="0">
-              <a:solidFill>
-                <a:srgbClr val="FFFFFF"/>
-              </a:solidFill>
-              <a:latin typeface="Calibri"/>
-            </a:endParaRPr>
-          </a:p>
         </p:txBody>
       </p:sp>
       <p:sp>
@@ -16200,12 +15304,6 @@
               </a:rPr>
               <a:t>Stablecoins &amp; the Exorbitant Privilege</a:t>
             </a:r>
-            <a:endParaRPr sz="900" b="0">
-              <a:solidFill>
-                <a:srgbClr val="5B6B82"/>
-              </a:solidFill>
-              <a:latin typeface="Calibri"/>
-            </a:endParaRPr>
           </a:p>
         </p:txBody>
       </p:sp>
@@ -16248,12 +15346,6 @@
               </a:rPr>
               <a:t>4</a:t>
             </a:r>
-            <a:endParaRPr sz="1100" b="0">
-              <a:solidFill>
-                <a:srgbClr val="5B6B82"/>
-              </a:solidFill>
-              <a:latin typeface="Calibri"/>
-            </a:endParaRPr>
           </a:p>
         </p:txBody>
       </p:sp>
@@ -16297,6 +15389,7 @@
           <a:lstStyle/>
           <a:p>
             <a:pPr algn="ctr"/>
+            <a:endParaRPr/>
           </a:p>
         </p:txBody>
       </p:sp>
@@ -16328,7 +15421,7 @@
               </a:spcAft>
             </a:pPr>
             <a:r>
-              <a:rPr sz="1050" b="1">
+              <a:rPr sz="1050" b="1" dirty="0">
                 <a:solidFill>
                   <a:srgbClr val="13294B"/>
                 </a:solidFill>
@@ -16336,12 +15429,6 @@
               </a:rPr>
               <a:t>① Original  —  before professor's feedback</a:t>
             </a:r>
-            <a:endParaRPr sz="1050" b="1">
-              <a:solidFill>
-                <a:srgbClr val="13294B"/>
-              </a:solidFill>
-              <a:latin typeface="Calibri"/>
-            </a:endParaRPr>
           </a:p>
           <a:p>
             <a:pPr algn="l">
@@ -16350,25 +15437,73 @@
               </a:spcAft>
             </a:pPr>
             <a:r>
-              <a:rPr sz="1200" b="0">
+              <a:rPr sz="1200" b="0" dirty="0">
                 <a:solidFill>
                   <a:srgbClr val="33425C"/>
                 </a:solidFill>
                 <a:latin typeface="Calibri"/>
               </a:rPr>
-              <a:t>Spread = α + β₁·ΔlnS + β₂·θ + β₃·L + β₄·(L×ΔlnS) + controls</a:t>
-            </a:r>
-            <a:endParaRPr sz="1200" b="0">
-              <a:solidFill>
-                <a:srgbClr val="33425C"/>
-              </a:solidFill>
-              <a:latin typeface="Calibri"/>
-            </a:endParaRPr>
+              <a:t>Spread = α + β₁·</a:t>
+            </a:r>
+            <a:r>
+              <a:rPr sz="1200" b="0" dirty="0" err="1">
+                <a:solidFill>
+                  <a:srgbClr val="33425C"/>
+                </a:solidFill>
+                <a:latin typeface="Calibri"/>
+              </a:rPr>
+              <a:t>ΔlnS</a:t>
+            </a:r>
+            <a:r>
+              <a:rPr sz="1200" b="0" dirty="0">
+                <a:solidFill>
+                  <a:srgbClr val="33425C"/>
+                </a:solidFill>
+                <a:latin typeface="Calibri"/>
+              </a:rPr>
+              <a:t> + β₂·</a:t>
+            </a:r>
+            <a:r>
+              <a:rPr sz="1200" b="0" dirty="0" err="1">
+                <a:solidFill>
+                  <a:srgbClr val="33425C"/>
+                </a:solidFill>
+                <a:latin typeface="Calibri"/>
+              </a:rPr>
+              <a:t>θ</a:t>
+            </a:r>
+            <a:r>
+              <a:rPr sz="1200" b="0" dirty="0">
+                <a:solidFill>
+                  <a:srgbClr val="33425C"/>
+                </a:solidFill>
+                <a:latin typeface="Calibri"/>
+              </a:rPr>
+              <a:t> + β₃·L + β₄·(</a:t>
+            </a:r>
+            <a:r>
+              <a:rPr sz="1200" b="0" dirty="0" err="1">
+                <a:solidFill>
+                  <a:srgbClr val="33425C"/>
+                </a:solidFill>
+                <a:latin typeface="Calibri"/>
+              </a:rPr>
+              <a:t>L×ΔlnS</a:t>
+            </a:r>
+            <a:r>
+              <a:rPr sz="1200" b="0" dirty="0">
+                <a:solidFill>
+                  <a:srgbClr val="33425C"/>
+                </a:solidFill>
+                <a:latin typeface="Calibri"/>
+              </a:rPr>
+              <a:t>) + controls</a:t>
+            </a:r>
           </a:p>
           <a:p>
             <a:pPr algn="l"/>
             <a:r>
-              <a:rPr sz="1200" b="1">
+              <a:rPr sz="1200" b="1" dirty="0">
                 <a:solidFill>
                   <a:srgbClr val="C1121F"/>
                 </a:solidFill>
@@ -16377,14 +15512,14 @@
               <a:t>β₁ = −7.57   (p = 0.004) ***</a:t>
             </a:r>
             <a:br>
-              <a:rPr sz="1200" b="1">
+              <a:rPr sz="1200" b="1" dirty="0">
                 <a:solidFill>
                   <a:srgbClr val="C1121F"/>
                 </a:solidFill>
                 <a:latin typeface="Calibri"/>
               </a:rPr>
             </a:br>
-            <a:endParaRPr sz="1200" b="1">
+            <a:endParaRPr sz="1200" b="1" dirty="0">
               <a:solidFill>
                 <a:srgbClr val="C1121F"/>
               </a:solidFill>
@@ -16434,6 +15569,7 @@
           <a:lstStyle/>
           <a:p>
             <a:pPr algn="ctr"/>
+            <a:endParaRPr/>
           </a:p>
         </p:txBody>
       </p:sp>
@@ -16465,20 +15601,32 @@
               </a:spcAft>
             </a:pPr>
             <a:r>
-              <a:rPr sz="1050" b="1">
+              <a:rPr sz="1050" b="1" dirty="0">
                 <a:solidFill>
                   <a:srgbClr val="1B998B"/>
                 </a:solidFill>
                 <a:latin typeface="Calibri"/>
               </a:rPr>
-              <a:t>② Corrected  —  θ dropped (θ+L≈1, collinear), L kept</a:t>
-            </a:r>
-            <a:endParaRPr sz="1050" b="1">
-              <a:solidFill>
-                <a:srgbClr val="1B998B"/>
-              </a:solidFill>
-              <a:latin typeface="Calibri"/>
-            </a:endParaRPr>
+              <a:t>② Corrected  —  </a:t>
+            </a:r>
+            <a:r>
+              <a:rPr sz="1050" b="1" dirty="0" err="1">
+                <a:solidFill>
+                  <a:srgbClr val="1B998B"/>
+                </a:solidFill>
+                <a:latin typeface="Calibri"/>
+              </a:rPr>
+              <a:t>θ</a:t>
+            </a:r>
+            <a:r>
+              <a:rPr sz="1050" b="1" dirty="0">
+                <a:solidFill>
+                  <a:srgbClr val="1B998B"/>
+                </a:solidFill>
+                <a:latin typeface="Calibri"/>
+              </a:rPr>
+              <a:t> dropped (θ+L≈1, collinear), L kept</a:t>
+            </a:r>
           </a:p>
           <a:p>
             <a:pPr algn="l">
@@ -16487,20 +15635,50 @@
               </a:spcAft>
             </a:pPr>
             <a:r>
-              <a:rPr sz="1200" b="0">
+              <a:rPr sz="1200" b="0" dirty="0">
                 <a:solidFill>
                   <a:srgbClr val="33425C"/>
                 </a:solidFill>
                 <a:latin typeface="Calibri"/>
               </a:rPr>
-              <a:t>Spread = α + β₁·ΔlnS + β₃·L + β₄·(L×ΔlnS) + controls</a:t>
-            </a:r>
-            <a:endParaRPr sz="1200" b="0">
-              <a:solidFill>
-                <a:srgbClr val="33425C"/>
-              </a:solidFill>
-              <a:latin typeface="Calibri"/>
-            </a:endParaRPr>
+              <a:t>Spread = α + β₁·</a:t>
+            </a:r>
+            <a:r>
+              <a:rPr sz="1200" b="0" dirty="0" err="1">
+                <a:solidFill>
+                  <a:srgbClr val="33425C"/>
+                </a:solidFill>
+                <a:latin typeface="Calibri"/>
+              </a:rPr>
+              <a:t>ΔlnS</a:t>
+            </a:r>
+            <a:r>
+              <a:rPr sz="1200" b="0" dirty="0">
+                <a:solidFill>
+                  <a:srgbClr val="33425C"/>
+                </a:solidFill>
+                <a:latin typeface="Calibri"/>
+              </a:rPr>
+              <a:t> + β₃·L + β₄·(</a:t>
+            </a:r>
+            <a:r>
+              <a:rPr sz="1200" b="0" dirty="0" err="1">
+                <a:solidFill>
+                  <a:srgbClr val="33425C"/>
+                </a:solidFill>
+                <a:latin typeface="Calibri"/>
+              </a:rPr>
+              <a:t>L×ΔlnS</a:t>
+            </a:r>
+            <a:r>
+              <a:rPr sz="1200" b="0" dirty="0">
+                <a:solidFill>
+                  <a:srgbClr val="33425C"/>
+                </a:solidFill>
+                <a:latin typeface="Calibri"/>
+              </a:rPr>
+              <a:t>) + controls</a:t>
+            </a:r>
           </a:p>
           <a:p>
             <a:pPr algn="l">
@@ -16509,7 +15687,7 @@
               </a:spcAft>
             </a:pPr>
             <a:r>
-              <a:rPr sz="1200" b="1">
+              <a:rPr sz="1200" b="1" dirty="0">
                 <a:solidFill>
                   <a:srgbClr val="E8A12C"/>
                 </a:solidFill>
@@ -16517,17 +15695,11 @@
               </a:rPr>
               <a:t>β₁ = +2.74   (p = 0.228)   not significant</a:t>
             </a:r>
-            <a:endParaRPr sz="1200" b="1">
-              <a:solidFill>
-                <a:srgbClr val="E8A12C"/>
-              </a:solidFill>
-              <a:latin typeface="Calibri"/>
-            </a:endParaRPr>
           </a:p>
           <a:p>
             <a:pPr algn="l"/>
             <a:r>
-              <a:rPr sz="1200" b="1">
+              <a:rPr sz="1200" b="1" dirty="0">
                 <a:solidFill>
                   <a:srgbClr val="E8A12C"/>
                 </a:solidFill>
@@ -16535,12 +15707,6 @@
               </a:rPr>
               <a:t>β₄ = −35.89  (p = 0.032)   significant in levels</a:t>
             </a:r>
-            <a:endParaRPr sz="1200" b="1">
-              <a:solidFill>
-                <a:srgbClr val="E8A12C"/>
-              </a:solidFill>
-              <a:latin typeface="Calibri"/>
-            </a:endParaRPr>
           </a:p>
         </p:txBody>
       </p:sp>
@@ -16584,6 +15750,7 @@
           <a:lstStyle/>
           <a:p>
             <a:pPr algn="ctr"/>
+            <a:endParaRPr/>
           </a:p>
         </p:txBody>
       </p:sp>
@@ -16615,7 +15782,7 @@
               </a:spcAft>
             </a:pPr>
             <a:r>
-              <a:rPr sz="1050" b="1">
+              <a:rPr sz="1050" b="1" dirty="0">
                 <a:solidFill>
                   <a:srgbClr val="E8A12C"/>
                 </a:solidFill>
@@ -16623,12 +15790,6 @@
               </a:rPr>
               <a:t>③ First-differenced  —  L replaced by ΔL (removes drift)</a:t>
             </a:r>
-            <a:endParaRPr sz="1050" b="1">
-              <a:solidFill>
-                <a:srgbClr val="E8A12C"/>
-              </a:solidFill>
-              <a:latin typeface="Calibri"/>
-            </a:endParaRPr>
           </a:p>
           <a:p>
             <a:pPr algn="l">
@@ -16637,7 +15798,7 @@
               </a:spcAft>
             </a:pPr>
             <a:r>
-              <a:rPr sz="1200" b="0">
+              <a:rPr sz="1200" b="0" dirty="0">
                 <a:solidFill>
                   <a:srgbClr val="33425C"/>
                 </a:solidFill>
@@ -16645,17 +15806,11 @@
               </a:rPr>
               <a:t>ΔSpread = α + β₁·Δ²lnS + β₃·ΔL + β₄·(ΔL×Δ²lnS) + controls</a:t>
             </a:r>
-            <a:endParaRPr sz="1200" b="0">
-              <a:solidFill>
-                <a:srgbClr val="33425C"/>
-              </a:solidFill>
-              <a:latin typeface="Calibri"/>
-            </a:endParaRPr>
           </a:p>
           <a:p>
             <a:pPr algn="l"/>
             <a:r>
-              <a:rPr sz="1200" b="1">
+              <a:rPr sz="1200" b="1" dirty="0">
                 <a:solidFill>
                   <a:srgbClr val="C1121F"/>
                 </a:solidFill>
@@ -16665,7 +15820,7 @@
               <a:t>β₁ = </a:t>
             </a:r>
             <a:r>
-              <a:rPr lang="en-US" altLang="en-US" sz="1200" b="1">
+              <a:rPr lang="en-US" altLang="en-US" sz="1200" b="1" dirty="0">
                 <a:solidFill>
                   <a:srgbClr val="C1121F"/>
                 </a:solidFill>
@@ -16675,7 +15830,7 @@
               <a:t>0.82 (p = 0.13)             </a:t>
             </a:r>
             <a:r>
-              <a:rPr sz="1200" b="1">
+              <a:rPr sz="1200" b="1" dirty="0">
                 <a:solidFill>
                   <a:srgbClr val="C1121F"/>
                 </a:solidFill>
@@ -16683,7 +15838,7 @@
               </a:rPr>
               <a:t>β₄ = −107   (p = 0.46)  </a:t>
             </a:r>
-            <a:endParaRPr lang="en-US" altLang="en-US" sz="1200" b="1">
+            <a:endParaRPr lang="en-US" altLang="en-US" sz="1200" b="1" dirty="0">
               <a:solidFill>
                 <a:srgbClr val="C1121F"/>
               </a:solidFill>
@@ -16709,7 +15864,14 @@
         <p:cNvGrpSpPr/>
         <p:nvPr/>
       </p:nvGrpSpPr>
-      <p:grpSpPr/>
+      <p:grpSpPr>
+        <a:xfrm>
+          <a:off x="0" y="0"/>
+          <a:ext cx="0" cy="0"/>
+          <a:chOff x="0" y="0"/>
+          <a:chExt cx="0" cy="0"/>
+        </a:xfrm>
+      </p:grpSpPr>
       <p:sp>
         <p:nvSpPr>
           <p:cNvPr id="2" name="Rectangle 1"/>
@@ -16750,6 +15912,7 @@
           <a:lstStyle/>
           <a:p>
             <a:pPr algn="ctr"/>
+            <a:endParaRPr/>
           </a:p>
         </p:txBody>
       </p:sp>
@@ -16793,6 +15956,7 @@
           <a:lstStyle/>
           <a:p>
             <a:pPr algn="ctr"/>
+            <a:endParaRPr/>
           </a:p>
         </p:txBody>
       </p:sp>
@@ -16828,12 +15992,6 @@
               </a:rPr>
               <a:t>AFTER THE PROFESSOR'S FEEDBACK</a:t>
             </a:r>
-            <a:endParaRPr sz="1200" b="1">
-              <a:solidFill>
-                <a:srgbClr val="1B998B"/>
-              </a:solidFill>
-              <a:latin typeface="Calibri"/>
-            </a:endParaRPr>
           </a:p>
         </p:txBody>
       </p:sp>
@@ -16869,12 +16027,6 @@
               </a:rPr>
               <a:t>Why? Diagnosing Spurious Regression</a:t>
             </a:r>
-            <a:endParaRPr sz="2700" b="1">
-              <a:solidFill>
-                <a:srgbClr val="13294B"/>
-              </a:solidFill>
-              <a:latin typeface="Georgia" panose="02040502050405090303"/>
-            </a:endParaRPr>
           </a:p>
         </p:txBody>
       </p:sp>
@@ -16910,12 +16062,6 @@
               </a:rPr>
               <a:t>We ran three standard tests to confirm the original regression was spurious</a:t>
             </a:r>
-            <a:endParaRPr lang="en-US" altLang="en-US" sz="1550" b="0">
-              <a:solidFill>
-                <a:srgbClr val="5B6B82"/>
-              </a:solidFill>
-              <a:latin typeface="Georgia" panose="02040502050405090303"/>
-            </a:endParaRPr>
           </a:p>
         </p:txBody>
       </p:sp>
@@ -16951,12 +16097,6 @@
               </a:rPr>
               <a:t>Stablecoins &amp; the Exorbitant Privilege</a:t>
             </a:r>
-            <a:endParaRPr sz="900" b="0">
-              <a:solidFill>
-                <a:srgbClr val="5B6B82"/>
-              </a:solidFill>
-              <a:latin typeface="Calibri"/>
-            </a:endParaRPr>
           </a:p>
         </p:txBody>
       </p:sp>
@@ -16992,12 +16132,6 @@
               </a:rPr>
               <a:t>5</a:t>
             </a:r>
-            <a:endParaRPr sz="1100" b="0">
-              <a:solidFill>
-                <a:srgbClr val="5B6B82"/>
-              </a:solidFill>
-              <a:latin typeface="Calibri"/>
-            </a:endParaRPr>
           </a:p>
         </p:txBody>
       </p:sp>
@@ -17041,6 +16175,7 @@
           <a:lstStyle/>
           <a:p>
             <a:pPr algn="ctr"/>
+            <a:endParaRPr/>
           </a:p>
         </p:txBody>
       </p:sp>
@@ -17084,6 +16219,7 @@
           <a:lstStyle/>
           <a:p>
             <a:pPr algn="ctr"/>
+            <a:endParaRPr/>
           </a:p>
         </p:txBody>
       </p:sp>
@@ -17119,12 +16255,6 @@
               </a:rPr>
               <a:t>ADF Unit Root Test</a:t>
             </a:r>
-            <a:endParaRPr sz="1400" b="1">
-              <a:solidFill>
-                <a:srgbClr val="13294B"/>
-              </a:solidFill>
-              <a:latin typeface="Georgia" panose="02040502050405090303"/>
-            </a:endParaRPr>
           </a:p>
         </p:txBody>
       </p:sp>
@@ -17164,12 +16294,6 @@
               </a:rPr>
               <a:t>What it is</a:t>
             </a:r>
-            <a:endParaRPr sz="1200" b="1">
-              <a:solidFill>
-                <a:srgbClr val="1B998B"/>
-              </a:solidFill>
-              <a:latin typeface="Calibri"/>
-            </a:endParaRPr>
           </a:p>
           <a:p>
             <a:pPr algn="l"/>
@@ -17182,12 +16306,6 @@
               </a:rPr>
               <a:t>Does the variable drift without a stable mean? If yes → non-stationary</a:t>
             </a:r>
-            <a:endParaRPr sz="1200" b="0">
-              <a:solidFill>
-                <a:srgbClr val="33425C"/>
-              </a:solidFill>
-              <a:latin typeface="Calibri"/>
-            </a:endParaRPr>
           </a:p>
           <a:p>
             <a:pPr algn="l">
@@ -17207,12 +16325,6 @@
               </a:rPr>
               <a:t>Why we ran it</a:t>
             </a:r>
-            <a:endParaRPr sz="1200" b="1">
-              <a:solidFill>
-                <a:srgbClr val="1B998B"/>
-              </a:solidFill>
-              <a:latin typeface="Calibri"/>
-            </a:endParaRPr>
           </a:p>
           <a:p>
             <a:pPr algn="l"/>
@@ -17225,12 +16337,6 @@
               </a:rPr>
               <a:t>Non-stationary variables produce spurious regressions — false significance from shared drift</a:t>
             </a:r>
-            <a:endParaRPr sz="1200" b="0">
-              <a:solidFill>
-                <a:srgbClr val="33425C"/>
-              </a:solidFill>
-              <a:latin typeface="Calibri"/>
-            </a:endParaRPr>
           </a:p>
           <a:p>
             <a:pPr algn="l">
@@ -17250,12 +16356,6 @@
               </a:rPr>
               <a:t>Our result</a:t>
             </a:r>
-            <a:endParaRPr sz="1200" b="1">
-              <a:solidFill>
-                <a:srgbClr val="E8A12C"/>
-              </a:solidFill>
-              <a:latin typeface="Calibri"/>
-            </a:endParaRPr>
           </a:p>
           <a:p>
             <a:pPr algn="l"/>
@@ -17268,12 +16368,6 @@
               </a:rPr>
               <a:t>Spread p = 0.494  ·  Buffer L p = 0.902 → both non-stationary, I(1)</a:t>
             </a:r>
-            <a:endParaRPr sz="1200" b="0">
-              <a:solidFill>
-                <a:srgbClr val="33425C"/>
-              </a:solidFill>
-              <a:latin typeface="Calibri"/>
-            </a:endParaRPr>
           </a:p>
           <a:p>
             <a:pPr algn="l">
@@ -17293,12 +16387,6 @@
               </a:rPr>
               <a:t>What it means</a:t>
             </a:r>
-            <a:endParaRPr sz="1200" b="1">
-              <a:solidFill>
-                <a:srgbClr val="C1121F"/>
-              </a:solidFill>
-              <a:latin typeface="Calibri"/>
-            </a:endParaRPr>
           </a:p>
           <a:p>
             <a:pPr algn="l"/>
@@ -17311,12 +16399,6 @@
               </a:rPr>
               <a:t>Both variables drifted down together — coincidence, not causation</a:t>
             </a:r>
-            <a:endParaRPr sz="1200" b="0">
-              <a:solidFill>
-                <a:srgbClr val="33425C"/>
-              </a:solidFill>
-              <a:latin typeface="Calibri"/>
-            </a:endParaRPr>
           </a:p>
         </p:txBody>
       </p:sp>
@@ -17360,6 +16442,7 @@
           <a:lstStyle/>
           <a:p>
             <a:pPr algn="ctr"/>
+            <a:endParaRPr/>
           </a:p>
         </p:txBody>
       </p:sp>
@@ -17403,6 +16486,7 @@
           <a:lstStyle/>
           <a:p>
             <a:pPr algn="ctr"/>
+            <a:endParaRPr/>
           </a:p>
         </p:txBody>
       </p:sp>
@@ -17438,12 +16522,6 @@
               </a:rPr>
               <a:t>Engle–Granger Cointegration</a:t>
             </a:r>
-            <a:endParaRPr sz="1400" b="1">
-              <a:solidFill>
-                <a:srgbClr val="13294B"/>
-              </a:solidFill>
-              <a:latin typeface="Georgia" panose="02040502050405090303"/>
-            </a:endParaRPr>
           </a:p>
         </p:txBody>
       </p:sp>
@@ -17483,12 +16561,6 @@
               </a:rPr>
               <a:t>What it is</a:t>
             </a:r>
-            <a:endParaRPr sz="1200" b="1">
-              <a:solidFill>
-                <a:srgbClr val="1B998B"/>
-              </a:solidFill>
-              <a:latin typeface="Calibri"/>
-            </a:endParaRPr>
           </a:p>
           <a:p>
             <a:pPr algn="l"/>
@@ -17501,12 +16573,6 @@
               </a:rPr>
               <a:t>Even if non-stationary individually, a stable long-run link (cointegration) makes regression valid</a:t>
             </a:r>
-            <a:endParaRPr sz="1200" b="0">
-              <a:solidFill>
-                <a:srgbClr val="33425C"/>
-              </a:solidFill>
-              <a:latin typeface="Calibri"/>
-            </a:endParaRPr>
           </a:p>
           <a:p>
             <a:pPr algn="l">
@@ -17526,12 +16592,6 @@
               </a:rPr>
               <a:t>Why we ran it</a:t>
             </a:r>
-            <a:endParaRPr sz="1200" b="1">
-              <a:solidFill>
-                <a:srgbClr val="1B998B"/>
-              </a:solidFill>
-              <a:latin typeface="Calibri"/>
-            </a:endParaRPr>
           </a:p>
           <a:p>
             <a:pPr algn="l"/>
@@ -17544,12 +16604,6 @@
               </a:rPr>
               <a:t>Standard rescue — if cointegration holds, levels regression survives</a:t>
             </a:r>
-            <a:endParaRPr sz="1200" b="0">
-              <a:solidFill>
-                <a:srgbClr val="33425C"/>
-              </a:solidFill>
-              <a:latin typeface="Calibri"/>
-            </a:endParaRPr>
           </a:p>
           <a:p>
             <a:pPr algn="l">
@@ -17569,12 +16623,6 @@
               </a:rPr>
               <a:t>Our result</a:t>
             </a:r>
-            <a:endParaRPr sz="1200" b="1">
-              <a:solidFill>
-                <a:srgbClr val="E8A12C"/>
-              </a:solidFill>
-              <a:latin typeface="Calibri"/>
-            </a:endParaRPr>
           </a:p>
           <a:p>
             <a:pPr algn="l"/>
@@ -17587,12 +16635,6 @@
               </a:rPr>
               <a:t>p = 0.120 → cannot reject no cointegration</a:t>
             </a:r>
-            <a:endParaRPr sz="1200" b="0">
-              <a:solidFill>
-                <a:srgbClr val="33425C"/>
-              </a:solidFill>
-              <a:latin typeface="Calibri"/>
-            </a:endParaRPr>
           </a:p>
           <a:p>
             <a:pPr algn="l">
@@ -17612,12 +16654,6 @@
               </a:rPr>
               <a:t>What it means</a:t>
             </a:r>
-            <a:endParaRPr sz="1200" b="1">
-              <a:solidFill>
-                <a:srgbClr val="C1121F"/>
-              </a:solidFill>
-              <a:latin typeface="Calibri"/>
-            </a:endParaRPr>
           </a:p>
           <a:p>
             <a:pPr algn="l"/>
@@ -17630,12 +16666,6 @@
               </a:rPr>
               <a:t>No stable long-run link — they fell together during 2022–24 hiking, then diverged</a:t>
             </a:r>
-            <a:endParaRPr sz="1200" b="0">
-              <a:solidFill>
-                <a:srgbClr val="33425C"/>
-              </a:solidFill>
-              <a:latin typeface="Calibri"/>
-            </a:endParaRPr>
           </a:p>
         </p:txBody>
       </p:sp>
@@ -17679,6 +16709,7 @@
           <a:lstStyle/>
           <a:p>
             <a:pPr algn="ctr"/>
+            <a:endParaRPr/>
           </a:p>
         </p:txBody>
       </p:sp>
@@ -17722,6 +16753,7 @@
           <a:lstStyle/>
           <a:p>
             <a:pPr algn="ctr"/>
+            <a:endParaRPr/>
           </a:p>
         </p:txBody>
       </p:sp>
@@ -17757,12 +16789,6 @@
               </a:rPr>
               <a:t>Johansen Test</a:t>
             </a:r>
-            <a:endParaRPr sz="1400" b="1">
-              <a:solidFill>
-                <a:srgbClr val="13294B"/>
-              </a:solidFill>
-              <a:latin typeface="Georgia" panose="02040502050405090303"/>
-            </a:endParaRPr>
           </a:p>
         </p:txBody>
       </p:sp>
@@ -17802,12 +16828,6 @@
               </a:rPr>
               <a:t>What it is</a:t>
             </a:r>
-            <a:endParaRPr sz="1200" b="1">
-              <a:solidFill>
-                <a:srgbClr val="1B998B"/>
-              </a:solidFill>
-              <a:latin typeface="Calibri"/>
-            </a:endParaRPr>
           </a:p>
           <a:p>
             <a:pPr algn="l"/>
@@ -17820,12 +16840,6 @@
               </a:rPr>
               <a:t>Stronger, multivariate cointegration test — checks the full system, not one pair</a:t>
             </a:r>
-            <a:endParaRPr sz="1200" b="0">
-              <a:solidFill>
-                <a:srgbClr val="33425C"/>
-              </a:solidFill>
-              <a:latin typeface="Calibri"/>
-            </a:endParaRPr>
           </a:p>
           <a:p>
             <a:pPr algn="l">
@@ -17845,12 +16859,6 @@
               </a:rPr>
               <a:t>Why we ran it</a:t>
             </a:r>
-            <a:endParaRPr sz="1200" b="1">
-              <a:solidFill>
-                <a:srgbClr val="1B998B"/>
-              </a:solidFill>
-              <a:latin typeface="Calibri"/>
-            </a:endParaRPr>
           </a:p>
           <a:p>
             <a:pPr algn="l"/>
@@ -17863,12 +16871,6 @@
               </a:rPr>
               <a:t>More reliable in small samples — the definitive confirmation</a:t>
             </a:r>
-            <a:endParaRPr sz="1200" b="0">
-              <a:solidFill>
-                <a:srgbClr val="33425C"/>
-              </a:solidFill>
-              <a:latin typeface="Calibri"/>
-            </a:endParaRPr>
           </a:p>
           <a:p>
             <a:pPr algn="l">
@@ -17888,12 +16890,6 @@
               </a:rPr>
               <a:t>Our result</a:t>
             </a:r>
-            <a:endParaRPr sz="1200" b="1">
-              <a:solidFill>
-                <a:srgbClr val="E8A12C"/>
-              </a:solidFill>
-              <a:latin typeface="Calibri"/>
-            </a:endParaRPr>
           </a:p>
           <a:p>
             <a:pPr algn="l"/>
@@ -17906,12 +16902,6 @@
               </a:rPr>
               <a:t>Fails to reject r = 0 (zero cointegrating vectors)</a:t>
             </a:r>
-            <a:endParaRPr sz="1200" b="0">
-              <a:solidFill>
-                <a:srgbClr val="33425C"/>
-              </a:solidFill>
-              <a:latin typeface="Calibri"/>
-            </a:endParaRPr>
           </a:p>
           <a:p>
             <a:pPr algn="l">
@@ -17931,12 +16921,6 @@
               </a:rPr>
               <a:t>What it means</a:t>
             </a:r>
-            <a:endParaRPr sz="1200" b="1">
-              <a:solidFill>
-                <a:srgbClr val="C1121F"/>
-              </a:solidFill>
-              <a:latin typeface="Calibri"/>
-            </a:endParaRPr>
           </a:p>
           <a:p>
             <a:pPr algn="l"/>
@@ -17949,12 +16933,6 @@
               </a:rPr>
               <a:t>Both tests fail → levels regression is spurious</a:t>
             </a:r>
-            <a:endParaRPr sz="1200" b="0">
-              <a:solidFill>
-                <a:srgbClr val="33425C"/>
-              </a:solidFill>
-              <a:latin typeface="Calibri"/>
-            </a:endParaRPr>
           </a:p>
         </p:txBody>
       </p:sp>
@@ -17998,6 +16976,7 @@
           <a:lstStyle/>
           <a:p>
             <a:pPr algn="ctr"/>
+            <a:endParaRPr/>
           </a:p>
         </p:txBody>
       </p:sp>
@@ -18033,12 +17012,6 @@
               </a:rPr>
               <a:t>All three tests agree: the variables are non-stationary and not cointegrated. The original results were driven by shared drift during the 2022–24 Fed hiking cycle — not a genuine economic relationship.</a:t>
             </a:r>
-            <a:endParaRPr sz="1200" b="0">
-              <a:solidFill>
-                <a:srgbClr val="FFFFFF"/>
-              </a:solidFill>
-              <a:latin typeface="Calibri"/>
-            </a:endParaRPr>
           </a:p>
         </p:txBody>
       </p:sp>
@@ -18108,6 +17081,7 @@
           <a:lstStyle/>
           <a:p>
             <a:pPr algn="ctr"/>
+            <a:endParaRPr/>
           </a:p>
         </p:txBody>
       </p:sp>
@@ -18152,6 +17126,7 @@
           <a:lstStyle/>
           <a:p>
             <a:pPr algn="ctr"/>
+            <a:endParaRPr/>
           </a:p>
         </p:txBody>
       </p:sp>
@@ -18194,12 +17169,6 @@
               </a:rPr>
               <a:t>OUR RESPONSE</a:t>
             </a:r>
-            <a:endParaRPr sz="1200" b="1">
-              <a:solidFill>
-                <a:srgbClr val="1B998B"/>
-              </a:solidFill>
-              <a:latin typeface="Calibri"/>
-            </a:endParaRPr>
           </a:p>
         </p:txBody>
       </p:sp>
@@ -18234,7 +17203,7 @@
               </a:spcAft>
             </a:pPr>
             <a:r>
-              <a:rPr sz="2700" b="1">
+              <a:rPr sz="2700" b="1" dirty="0">
                 <a:solidFill>
                   <a:srgbClr val="13294B"/>
                 </a:solidFill>
@@ -18242,12 +17211,6 @@
               </a:rPr>
               <a:t>Finding the Result That Survives</a:t>
             </a:r>
-            <a:endParaRPr sz="2700" b="1">
-              <a:solidFill>
-                <a:srgbClr val="13294B"/>
-              </a:solidFill>
-              <a:latin typeface="Georgia" panose="02040502050405090303"/>
-            </a:endParaRPr>
           </a:p>
         </p:txBody>
       </p:sp>
@@ -18290,12 +17253,6 @@
               </a:rPr>
               <a:t>We changed the dependent variable, then tried hard to break the new result</a:t>
             </a:r>
-            <a:endParaRPr sz="1550" b="0">
-              <a:solidFill>
-                <a:srgbClr val="5B6B82"/>
-              </a:solidFill>
-              <a:latin typeface="Georgia" panose="02040502050405090303"/>
-            </a:endParaRPr>
           </a:p>
         </p:txBody>
       </p:sp>
@@ -18340,6 +17297,7 @@
           <a:lstStyle/>
           <a:p>
             <a:pPr algn="ctr"/>
+            <a:endParaRPr/>
           </a:p>
         </p:txBody>
       </p:sp>
@@ -18384,6 +17342,7 @@
           <a:lstStyle/>
           <a:p>
             <a:pPr algn="ctr"/>
+            <a:endParaRPr/>
           </a:p>
         </p:txBody>
       </p:sp>
@@ -18426,12 +17385,6 @@
               </a:rPr>
               <a:t>1 · Re-anchor</a:t>
             </a:r>
-            <a:endParaRPr sz="1700" b="1">
-              <a:solidFill>
-                <a:srgbClr val="1B998B"/>
-              </a:solidFill>
-              <a:latin typeface="Georgia" panose="02040502050405090303"/>
-            </a:endParaRPr>
           </a:p>
         </p:txBody>
       </p:sp>
@@ -18471,12 +17424,6 @@
               </a:rPr>
               <a:t>Problem</a:t>
             </a:r>
-            <a:endParaRPr sz="1200" b="1">
-              <a:solidFill>
-                <a:srgbClr val="1B998B"/>
-              </a:solidFill>
-              <a:latin typeface="Calibri"/>
-            </a:endParaRPr>
           </a:p>
           <a:p>
             <a:pPr algn="l"/>
@@ -18498,12 +17445,6 @@
               </a:rPr>
               <a:t>The spread drifts without a stable mean (non-stationary) — regressing on it picks up shared drift, not causation</a:t>
             </a:r>
-            <a:endParaRPr lang="en-US" altLang="en-US" sz="1200" b="0">
-              <a:solidFill>
-                <a:srgbClr val="33425C"/>
-              </a:solidFill>
-              <a:latin typeface="Calibri"/>
-            </a:endParaRPr>
           </a:p>
           <a:p>
             <a:pPr algn="l">
@@ -18523,12 +17464,6 @@
               </a:rPr>
               <a:t>Fix</a:t>
             </a:r>
-            <a:endParaRPr sz="1200" b="1">
-              <a:solidFill>
-                <a:srgbClr val="1B998B"/>
-              </a:solidFill>
-              <a:latin typeface="Calibri"/>
-            </a:endParaRPr>
           </a:p>
           <a:p>
             <a:pPr algn="l"/>
@@ -18541,12 +17476,6 @@
               </a:rPr>
               <a:t>→  Switch the outcome variable to the bid-cover ratio</a:t>
             </a:r>
-            <a:endParaRPr sz="1200" b="0">
-              <a:solidFill>
-                <a:srgbClr val="33425C"/>
-              </a:solidFill>
-              <a:latin typeface="Calibri"/>
-            </a:endParaRPr>
           </a:p>
           <a:p>
             <a:pPr algn="l">
@@ -18566,12 +17495,6 @@
               </a:rPr>
               <a:t>What is bid-cover</a:t>
             </a:r>
-            <a:endParaRPr sz="1200" b="1">
-              <a:solidFill>
-                <a:srgbClr val="1B998B"/>
-              </a:solidFill>
-              <a:latin typeface="Calibri"/>
-            </a:endParaRPr>
           </a:p>
           <a:p>
             <a:pPr algn="l"/>
@@ -18584,12 +17507,6 @@
               </a:rPr>
               <a:t>→  Bids received per dollar of T-bills offered at auction — a direct, stationary measure of demand strength</a:t>
             </a:r>
-            <a:endParaRPr sz="1200" b="0">
-              <a:solidFill>
-                <a:srgbClr val="33425C"/>
-              </a:solidFill>
-              <a:latin typeface="Calibri"/>
-            </a:endParaRPr>
           </a:p>
           <a:p>
             <a:pPr algn="l">
@@ -18609,12 +17526,6 @@
               </a:rPr>
               <a:t>Why it works</a:t>
             </a:r>
-            <a:endParaRPr sz="1200" b="1">
-              <a:solidFill>
-                <a:srgbClr val="1B998B"/>
-              </a:solidFill>
-              <a:latin typeface="Calibri"/>
-            </a:endParaRPr>
           </a:p>
           <a:p>
             <a:pPr algn="l"/>
@@ -18627,12 +17538,6 @@
               </a:rPr>
               <a:t>→  It fluctuates around a stable mean → no drift, no spurious regression risk</a:t>
             </a:r>
-            <a:endParaRPr sz="1200" b="0">
-              <a:solidFill>
-                <a:srgbClr val="33425C"/>
-              </a:solidFill>
-              <a:latin typeface="Calibri"/>
-            </a:endParaRPr>
           </a:p>
         </p:txBody>
       </p:sp>
@@ -18677,6 +17582,7 @@
           <a:lstStyle/>
           <a:p>
             <a:pPr algn="ctr"/>
+            <a:endParaRPr/>
           </a:p>
         </p:txBody>
       </p:sp>
@@ -18721,6 +17627,7 @@
           <a:lstStyle/>
           <a:p>
             <a:pPr algn="ctr"/>
+            <a:endParaRPr/>
           </a:p>
         </p:txBody>
       </p:sp>
@@ -18763,12 +17670,6 @@
               </a:rPr>
               <a:t>2 · Stress-test</a:t>
             </a:r>
-            <a:endParaRPr sz="1700" b="1">
-              <a:solidFill>
-                <a:srgbClr val="13294B"/>
-              </a:solidFill>
-              <a:latin typeface="Georgia" panose="02040502050405090303"/>
-            </a:endParaRPr>
           </a:p>
         </p:txBody>
       </p:sp>
@@ -18808,12 +17709,6 @@
               </a:rPr>
               <a:t>Auction size</a:t>
             </a:r>
-            <a:endParaRPr sz="1200" b="1">
-              <a:solidFill>
-                <a:srgbClr val="1B998B"/>
-              </a:solidFill>
-              <a:latin typeface="Calibri"/>
-            </a:endParaRPr>
           </a:p>
           <a:p>
             <a:pPr algn="l"/>
@@ -18826,12 +17721,6 @@
               </a:rPr>
               <a:t>→  Large supply mechanically lowers bid-cover; we add offering size as a control to isolate USDT's effect</a:t>
             </a:r>
-            <a:endParaRPr sz="1200" b="0">
-              <a:solidFill>
-                <a:srgbClr val="33425C"/>
-              </a:solidFill>
-              <a:latin typeface="Calibri"/>
-            </a:endParaRPr>
           </a:p>
           <a:p>
             <a:pPr algn="l">
@@ -18851,12 +17740,6 @@
               </a:rPr>
               <a:t>Interpolated data</a:t>
             </a:r>
-            <a:endParaRPr sz="1200" b="1">
-              <a:solidFill>
-                <a:srgbClr val="1B998B"/>
-              </a:solidFill>
-              <a:latin typeface="Calibri"/>
-            </a:endParaRPr>
           </a:p>
           <a:p>
             <a:pPr algn="l"/>
@@ -18869,12 +17752,6 @@
               </a:rPr>
               <a:t>→  Reserve ratios were quarterly, filled in monthly; we re-ran with all interpolated values removed</a:t>
             </a:r>
-            <a:endParaRPr sz="1200" b="0">
-              <a:solidFill>
-                <a:srgbClr val="33425C"/>
-              </a:solidFill>
-              <a:latin typeface="Calibri"/>
-            </a:endParaRPr>
           </a:p>
           <a:p>
             <a:pPr algn="l">
@@ -18894,12 +17771,6 @@
               </a:rPr>
               <a:t>Fed cycle</a:t>
             </a:r>
-            <a:endParaRPr sz="1200" b="1">
-              <a:solidFill>
-                <a:srgbClr val="1B998B"/>
-              </a:solidFill>
-              <a:latin typeface="Calibri"/>
-            </a:endParaRPr>
           </a:p>
           <a:p>
             <a:pPr algn="l"/>
@@ -18912,12 +17783,6 @@
               </a:rPr>
               <a:t>→  USDT and T-bill demand both move with rates; we added Δfedfunds as a control</a:t>
             </a:r>
-            <a:endParaRPr sz="1200" b="0">
-              <a:solidFill>
-                <a:srgbClr val="33425C"/>
-              </a:solidFill>
-              <a:latin typeface="Calibri"/>
-            </a:endParaRPr>
           </a:p>
           <a:p>
             <a:pPr algn="l">
@@ -18937,12 +17802,6 @@
               </a:rPr>
               <a:t>Placebo</a:t>
             </a:r>
-            <a:endParaRPr sz="1200" b="1">
-              <a:solidFill>
-                <a:srgbClr val="E8A12C"/>
-              </a:solidFill>
-              <a:latin typeface="Calibri"/>
-            </a:endParaRPr>
           </a:p>
           <a:p>
             <a:pPr algn="l"/>
@@ -18955,12 +17814,6 @@
               </a:rPr>
               <a:t>→  Shuffled USDT supply 2,000 times at random — the real result ranks above 95%+ of random draws</a:t>
             </a:r>
-            <a:endParaRPr sz="1200" b="0">
-              <a:solidFill>
-                <a:srgbClr val="33425C"/>
-              </a:solidFill>
-              <a:latin typeface="Calibri"/>
-            </a:endParaRPr>
           </a:p>
         </p:txBody>
       </p:sp>
@@ -19005,6 +17858,7 @@
           <a:lstStyle/>
           <a:p>
             <a:pPr algn="ctr"/>
+            <a:endParaRPr/>
           </a:p>
         </p:txBody>
       </p:sp>
@@ -19049,6 +17903,7 @@
           <a:lstStyle/>
           <a:p>
             <a:pPr algn="ctr"/>
+            <a:endParaRPr/>
           </a:p>
         </p:txBody>
       </p:sp>
@@ -19091,12 +17946,6 @@
               </a:rPr>
               <a:t>3 · Converge</a:t>
             </a:r>
-            <a:endParaRPr sz="1700" b="1">
-              <a:solidFill>
-                <a:srgbClr val="E8A12C"/>
-              </a:solidFill>
-              <a:latin typeface="Georgia" panose="02040502050405090303"/>
-            </a:endParaRPr>
           </a:p>
         </p:txBody>
       </p:sp>
@@ -19128,7 +17977,7 @@
               </a:spcAft>
             </a:pPr>
             <a:r>
-              <a:rPr lang="en-US" altLang="en-US" sz="1200" b="1">
+              <a:rPr lang="en-US" altLang="en-US" sz="1200" b="1" dirty="0">
                 <a:solidFill>
                   <a:srgbClr val="1B998B"/>
                 </a:solidFill>
@@ -19136,17 +17985,11 @@
               </a:rPr>
               <a:t>Cross-verification</a:t>
             </a:r>
-            <a:endParaRPr lang="en-US" altLang="en-US" sz="1200" b="1">
-              <a:solidFill>
-                <a:srgbClr val="1B998B"/>
-              </a:solidFill>
-              <a:latin typeface="Calibri"/>
-            </a:endParaRPr>
           </a:p>
           <a:p>
             <a:pPr algn="l"/>
             <a:r>
-              <a:rPr sz="1200" b="0">
+              <a:rPr sz="1200" b="0" dirty="0">
                 <a:solidFill>
                   <a:srgbClr val="33425C"/>
                 </a:solidFill>
@@ -19155,7 +17998,7 @@
               <a:t>→  </a:t>
             </a:r>
             <a:r>
-              <a:rPr lang="en-US" altLang="en-US" sz="1200" b="0">
+              <a:rPr lang="en-US" altLang="en-US" sz="1200" b="0" dirty="0">
                 <a:solidFill>
                   <a:srgbClr val="33425C"/>
                 </a:solidFill>
@@ -19163,12 +18006,6 @@
               </a:rPr>
               <a:t>Each team member ran the full pipeline on their own machine and confirmed results reproduce exactly</a:t>
             </a:r>
-            <a:endParaRPr lang="en-US" altLang="en-US" sz="1200" b="0">
-              <a:solidFill>
-                <a:srgbClr val="33425C"/>
-              </a:solidFill>
-              <a:latin typeface="Calibri"/>
-            </a:endParaRPr>
           </a:p>
           <a:p>
             <a:pPr algn="l">
@@ -19180,7 +18017,7 @@
               </a:spcAft>
             </a:pPr>
             <a:r>
-              <a:rPr lang="en-US" altLang="en-US" sz="1200" b="1">
+              <a:rPr lang="en-US" altLang="en-US" sz="1200" b="1" dirty="0">
                 <a:solidFill>
                   <a:srgbClr val="1B998B"/>
                 </a:solidFill>
@@ -19188,17 +18025,11 @@
               </a:rPr>
               <a:t>Consistency</a:t>
             </a:r>
-            <a:endParaRPr lang="en-US" altLang="en-US" sz="1200" b="1">
-              <a:solidFill>
-                <a:srgbClr val="1B998B"/>
-              </a:solidFill>
-              <a:latin typeface="Calibri"/>
-            </a:endParaRPr>
           </a:p>
           <a:p>
             <a:pPr algn="l"/>
             <a:r>
-              <a:rPr sz="1200" b="0">
+              <a:rPr sz="1200" b="0" dirty="0">
                 <a:solidFill>
                   <a:srgbClr val="33425C"/>
                 </a:solidFill>
@@ -19207,7 +18038,7 @@
               <a:t>→  </a:t>
             </a:r>
             <a:r>
-              <a:rPr lang="en-US" altLang="en-US" sz="1200" b="0">
+              <a:rPr lang="en-US" altLang="en-US" sz="1200" b="0" dirty="0">
                 <a:solidFill>
                   <a:srgbClr val="33425C"/>
                 </a:solidFill>
@@ -19215,12 +18046,6 @@
               </a:rPr>
               <a:t>No discrepancies found across any specification or any run</a:t>
             </a:r>
-            <a:endParaRPr lang="en-US" altLang="en-US" sz="1200" b="0">
-              <a:solidFill>
-                <a:srgbClr val="33425C"/>
-              </a:solidFill>
-              <a:latin typeface="Calibri"/>
-            </a:endParaRPr>
           </a:p>
           <a:p>
             <a:pPr algn="l">
@@ -19232,7 +18057,7 @@
               </a:spcAft>
             </a:pPr>
             <a:r>
-              <a:rPr sz="1200" b="1">
+              <a:rPr sz="1200" b="1" dirty="0">
                 <a:solidFill>
                   <a:srgbClr val="E8A12C"/>
                 </a:solidFill>
@@ -19240,17 +18065,11 @@
               </a:rPr>
               <a:t>Verdict</a:t>
             </a:r>
-            <a:endParaRPr sz="1200" b="1">
-              <a:solidFill>
-                <a:srgbClr val="E8A12C"/>
-              </a:solidFill>
-              <a:latin typeface="Calibri"/>
-            </a:endParaRPr>
           </a:p>
           <a:p>
             <a:pPr algn="l"/>
             <a:r>
-              <a:rPr sz="1200" b="0">
+              <a:rPr sz="1200" b="0" dirty="0">
                 <a:solidFill>
                   <a:srgbClr val="33425C"/>
                 </a:solidFill>
@@ -19258,12 +18077,6 @@
               </a:rPr>
               <a:t>→  The bid-cover result survived every check → it becomes the paper's lead finding</a:t>
             </a:r>
-            <a:endParaRPr sz="1200" b="0">
-              <a:solidFill>
-                <a:srgbClr val="33425C"/>
-              </a:solidFill>
-              <a:latin typeface="Calibri"/>
-            </a:endParaRPr>
           </a:p>
         </p:txBody>
       </p:sp>
@@ -19306,12 +18119,6 @@
               </a:rPr>
               <a:t>Stablecoins &amp; the Exorbitant Privilege</a:t>
             </a:r>
-            <a:endParaRPr sz="900" b="0">
-              <a:solidFill>
-                <a:srgbClr val="5B6B82"/>
-              </a:solidFill>
-              <a:latin typeface="Calibri"/>
-            </a:endParaRPr>
           </a:p>
         </p:txBody>
       </p:sp>
@@ -19347,12 +18154,6 @@
               </a:rPr>
               <a:t>6</a:t>
             </a:r>
-            <a:endParaRPr sz="1100" b="0">
-              <a:solidFill>
-                <a:srgbClr val="5B6B82"/>
-              </a:solidFill>
-              <a:latin typeface="Calibri"/>
-            </a:endParaRPr>
           </a:p>
         </p:txBody>
       </p:sp>
@@ -19422,6 +18223,7 @@
           <a:lstStyle/>
           <a:p>
             <a:pPr algn="ctr"/>
+            <a:endParaRPr/>
           </a:p>
         </p:txBody>
       </p:sp>
@@ -19466,6 +18268,7 @@
           <a:lstStyle/>
           <a:p>
             <a:pPr algn="ctr"/>
+            <a:endParaRPr/>
           </a:p>
         </p:txBody>
       </p:sp>
@@ -19508,12 +18311,6 @@
               </a:rPr>
               <a:t>MAIN RESULT</a:t>
             </a:r>
-            <a:endParaRPr sz="1200" b="1">
-              <a:solidFill>
-                <a:srgbClr val="1B998B"/>
-              </a:solidFill>
-              <a:latin typeface="Calibri"/>
-            </a:endParaRPr>
           </a:p>
         </p:txBody>
       </p:sp>
@@ -19556,12 +18353,6 @@
               </a:rPr>
               <a:t>USDT Supply Growth → Weaker T-Bill Auction Demand</a:t>
             </a:r>
-            <a:endParaRPr sz="2700" b="1">
-              <a:solidFill>
-                <a:srgbClr val="13294B"/>
-              </a:solidFill>
-              <a:latin typeface="Georgia" panose="02040502050405090303"/>
-            </a:endParaRPr>
           </a:p>
         </p:txBody>
       </p:sp>
@@ -19595,6 +18386,7 @@
                 <a:spcPts val="300"/>
               </a:spcAft>
             </a:pPr>
+            <a:endParaRPr/>
           </a:p>
         </p:txBody>
       </p:sp>
@@ -19639,6 +18431,7 @@
           <a:lstStyle/>
           <a:p>
             <a:pPr algn="ctr"/>
+            <a:endParaRPr/>
           </a:p>
         </p:txBody>
       </p:sp>
@@ -19681,12 +18474,6 @@
               </a:rPr>
               <a:t>Maturity</a:t>
             </a:r>
-            <a:endParaRPr sz="1300" b="1">
-              <a:solidFill>
-                <a:srgbClr val="FFFFFF"/>
-              </a:solidFill>
-              <a:latin typeface="Calibri"/>
-            </a:endParaRPr>
           </a:p>
         </p:txBody>
       </p:sp>
@@ -19731,6 +18518,7 @@
           <a:lstStyle/>
           <a:p>
             <a:pPr algn="ctr"/>
+            <a:endParaRPr/>
           </a:p>
         </p:txBody>
       </p:sp>
@@ -19773,12 +18561,6 @@
               </a:rPr>
               <a:t>USDT (β)</a:t>
             </a:r>
-            <a:endParaRPr sz="1300" b="1">
-              <a:solidFill>
-                <a:srgbClr val="FFFFFF"/>
-              </a:solidFill>
-              <a:latin typeface="Calibri"/>
-            </a:endParaRPr>
           </a:p>
         </p:txBody>
       </p:sp>
@@ -19823,6 +18605,7 @@
           <a:lstStyle/>
           <a:p>
             <a:pPr algn="ctr"/>
+            <a:endParaRPr/>
           </a:p>
         </p:txBody>
       </p:sp>
@@ -19865,12 +18648,6 @@
               </a:rPr>
               <a:t>USDC — foil (β)</a:t>
             </a:r>
-            <a:endParaRPr sz="1300" b="1">
-              <a:solidFill>
-                <a:srgbClr val="FFFFFF"/>
-              </a:solidFill>
-              <a:latin typeface="Calibri"/>
-            </a:endParaRPr>
           </a:p>
         </p:txBody>
       </p:sp>
@@ -19915,6 +18692,7 @@
           <a:lstStyle/>
           <a:p>
             <a:pPr algn="ctr"/>
+            <a:endParaRPr/>
           </a:p>
         </p:txBody>
       </p:sp>
@@ -19957,12 +18735,6 @@
               </a:rPr>
               <a:t>Wald  USDT≠USDC</a:t>
             </a:r>
-            <a:endParaRPr sz="1300" b="1">
-              <a:solidFill>
-                <a:srgbClr val="FFFFFF"/>
-              </a:solidFill>
-              <a:latin typeface="Calibri"/>
-            </a:endParaRPr>
           </a:p>
         </p:txBody>
       </p:sp>
@@ -20007,6 +18779,7 @@
           <a:lstStyle/>
           <a:p>
             <a:pPr algn="ctr"/>
+            <a:endParaRPr/>
           </a:p>
         </p:txBody>
       </p:sp>
@@ -20049,12 +18822,6 @@
               </a:rPr>
               <a:t>4-Week</a:t>
             </a:r>
-            <a:endParaRPr sz="1350" b="0">
-              <a:solidFill>
-                <a:srgbClr val="33425C"/>
-              </a:solidFill>
-              <a:latin typeface="Calibri"/>
-            </a:endParaRPr>
           </a:p>
         </p:txBody>
       </p:sp>
@@ -20099,6 +18866,7 @@
           <a:lstStyle/>
           <a:p>
             <a:pPr algn="ctr"/>
+            <a:endParaRPr/>
           </a:p>
         </p:txBody>
       </p:sp>
@@ -20141,12 +18909,6 @@
               </a:rPr>
               <a:t>-0.61 ns</a:t>
             </a:r>
-            <a:endParaRPr sz="1350" b="1">
-              <a:solidFill>
-                <a:srgbClr val="5B6B82"/>
-              </a:solidFill>
-              <a:latin typeface="Calibri"/>
-            </a:endParaRPr>
           </a:p>
         </p:txBody>
       </p:sp>
@@ -20191,6 +18953,7 @@
           <a:lstStyle/>
           <a:p>
             <a:pPr algn="ctr"/>
+            <a:endParaRPr/>
           </a:p>
         </p:txBody>
       </p:sp>
@@ -20233,12 +18996,6 @@
               </a:rPr>
               <a:t>+0.61 ***</a:t>
             </a:r>
-            <a:endParaRPr sz="1350" b="0">
-              <a:solidFill>
-                <a:srgbClr val="5B6B82"/>
-              </a:solidFill>
-              <a:latin typeface="Calibri"/>
-            </a:endParaRPr>
           </a:p>
         </p:txBody>
       </p:sp>
@@ -20283,6 +19040,7 @@
           <a:lstStyle/>
           <a:p>
             <a:pPr algn="ctr"/>
+            <a:endParaRPr/>
           </a:p>
         </p:txBody>
       </p:sp>
@@ -20325,12 +19083,6 @@
               </a:rPr>
               <a:t>p = 0.026</a:t>
             </a:r>
-            <a:endParaRPr sz="1350" b="0">
-              <a:solidFill>
-                <a:srgbClr val="13294B"/>
-              </a:solidFill>
-              <a:latin typeface="Calibri"/>
-            </a:endParaRPr>
           </a:p>
         </p:txBody>
       </p:sp>
@@ -20375,6 +19127,7 @@
           <a:lstStyle/>
           <a:p>
             <a:pPr algn="ctr"/>
+            <a:endParaRPr/>
           </a:p>
         </p:txBody>
       </p:sp>
@@ -20417,12 +19170,6 @@
               </a:rPr>
               <a:t>8-Week</a:t>
             </a:r>
-            <a:endParaRPr sz="1350" b="0">
-              <a:solidFill>
-                <a:srgbClr val="33425C"/>
-              </a:solidFill>
-              <a:latin typeface="Calibri"/>
-            </a:endParaRPr>
           </a:p>
         </p:txBody>
       </p:sp>
@@ -20467,6 +19214,7 @@
           <a:lstStyle/>
           <a:p>
             <a:pPr algn="ctr"/>
+            <a:endParaRPr/>
           </a:p>
         </p:txBody>
       </p:sp>
@@ -20509,12 +19257,6 @@
               </a:rPr>
               <a:t>-1.33 ***</a:t>
             </a:r>
-            <a:endParaRPr sz="1350" b="1">
-              <a:solidFill>
-                <a:srgbClr val="1B998B"/>
-              </a:solidFill>
-              <a:latin typeface="Calibri"/>
-            </a:endParaRPr>
           </a:p>
         </p:txBody>
       </p:sp>
@@ -20559,6 +19301,7 @@
           <a:lstStyle/>
           <a:p>
             <a:pPr algn="ctr"/>
+            <a:endParaRPr/>
           </a:p>
         </p:txBody>
       </p:sp>
@@ -20601,12 +19344,6 @@
               </a:rPr>
               <a:t>+0.47 **</a:t>
             </a:r>
-            <a:endParaRPr sz="1350" b="0">
-              <a:solidFill>
-                <a:srgbClr val="5B6B82"/>
-              </a:solidFill>
-              <a:latin typeface="Calibri"/>
-            </a:endParaRPr>
           </a:p>
         </p:txBody>
       </p:sp>
@@ -20651,6 +19388,7 @@
           <a:lstStyle/>
           <a:p>
             <a:pPr algn="ctr"/>
+            <a:endParaRPr/>
           </a:p>
         </p:txBody>
       </p:sp>
@@ -20693,12 +19431,6 @@
               </a:rPr>
               <a:t>p = 0.000</a:t>
             </a:r>
-            <a:endParaRPr sz="1350" b="0">
-              <a:solidFill>
-                <a:srgbClr val="13294B"/>
-              </a:solidFill>
-              <a:latin typeface="Calibri"/>
-            </a:endParaRPr>
           </a:p>
         </p:txBody>
       </p:sp>
@@ -20743,6 +19475,7 @@
           <a:lstStyle/>
           <a:p>
             <a:pPr algn="ctr"/>
+            <a:endParaRPr/>
           </a:p>
         </p:txBody>
       </p:sp>
@@ -20785,12 +19518,6 @@
               </a:rPr>
               <a:t>13-Week</a:t>
             </a:r>
-            <a:endParaRPr sz="1350" b="0">
-              <a:solidFill>
-                <a:srgbClr val="33425C"/>
-              </a:solidFill>
-              <a:latin typeface="Calibri"/>
-            </a:endParaRPr>
           </a:p>
         </p:txBody>
       </p:sp>
@@ -20835,6 +19562,7 @@
           <a:lstStyle/>
           <a:p>
             <a:pPr algn="ctr"/>
+            <a:endParaRPr/>
           </a:p>
         </p:txBody>
       </p:sp>
@@ -20877,12 +19605,6 @@
               </a:rPr>
               <a:t>-1.51 ***</a:t>
             </a:r>
-            <a:endParaRPr sz="1350" b="1">
-              <a:solidFill>
-                <a:srgbClr val="1B998B"/>
-              </a:solidFill>
-              <a:latin typeface="Calibri"/>
-            </a:endParaRPr>
           </a:p>
         </p:txBody>
       </p:sp>
@@ -20927,6 +19649,7 @@
           <a:lstStyle/>
           <a:p>
             <a:pPr algn="ctr"/>
+            <a:endParaRPr/>
           </a:p>
         </p:txBody>
       </p:sp>
@@ -20969,12 +19692,6 @@
               </a:rPr>
               <a:t>+0.32 *</a:t>
             </a:r>
-            <a:endParaRPr sz="1350" b="0">
-              <a:solidFill>
-                <a:srgbClr val="5B6B82"/>
-              </a:solidFill>
-              <a:latin typeface="Calibri"/>
-            </a:endParaRPr>
           </a:p>
         </p:txBody>
       </p:sp>
@@ -21019,6 +19736,7 @@
           <a:lstStyle/>
           <a:p>
             <a:pPr algn="ctr"/>
+            <a:endParaRPr/>
           </a:p>
         </p:txBody>
       </p:sp>
@@ -21061,12 +19779,6 @@
               </a:rPr>
               <a:t>p = 0.000</a:t>
             </a:r>
-            <a:endParaRPr sz="1350" b="0">
-              <a:solidFill>
-                <a:srgbClr val="13294B"/>
-              </a:solidFill>
-              <a:latin typeface="Calibri"/>
-            </a:endParaRPr>
           </a:p>
         </p:txBody>
       </p:sp>
@@ -21111,6 +19823,7 @@
           <a:lstStyle/>
           <a:p>
             <a:pPr algn="ctr"/>
+            <a:endParaRPr/>
           </a:p>
         </p:txBody>
       </p:sp>
@@ -21153,12 +19866,6 @@
               </a:rPr>
               <a:t>26-Week</a:t>
             </a:r>
-            <a:endParaRPr sz="1350" b="0">
-              <a:solidFill>
-                <a:srgbClr val="33425C"/>
-              </a:solidFill>
-              <a:latin typeface="Calibri"/>
-            </a:endParaRPr>
           </a:p>
         </p:txBody>
       </p:sp>
@@ -21203,6 +19910,7 @@
           <a:lstStyle/>
           <a:p>
             <a:pPr algn="ctr"/>
+            <a:endParaRPr/>
           </a:p>
         </p:txBody>
       </p:sp>
@@ -21245,12 +19953,6 @@
               </a:rPr>
               <a:t>-1.53 ***</a:t>
             </a:r>
-            <a:endParaRPr sz="1350" b="1">
-              <a:solidFill>
-                <a:srgbClr val="1B998B"/>
-              </a:solidFill>
-              <a:latin typeface="Calibri"/>
-            </a:endParaRPr>
           </a:p>
         </p:txBody>
       </p:sp>
@@ -21295,6 +19997,7 @@
           <a:lstStyle/>
           <a:p>
             <a:pPr algn="ctr"/>
+            <a:endParaRPr/>
           </a:p>
         </p:txBody>
       </p:sp>
@@ -21337,12 +20040,6 @@
               </a:rPr>
               <a:t>-0.09 ns</a:t>
             </a:r>
-            <a:endParaRPr sz="1350" b="0">
-              <a:solidFill>
-                <a:srgbClr val="5B6B82"/>
-              </a:solidFill>
-              <a:latin typeface="Calibri"/>
-            </a:endParaRPr>
           </a:p>
         </p:txBody>
       </p:sp>
@@ -21387,6 +20084,7 @@
           <a:lstStyle/>
           <a:p>
             <a:pPr algn="ctr"/>
+            <a:endParaRPr/>
           </a:p>
         </p:txBody>
       </p:sp>
@@ -21429,12 +20127,6 @@
               </a:rPr>
               <a:t>p = 0.001</a:t>
             </a:r>
-            <a:endParaRPr sz="1350" b="0">
-              <a:solidFill>
-                <a:srgbClr val="13294B"/>
-              </a:solidFill>
-              <a:latin typeface="Calibri"/>
-            </a:endParaRPr>
           </a:p>
         </p:txBody>
       </p:sp>
@@ -21479,6 +20171,7 @@
           <a:lstStyle/>
           <a:p>
             <a:pPr algn="ctr"/>
+            <a:endParaRPr/>
           </a:p>
         </p:txBody>
       </p:sp>
@@ -21521,12 +20214,6 @@
               </a:rPr>
               <a:t>Reading the result</a:t>
             </a:r>
-            <a:endParaRPr sz="1400" b="1">
-              <a:solidFill>
-                <a:srgbClr val="E8A12C"/>
-              </a:solidFill>
-              <a:latin typeface="Georgia" panose="02040502050405090303"/>
-            </a:endParaRPr>
           </a:p>
         </p:txBody>
       </p:sp>
@@ -21569,12 +20256,6 @@
               </a:rPr>
               <a:t>USDT supply growth predicts lower bid-cover (weaker auction demand); USDC does not. The two issuers differ at every maturity — the reserve-composition signature.</a:t>
             </a:r>
-            <a:endParaRPr sz="1350" b="0">
-              <a:solidFill>
-                <a:srgbClr val="FFFFFF"/>
-              </a:solidFill>
-              <a:latin typeface="Calibri"/>
-            </a:endParaRPr>
           </a:p>
         </p:txBody>
       </p:sp>
@@ -21617,12 +20298,6 @@
               </a:rPr>
               <a:t>Stablecoins &amp; the Exorbitant Privilege</a:t>
             </a:r>
-            <a:endParaRPr sz="900" b="0">
-              <a:solidFill>
-                <a:srgbClr val="5B6B82"/>
-              </a:solidFill>
-              <a:latin typeface="Calibri"/>
-            </a:endParaRPr>
           </a:p>
         </p:txBody>
       </p:sp>
@@ -21658,12 +20333,6 @@
               </a:rPr>
               <a:t>7</a:t>
             </a:r>
-            <a:endParaRPr sz="1100" b="0">
-              <a:solidFill>
-                <a:srgbClr val="5B6B82"/>
-              </a:solidFill>
-              <a:latin typeface="Calibri"/>
-            </a:endParaRPr>
           </a:p>
         </p:txBody>
       </p:sp>
@@ -21698,11 +20367,6 @@
               </a:rPr>
               <a:t>BC_{m,t} = αₘ + β_USDT · ΔlnS^USDT_t + β_USDC · ΔlnS^USDC_t + δₘ · ln(Offering_{m,t}) + γ₁ · VIX_t + γ₂ · Δfedfunds_t + ε_t</a:t>
             </a:r>
-            <a:endParaRPr sz="1300" b="1">
-              <a:solidFill>
-                <a:srgbClr val="13294B"/>
-              </a:solidFill>
-            </a:endParaRPr>
           </a:p>
           <a:p>
             <a:pPr algn="ctr"/>
@@ -21714,11 +20378,6 @@
               </a:rPr>
               <a:t>Monthly OLS, N = 51, Newey-West HAC(1).</a:t>
             </a:r>
-            <a:endParaRPr lang="en-US" sz="1050" b="0">
-              <a:solidFill>
-                <a:srgbClr val="5B6B82"/>
-              </a:solidFill>
-            </a:endParaRPr>
           </a:p>
         </p:txBody>
       </p:sp>
@@ -21788,6 +20447,7 @@
           <a:lstStyle/>
           <a:p>
             <a:pPr algn="ctr"/>
+            <a:endParaRPr/>
           </a:p>
         </p:txBody>
       </p:sp>
@@ -21832,6 +20492,7 @@
           <a:lstStyle/>
           <a:p>
             <a:pPr algn="ctr"/>
+            <a:endParaRPr/>
           </a:p>
         </p:txBody>
       </p:sp>
@@ -21874,12 +20535,6 @@
               </a:rPr>
               <a:t>ROBUSTNESS</a:t>
             </a:r>
-            <a:endParaRPr sz="1200" b="1">
-              <a:solidFill>
-                <a:srgbClr val="1B998B"/>
-              </a:solidFill>
-              <a:latin typeface="Calibri"/>
-            </a:endParaRPr>
           </a:p>
         </p:txBody>
       </p:sp>
@@ -21922,12 +20577,6 @@
               </a:rPr>
               <a:t>What Survives Every Test</a:t>
             </a:r>
-            <a:endParaRPr sz="2700" b="1">
-              <a:solidFill>
-                <a:srgbClr val="13294B"/>
-              </a:solidFill>
-              <a:latin typeface="Georgia" panose="02040502050405090303"/>
-            </a:endParaRPr>
           </a:p>
         </p:txBody>
       </p:sp>
@@ -21970,12 +20619,6 @@
               </a:rPr>
               <a:t>The result holds with no interpolated data, with auction size controlled, and against a placebo</a:t>
             </a:r>
-            <a:endParaRPr sz="1550" b="0">
-              <a:solidFill>
-                <a:srgbClr val="5B6B82"/>
-              </a:solidFill>
-              <a:latin typeface="Georgia" panose="02040502050405090303"/>
-            </a:endParaRPr>
           </a:p>
         </p:txBody>
       </p:sp>
@@ -21988,7 +20631,7 @@
           <p:nvPr/>
         </p:nvPicPr>
         <p:blipFill>
-          <a:blip r:embed="rId1"/>
+          <a:blip r:embed="rId2"/>
           <a:stretch>
             <a:fillRect/>
           </a:stretch>
@@ -22044,6 +20687,7 @@
           <a:lstStyle/>
           <a:p>
             <a:pPr algn="ctr"/>
+            <a:endParaRPr/>
           </a:p>
         </p:txBody>
       </p:sp>
@@ -22088,6 +20732,7 @@
           <a:lstStyle/>
           <a:p>
             <a:pPr algn="ctr"/>
+            <a:endParaRPr/>
           </a:p>
         </p:txBody>
       </p:sp>
@@ -22139,12 +20784,6 @@
               </a:rPr>
               <a:t>Drop the interpolated reserves (θ, L) entirely — result holds</a:t>
             </a:r>
-            <a:endParaRPr sz="1300" b="0">
-              <a:solidFill>
-                <a:srgbClr val="33425C"/>
-              </a:solidFill>
-              <a:latin typeface="Calibri"/>
-            </a:endParaRPr>
           </a:p>
           <a:p>
             <a:pPr algn="l">
@@ -22173,12 +20812,6 @@
               </a:rPr>
               <a:t>Controlling the Fed rate cycle is the crux: once it is in, USDT is significant at every maturity</a:t>
             </a:r>
-            <a:endParaRPr sz="1300" b="0">
-              <a:solidFill>
-                <a:srgbClr val="33425C"/>
-              </a:solidFill>
-              <a:latin typeface="Calibri"/>
-            </a:endParaRPr>
           </a:p>
           <a:p>
             <a:pPr algn="l">
@@ -22207,12 +20840,6 @@
               </a:rPr>
               <a:t>Survives the auction-size control (4-week softens; 8/13/26-week strong)</a:t>
             </a:r>
-            <a:endParaRPr sz="1300" b="0">
-              <a:solidFill>
-                <a:srgbClr val="33425C"/>
-              </a:solidFill>
-              <a:latin typeface="Calibri"/>
-            </a:endParaRPr>
           </a:p>
           <a:p>
             <a:pPr algn="l">
@@ -22232,12 +20859,6 @@
               </a:rPr>
               <a:t>◆  Passes a 2,000-shuffle placebo at 3 of 4 maturities (8/13/26-Week)</a:t>
             </a:r>
-            <a:endParaRPr sz="1300" b="0">
-              <a:solidFill>
-                <a:srgbClr val="1B998B"/>
-              </a:solidFill>
-              <a:latin typeface="Calibri"/>
-            </a:endParaRPr>
           </a:p>
           <a:p>
             <a:pPr algn="l">
@@ -22266,12 +20887,6 @@
               </a:rPr>
               <a:t>USDT ≠ USDC at every maturity</a:t>
             </a:r>
-            <a:endParaRPr sz="1300" b="0">
-              <a:solidFill>
-                <a:srgbClr val="33425C"/>
-              </a:solidFill>
-              <a:latin typeface="Calibri"/>
-            </a:endParaRPr>
           </a:p>
         </p:txBody>
       </p:sp>
@@ -22314,12 +20929,6 @@
               </a:rPr>
               <a:t>Stablecoins &amp; the Exorbitant Privilege</a:t>
             </a:r>
-            <a:endParaRPr sz="900" b="0">
-              <a:solidFill>
-                <a:srgbClr val="5B6B82"/>
-              </a:solidFill>
-              <a:latin typeface="Calibri"/>
-            </a:endParaRPr>
           </a:p>
         </p:txBody>
       </p:sp>
@@ -22355,12 +20964,6 @@
               </a:rPr>
               <a:t>8</a:t>
             </a:r>
-            <a:endParaRPr sz="1100" b="0">
-              <a:solidFill>
-                <a:srgbClr val="5B6B82"/>
-              </a:solidFill>
-              <a:latin typeface="Calibri"/>
-            </a:endParaRPr>
           </a:p>
         </p:txBody>
       </p:sp>
@@ -22430,6 +21033,7 @@
           <a:lstStyle/>
           <a:p>
             <a:pPr algn="ctr"/>
+            <a:endParaRPr/>
           </a:p>
         </p:txBody>
       </p:sp>
@@ -22474,6 +21078,7 @@
           <a:lstStyle/>
           <a:p>
             <a:pPr algn="ctr"/>
+            <a:endParaRPr/>
           </a:p>
         </p:txBody>
       </p:sp>
@@ -22515,11 +21120,6 @@
               </a:rPr>
               <a:t>ROBUSTNESS</a:t>
             </a:r>
-            <a:endParaRPr sz="1200" b="1">
-              <a:solidFill>
-                <a:srgbClr val="1B998B"/>
-              </a:solidFill>
-            </a:endParaRPr>
           </a:p>
         </p:txBody>
       </p:sp>
@@ -22561,11 +21161,6 @@
               </a:rPr>
               <a:t>Specification Ladder — β₁ Stable Across All Specs</a:t>
             </a:r>
-            <a:endParaRPr sz="2700" b="1">
-              <a:solidFill>
-                <a:srgbClr val="13294B"/>
-              </a:solidFill>
-            </a:endParaRPr>
           </a:p>
         </p:txBody>
       </p:sp>
@@ -22599,6 +21194,7 @@
                 <a:spcPts val="300"/>
               </a:spcAft>
             </a:pPr>
+            <a:endParaRPr/>
           </a:p>
         </p:txBody>
       </p:sp>
@@ -22643,6 +21239,7 @@
           <a:lstStyle/>
           <a:p>
             <a:pPr algn="ctr"/>
+            <a:endParaRPr/>
           </a:p>
         </p:txBody>
       </p:sp>
@@ -22684,11 +21281,6 @@
               </a:rPr>
               <a:t>Maturity</a:t>
             </a:r>
-            <a:endParaRPr sz="1300" b="1">
-              <a:solidFill>
-                <a:srgbClr val="FFFFFF"/>
-              </a:solidFill>
-            </a:endParaRPr>
           </a:p>
         </p:txBody>
       </p:sp>
@@ -22733,6 +21325,7 @@
           <a:lstStyle/>
           <a:p>
             <a:pPr algn="ctr"/>
+            <a:endParaRPr/>
           </a:p>
         </p:txBody>
       </p:sp>
@@ -22774,11 +21367,6 @@
               </a:rPr>
               <a:t>A: incl. θ, L</a:t>
             </a:r>
-            <a:endParaRPr sz="1300" b="1">
-              <a:solidFill>
-                <a:srgbClr val="FFFFFF"/>
-              </a:solidFill>
-            </a:endParaRPr>
           </a:p>
         </p:txBody>
       </p:sp>
@@ -22823,6 +21411,7 @@
           <a:lstStyle/>
           <a:p>
             <a:pPr algn="ctr"/>
+            <a:endParaRPr/>
           </a:p>
         </p:txBody>
       </p:sp>
@@ -22864,11 +21453,6 @@
               </a:rPr>
               <a:t>B: drop θ, L</a:t>
             </a:r>
-            <a:endParaRPr sz="1300" b="1">
-              <a:solidFill>
-                <a:srgbClr val="FFFFFF"/>
-              </a:solidFill>
-            </a:endParaRPr>
           </a:p>
         </p:txBody>
       </p:sp>
@@ -22913,6 +21497,7 @@
           <a:lstStyle/>
           <a:p>
             <a:pPr algn="ctr"/>
+            <a:endParaRPr/>
           </a:p>
         </p:txBody>
       </p:sp>
@@ -22954,11 +21539,6 @@
               </a:rPr>
               <a:t>C: B + ln(Offering) ★</a:t>
             </a:r>
-            <a:endParaRPr sz="1300" b="1">
-              <a:solidFill>
-                <a:srgbClr val="FFFFFF"/>
-              </a:solidFill>
-            </a:endParaRPr>
           </a:p>
         </p:txBody>
       </p:sp>
@@ -23003,6 +21583,7 @@
           <a:lstStyle/>
           <a:p>
             <a:pPr algn="ctr"/>
+            <a:endParaRPr/>
           </a:p>
         </p:txBody>
       </p:sp>
@@ -23044,11 +21625,6 @@
               </a:rPr>
               <a:t>4-Week</a:t>
             </a:r>
-            <a:endParaRPr sz="1350" b="0">
-              <a:solidFill>
-                <a:srgbClr val="33425C"/>
-              </a:solidFill>
-            </a:endParaRPr>
           </a:p>
         </p:txBody>
       </p:sp>
@@ -23093,6 +21669,7 @@
           <a:lstStyle/>
           <a:p>
             <a:pPr algn="ctr"/>
+            <a:endParaRPr/>
           </a:p>
         </p:txBody>
       </p:sp>
@@ -23134,11 +21711,6 @@
               </a:rPr>
               <a:t>−0.72 *</a:t>
             </a:r>
-            <a:endParaRPr sz="1350" b="0">
-              <a:solidFill>
-                <a:srgbClr val="5B6B82"/>
-              </a:solidFill>
-            </a:endParaRPr>
           </a:p>
         </p:txBody>
       </p:sp>
@@ -23183,6 +21755,7 @@
           <a:lstStyle/>
           <a:p>
             <a:pPr algn="ctr"/>
+            <a:endParaRPr/>
           </a:p>
         </p:txBody>
       </p:sp>
@@ -23224,11 +21797,6 @@
               </a:rPr>
               <a:t>−1.18 ***</a:t>
             </a:r>
-            <a:endParaRPr sz="1350" b="0">
-              <a:solidFill>
-                <a:srgbClr val="5B6B82"/>
-              </a:solidFill>
-            </a:endParaRPr>
           </a:p>
         </p:txBody>
       </p:sp>
@@ -23273,6 +21841,7 @@
           <a:lstStyle/>
           <a:p>
             <a:pPr algn="ctr"/>
+            <a:endParaRPr/>
           </a:p>
         </p:txBody>
       </p:sp>
@@ -23314,11 +21883,6 @@
               </a:rPr>
               <a:t>−0.61 ns</a:t>
             </a:r>
-            <a:endParaRPr sz="1350" b="0">
-              <a:solidFill>
-                <a:srgbClr val="5B6B82"/>
-              </a:solidFill>
-            </a:endParaRPr>
           </a:p>
         </p:txBody>
       </p:sp>
@@ -23363,6 +21927,7 @@
           <a:lstStyle/>
           <a:p>
             <a:pPr algn="ctr"/>
+            <a:endParaRPr/>
           </a:p>
         </p:txBody>
       </p:sp>
@@ -23404,11 +21969,6 @@
               </a:rPr>
               <a:t>8-Week</a:t>
             </a:r>
-            <a:endParaRPr sz="1350" b="0">
-              <a:solidFill>
-                <a:srgbClr val="33425C"/>
-              </a:solidFill>
-            </a:endParaRPr>
           </a:p>
         </p:txBody>
       </p:sp>
@@ -23453,6 +22013,7 @@
           <a:lstStyle/>
           <a:p>
             <a:pPr algn="ctr"/>
+            <a:endParaRPr/>
           </a:p>
         </p:txBody>
       </p:sp>
@@ -23494,11 +22055,6 @@
               </a:rPr>
               <a:t>−1.21 ***</a:t>
             </a:r>
-            <a:endParaRPr sz="1350" b="1">
-              <a:solidFill>
-                <a:srgbClr val="1B998B"/>
-              </a:solidFill>
-            </a:endParaRPr>
           </a:p>
         </p:txBody>
       </p:sp>
@@ -23543,6 +22099,7 @@
           <a:lstStyle/>
           <a:p>
             <a:pPr algn="ctr"/>
+            <a:endParaRPr/>
           </a:p>
         </p:txBody>
       </p:sp>
@@ -23584,11 +22141,6 @@
               </a:rPr>
               <a:t>−1.47 ***</a:t>
             </a:r>
-            <a:endParaRPr sz="1350" b="1">
-              <a:solidFill>
-                <a:srgbClr val="1B998B"/>
-              </a:solidFill>
-            </a:endParaRPr>
           </a:p>
         </p:txBody>
       </p:sp>
@@ -23633,6 +22185,7 @@
           <a:lstStyle/>
           <a:p>
             <a:pPr algn="ctr"/>
+            <a:endParaRPr/>
           </a:p>
         </p:txBody>
       </p:sp>
@@ -23674,11 +22227,6 @@
               </a:rPr>
               <a:t>−1.33 ***</a:t>
             </a:r>
-            <a:endParaRPr sz="1350" b="1">
-              <a:solidFill>
-                <a:srgbClr val="1B998B"/>
-              </a:solidFill>
-            </a:endParaRPr>
           </a:p>
         </p:txBody>
       </p:sp>
@@ -23723,6 +22271,7 @@
           <a:lstStyle/>
           <a:p>
             <a:pPr algn="ctr"/>
+            <a:endParaRPr/>
           </a:p>
         </p:txBody>
       </p:sp>
@@ -23764,11 +22313,6 @@
               </a:rPr>
               <a:t>13-Week</a:t>
             </a:r>
-            <a:endParaRPr sz="1350" b="0">
-              <a:solidFill>
-                <a:srgbClr val="33425C"/>
-              </a:solidFill>
-            </a:endParaRPr>
           </a:p>
         </p:txBody>
       </p:sp>
@@ -23813,6 +22357,7 @@
           <a:lstStyle/>
           <a:p>
             <a:pPr algn="ctr"/>
+            <a:endParaRPr/>
           </a:p>
         </p:txBody>
       </p:sp>
@@ -23854,11 +22399,6 @@
               </a:rPr>
               <a:t>−1.38 ***</a:t>
             </a:r>
-            <a:endParaRPr sz="1350" b="1">
-              <a:solidFill>
-                <a:srgbClr val="1B998B"/>
-              </a:solidFill>
-            </a:endParaRPr>
           </a:p>
         </p:txBody>
       </p:sp>
@@ -23903,6 +22443,7 @@
           <a:lstStyle/>
           <a:p>
             <a:pPr algn="ctr"/>
+            <a:endParaRPr/>
           </a:p>
         </p:txBody>
       </p:sp>
@@ -23944,11 +22485,6 @@
               </a:rPr>
               <a:t>−1.53 ***</a:t>
             </a:r>
-            <a:endParaRPr sz="1350" b="1">
-              <a:solidFill>
-                <a:srgbClr val="1B998B"/>
-              </a:solidFill>
-            </a:endParaRPr>
           </a:p>
         </p:txBody>
       </p:sp>
@@ -23993,6 +22529,7 @@
           <a:lstStyle/>
           <a:p>
             <a:pPr algn="ctr"/>
+            <a:endParaRPr/>
           </a:p>
         </p:txBody>
       </p:sp>
@@ -24034,11 +22571,6 @@
               </a:rPr>
               <a:t>−1.51 ***</a:t>
             </a:r>
-            <a:endParaRPr sz="1350" b="1">
-              <a:solidFill>
-                <a:srgbClr val="1B998B"/>
-              </a:solidFill>
-            </a:endParaRPr>
           </a:p>
         </p:txBody>
       </p:sp>
@@ -24083,6 +22615,7 @@
           <a:lstStyle/>
           <a:p>
             <a:pPr algn="ctr"/>
+            <a:endParaRPr/>
           </a:p>
         </p:txBody>
       </p:sp>
@@ -24124,11 +22657,6 @@
               </a:rPr>
               <a:t>26-Week</a:t>
             </a:r>
-            <a:endParaRPr sz="1350" b="0">
-              <a:solidFill>
-                <a:srgbClr val="33425C"/>
-              </a:solidFill>
-            </a:endParaRPr>
           </a:p>
         </p:txBody>
       </p:sp>
@@ -24173,6 +22701,7 @@
           <a:lstStyle/>
           <a:p>
             <a:pPr algn="ctr"/>
+            <a:endParaRPr/>
           </a:p>
         </p:txBody>
       </p:sp>
@@ -24214,11 +22743,6 @@
               </a:rPr>
               <a:t>−1.42 ***</a:t>
             </a:r>
-            <a:endParaRPr sz="1350" b="1">
-              <a:solidFill>
-                <a:srgbClr val="1B998B"/>
-              </a:solidFill>
-            </a:endParaRPr>
           </a:p>
         </p:txBody>
       </p:sp>
@@ -24263,6 +22787,7 @@
           <a:lstStyle/>
           <a:p>
             <a:pPr algn="ctr"/>
+            <a:endParaRPr/>
           </a:p>
         </p:txBody>
       </p:sp>
@@ -24304,11 +22829,6 @@
               </a:rPr>
               <a:t>−1.67 ***</a:t>
             </a:r>
-            <a:endParaRPr sz="1350" b="1">
-              <a:solidFill>
-                <a:srgbClr val="1B998B"/>
-              </a:solidFill>
-            </a:endParaRPr>
           </a:p>
         </p:txBody>
       </p:sp>
@@ -24353,6 +22873,7 @@
           <a:lstStyle/>
           <a:p>
             <a:pPr algn="ctr"/>
+            <a:endParaRPr/>
           </a:p>
         </p:txBody>
       </p:sp>
@@ -24394,11 +22915,6 @@
               </a:rPr>
               <a:t>−1.53 ***</a:t>
             </a:r>
-            <a:endParaRPr sz="1350" b="1">
-              <a:solidFill>
-                <a:srgbClr val="1B998B"/>
-              </a:solidFill>
-            </a:endParaRPr>
           </a:p>
         </p:txBody>
       </p:sp>
@@ -24443,6 +22959,7 @@
           <a:lstStyle/>
           <a:p>
             <a:pPr algn="ctr"/>
+            <a:endParaRPr/>
           </a:p>
         </p:txBody>
       </p:sp>
@@ -24484,11 +23001,6 @@
               </a:rPr>
               <a:t>Reading the result</a:t>
             </a:r>
-            <a:endParaRPr sz="1400" b="1">
-              <a:solidFill>
-                <a:srgbClr val="E8A12C"/>
-              </a:solidFill>
-            </a:endParaRPr>
           </a:p>
         </p:txBody>
       </p:sp>
@@ -24530,11 +23042,6 @@
               </a:rPr>
               <a:t>Removing the interpolated reserve controls (A→B) slightly strengthens the result. Adding offering-size control (B→C) barely moves 8/13/26-week. The channel does not depend on any single control choice.</a:t>
             </a:r>
-            <a:endParaRPr sz="1350" b="0">
-              <a:solidFill>
-                <a:srgbClr val="FFFFFF"/>
-              </a:solidFill>
-            </a:endParaRPr>
           </a:p>
         </p:txBody>
       </p:sp>
@@ -24576,11 +23083,6 @@
               </a:rPr>
               <a:t>Stablecoins &amp; the Exorbitant Privilege</a:t>
             </a:r>
-            <a:endParaRPr sz="900" b="0">
-              <a:solidFill>
-                <a:srgbClr val="5B6B82"/>
-              </a:solidFill>
-            </a:endParaRPr>
           </a:p>
         </p:txBody>
       </p:sp>
@@ -24616,12 +23118,6 @@
               </a:rPr>
               <a:t>9</a:t>
             </a:r>
-            <a:endParaRPr sz="1100" b="0">
-              <a:solidFill>
-                <a:srgbClr val="5B6B82"/>
-              </a:solidFill>
-              <a:latin typeface="Calibri"/>
-            </a:endParaRPr>
           </a:p>
         </p:txBody>
       </p:sp>
@@ -24656,11 +23152,6 @@
               </a:rPr>
               <a:t>BC_{m,t} = αₘ + β_USDT · ΔlnS^USDT_t + β_USDC · ΔlnS^USDC_t + δₘ · ln(Offering_{m,t}) + γ₁ · VIX_t + γ₂ · Δfedfunds_t + ε_t</a:t>
             </a:r>
-            <a:endParaRPr sz="1300" b="1">
-              <a:solidFill>
-                <a:srgbClr val="13294B"/>
-              </a:solidFill>
-            </a:endParaRPr>
           </a:p>
           <a:p>
             <a:pPr algn="ctr"/>
@@ -24672,11 +23163,6 @@
               </a:rPr>
               <a:t>Monthly OLS, N = 51, Newey-West HAC(1).  β_USDT shown across three nested specs.</a:t>
             </a:r>
-            <a:endParaRPr lang="en-US" sz="1050" b="0">
-              <a:solidFill>
-                <a:srgbClr val="5B6B82"/>
-              </a:solidFill>
-            </a:endParaRPr>
           </a:p>
         </p:txBody>
       </p:sp>
@@ -25004,6 +23490,7 @@
       </a:style>
     </a:lnDef>
   </a:objectDefaults>
+  <a:extraClrSchemeLst/>
   <a:extLst>
     <a:ext uri="{05A4C25C-085E-4340-85A3-A5531E510DB2}">
       <thm15:themeFamily xmlns:thm15="http://schemas.microsoft.com/office/thememl/2012/main" name="Office Theme" id="{62F939B6-93AF-4DB8-9C6B-D6C7DFDC589F}" vid="{4A3C46E8-61CC-4603-A589-7422A47A8E4A}"/>
